--- a/reports/pitch-deck/output/Lattice-investor-draft.pptx
+++ b/reports/pitch-deck/output/Lattice-investor-draft.pptx
@@ -1,32 +1,127 @@
 
 <file path=ppt/presentation.xml><?xml version="1.0" encoding="utf-8"?>
-<p:presentation xmlns:p="http://schemas.openxmlformats.org/presentationml/2006/main">
+<p:presentation xmlns:a="http://schemas.openxmlformats.org/drawingml/2006/main" xmlns:r="http://schemas.openxmlformats.org/officeDocument/2006/relationships" xmlns:p="http://schemas.openxmlformats.org/presentationml/2006/main">
   <p:sldMasterIdLst>
-    <p:sldMasterId xmlns:r="http://schemas.openxmlformats.org/officeDocument/2006/relationships" id="2147483648" r:id="R199181025c424686"/>
+    <p:sldMasterId id="2147483648" r:id="rId1"/>
   </p:sldMasterIdLst>
   <p:notesMasterIdLst>
-    <p:notesMasterId xmlns:r="http://schemas.openxmlformats.org/officeDocument/2006/relationships" r:id="Rc28d3ebfcabf499a"/>
+    <p:notesMasterId r:id="rId9"/>
   </p:notesMasterIdLst>
   <p:sldIdLst>
-    <p:sldId xmlns:r="http://schemas.openxmlformats.org/officeDocument/2006/relationships" id="256" r:id="Rea60fadba9bc4f81"/>
-    <p:sldId xmlns:r="http://schemas.openxmlformats.org/officeDocument/2006/relationships" id="257" r:id="R4a0cfed4b27b4e38"/>
-    <p:sldId xmlns:r="http://schemas.openxmlformats.org/officeDocument/2006/relationships" id="258" r:id="R27ef08deff014225"/>
-    <p:sldId xmlns:r="http://schemas.openxmlformats.org/officeDocument/2006/relationships" id="259" r:id="Re7ca781f7e854b6a"/>
-    <p:sldId xmlns:r="http://schemas.openxmlformats.org/officeDocument/2006/relationships" id="260" r:id="R2de006bb37874051"/>
-    <p:sldId xmlns:r="http://schemas.openxmlformats.org/officeDocument/2006/relationships" id="261" r:id="Rdc98c98f3d2146bb"/>
-    <p:sldId xmlns:r="http://schemas.openxmlformats.org/officeDocument/2006/relationships" id="262" r:id="Ra2eeeea731704f19"/>
+    <p:sldId id="256" r:id="rId2"/>
+    <p:sldId id="257" r:id="rId3"/>
+    <p:sldId id="258" r:id="rId4"/>
+    <p:sldId id="259" r:id="rId5"/>
+    <p:sldId id="260" r:id="rId6"/>
+    <p:sldId id="261" r:id="rId7"/>
+    <p:sldId id="262" r:id="rId8"/>
   </p:sldIdLst>
   <p:sldSz cx="12192000" cy="6858000"/>
   <p:notesSz cx="6858000" cy="9144000"/>
+  <p:defaultTextStyle>
+    <a:defPPr>
+      <a:defRPr lang="en-US"/>
+    </a:defPPr>
+    <a:lvl1pPr marL="0" algn="l" defTabSz="914400" rtl="0" eaLnBrk="1" latinLnBrk="0" hangingPunct="1">
+      <a:defRPr sz="1800" kern="1200">
+        <a:solidFill>
+          <a:schemeClr val="tx1"/>
+        </a:solidFill>
+        <a:latin typeface="+mn-lt"/>
+        <a:ea typeface="+mn-ea"/>
+        <a:cs typeface="+mn-cs"/>
+      </a:defRPr>
+    </a:lvl1pPr>
+    <a:lvl2pPr marL="457200" algn="l" defTabSz="914400" rtl="0" eaLnBrk="1" latinLnBrk="0" hangingPunct="1">
+      <a:defRPr sz="1800" kern="1200">
+        <a:solidFill>
+          <a:schemeClr val="tx1"/>
+        </a:solidFill>
+        <a:latin typeface="+mn-lt"/>
+        <a:ea typeface="+mn-ea"/>
+        <a:cs typeface="+mn-cs"/>
+      </a:defRPr>
+    </a:lvl2pPr>
+    <a:lvl3pPr marL="914400" algn="l" defTabSz="914400" rtl="0" eaLnBrk="1" latinLnBrk="0" hangingPunct="1">
+      <a:defRPr sz="1800" kern="1200">
+        <a:solidFill>
+          <a:schemeClr val="tx1"/>
+        </a:solidFill>
+        <a:latin typeface="+mn-lt"/>
+        <a:ea typeface="+mn-ea"/>
+        <a:cs typeface="+mn-cs"/>
+      </a:defRPr>
+    </a:lvl3pPr>
+    <a:lvl4pPr marL="1371600" algn="l" defTabSz="914400" rtl="0" eaLnBrk="1" latinLnBrk="0" hangingPunct="1">
+      <a:defRPr sz="1800" kern="1200">
+        <a:solidFill>
+          <a:schemeClr val="tx1"/>
+        </a:solidFill>
+        <a:latin typeface="+mn-lt"/>
+        <a:ea typeface="+mn-ea"/>
+        <a:cs typeface="+mn-cs"/>
+      </a:defRPr>
+    </a:lvl4pPr>
+    <a:lvl5pPr marL="1828800" algn="l" defTabSz="914400" rtl="0" eaLnBrk="1" latinLnBrk="0" hangingPunct="1">
+      <a:defRPr sz="1800" kern="1200">
+        <a:solidFill>
+          <a:schemeClr val="tx1"/>
+        </a:solidFill>
+        <a:latin typeface="+mn-lt"/>
+        <a:ea typeface="+mn-ea"/>
+        <a:cs typeface="+mn-cs"/>
+      </a:defRPr>
+    </a:lvl5pPr>
+    <a:lvl6pPr marL="2286000" algn="l" defTabSz="914400" rtl="0" eaLnBrk="1" latinLnBrk="0" hangingPunct="1">
+      <a:defRPr sz="1800" kern="1200">
+        <a:solidFill>
+          <a:schemeClr val="tx1"/>
+        </a:solidFill>
+        <a:latin typeface="+mn-lt"/>
+        <a:ea typeface="+mn-ea"/>
+        <a:cs typeface="+mn-cs"/>
+      </a:defRPr>
+    </a:lvl6pPr>
+    <a:lvl7pPr marL="2743200" algn="l" defTabSz="914400" rtl="0" eaLnBrk="1" latinLnBrk="0" hangingPunct="1">
+      <a:defRPr sz="1800" kern="1200">
+        <a:solidFill>
+          <a:schemeClr val="tx1"/>
+        </a:solidFill>
+        <a:latin typeface="+mn-lt"/>
+        <a:ea typeface="+mn-ea"/>
+        <a:cs typeface="+mn-cs"/>
+      </a:defRPr>
+    </a:lvl7pPr>
+    <a:lvl8pPr marL="3200400" algn="l" defTabSz="914400" rtl="0" eaLnBrk="1" latinLnBrk="0" hangingPunct="1">
+      <a:defRPr sz="1800" kern="1200">
+        <a:solidFill>
+          <a:schemeClr val="tx1"/>
+        </a:solidFill>
+        <a:latin typeface="+mn-lt"/>
+        <a:ea typeface="+mn-ea"/>
+        <a:cs typeface="+mn-cs"/>
+      </a:defRPr>
+    </a:lvl8pPr>
+    <a:lvl9pPr marL="3657600" algn="l" defTabSz="914400" rtl="0" eaLnBrk="1" latinLnBrk="0" hangingPunct="1">
+      <a:defRPr sz="1800" kern="1200">
+        <a:solidFill>
+          <a:schemeClr val="tx1"/>
+        </a:solidFill>
+        <a:latin typeface="+mn-lt"/>
+        <a:ea typeface="+mn-ea"/>
+        <a:cs typeface="+mn-cs"/>
+      </a:defRPr>
+    </a:lvl9pPr>
+  </p:defaultTextStyle>
 </p:presentation>
 </file>
 
 <file path=ppt/notesMasters/notesMaster1.xml><?xml version="1.0" encoding="utf-8"?>
-<p:notesMaster xmlns:p="http://schemas.openxmlformats.org/presentationml/2006/main">
+<p:notesMaster xmlns:a="http://schemas.openxmlformats.org/drawingml/2006/main" xmlns:r="http://schemas.openxmlformats.org/officeDocument/2006/relationships" xmlns:p="http://schemas.openxmlformats.org/presentationml/2006/main">
   <p:cSld>
     <p:bg>
       <p:bgRef idx="1001">
-        <a:schemeClr xmlns:a="http://schemas.openxmlformats.org/drawingml/2006/main" val="bg1"/>
+        <a:schemeClr val="bg1"/>
       </p:bgRef>
     </p:bg>
     <p:spTree>
@@ -36,380 +131,164 @@
         <p:nvPr/>
       </p:nvGrpSpPr>
       <p:grpSpPr>
-        <a:xfrm xmlns:a="http://schemas.openxmlformats.org/drawingml/2006/main"/>
+        <a:xfrm>
+          <a:off x="0" y="0"/>
+          <a:ext cx="0" cy="0"/>
+          <a:chOff x="0" y="0"/>
+          <a:chExt cx="0" cy="0"/>
+        </a:xfrm>
       </p:grpSpPr>
       <p:sp>
         <p:nvSpPr>
           <p:cNvPr id="2" name="Header Placeholder"/>
-          <p:cNvSpPr/>
+          <p:cNvSpPr>
+            <a:spLocks noGrp="1"/>
+          </p:cNvSpPr>
           <p:nvPr>
             <p:ph type="hdr" sz="quarter"/>
           </p:nvPr>
         </p:nvSpPr>
         <p:spPr>
-          <a:prstGeom xmlns:a="http://schemas.openxmlformats.org/drawingml/2006/main" prst="rect">
-            <a:avLst/>
-          </a:prstGeom>
-        </p:spPr>
-        <p:txBody>
-          <a:bodyPr xmlns:a="http://schemas.openxmlformats.org/drawingml/2006/main"/>
-          <a:lstStyle xmlns:a="http://schemas.openxmlformats.org/drawingml/2006/main"/>
-          <a:p xmlns:a="http://schemas.openxmlformats.org/drawingml/2006/main"/>
+          <a:prstGeom prst="rect">
+            <a:avLst/>
+          </a:prstGeom>
+        </p:spPr>
+        <p:txBody>
+          <a:bodyPr/>
+          <a:lstStyle/>
+          <a:p>
+            <a:endParaRPr/>
+          </a:p>
         </p:txBody>
       </p:sp>
       <p:sp>
         <p:nvSpPr>
           <p:cNvPr id="3" name="Date Placeholder"/>
-          <p:cNvSpPr/>
+          <p:cNvSpPr>
+            <a:spLocks noGrp="1"/>
+          </p:cNvSpPr>
           <p:nvPr>
             <p:ph type="dt" sz="quarter" idx="1"/>
           </p:nvPr>
         </p:nvSpPr>
         <p:spPr>
-          <a:prstGeom xmlns:a="http://schemas.openxmlformats.org/drawingml/2006/main" prst="rect">
-            <a:avLst/>
-          </a:prstGeom>
-        </p:spPr>
-        <p:txBody>
-          <a:bodyPr xmlns:a="http://schemas.openxmlformats.org/drawingml/2006/main"/>
-          <a:lstStyle xmlns:a="http://schemas.openxmlformats.org/drawingml/2006/main"/>
-          <a:p xmlns:a="http://schemas.openxmlformats.org/drawingml/2006/main"/>
+          <a:prstGeom prst="rect">
+            <a:avLst/>
+          </a:prstGeom>
+        </p:spPr>
+        <p:txBody>
+          <a:bodyPr/>
+          <a:lstStyle/>
+          <a:p>
+            <a:endParaRPr/>
+          </a:p>
         </p:txBody>
       </p:sp>
       <p:sp>
         <p:nvSpPr>
           <p:cNvPr id="4" name="Slide Image Placeholder"/>
-          <p:cNvSpPr/>
+          <p:cNvSpPr>
+            <a:spLocks noGrp="1" noRot="1" noChangeAspect="1"/>
+          </p:cNvSpPr>
           <p:nvPr>
             <p:ph type="sldImg" idx="2"/>
           </p:nvPr>
         </p:nvSpPr>
         <p:spPr>
-          <a:prstGeom xmlns:a="http://schemas.openxmlformats.org/drawingml/2006/main" prst="rect">
-            <a:avLst/>
-          </a:prstGeom>
-        </p:spPr>
-        <p:txBody>
-          <a:bodyPr xmlns:a="http://schemas.openxmlformats.org/drawingml/2006/main"/>
-          <a:lstStyle xmlns:a="http://schemas.openxmlformats.org/drawingml/2006/main"/>
-          <a:p xmlns:a="http://schemas.openxmlformats.org/drawingml/2006/main"/>
+          <a:prstGeom prst="rect">
+            <a:avLst/>
+          </a:prstGeom>
+        </p:spPr>
+        <p:txBody>
+          <a:bodyPr/>
+          <a:lstStyle/>
+          <a:p>
+            <a:endParaRPr/>
+          </a:p>
         </p:txBody>
       </p:sp>
       <p:sp>
         <p:nvSpPr>
           <p:cNvPr id="5" name="Notes Placeholder"/>
-          <p:cNvSpPr/>
+          <p:cNvSpPr>
+            <a:spLocks noGrp="1"/>
+          </p:cNvSpPr>
           <p:nvPr>
             <p:ph type="body" sz="quarter" idx="3"/>
           </p:nvPr>
         </p:nvSpPr>
         <p:spPr>
-          <a:prstGeom xmlns:a="http://schemas.openxmlformats.org/drawingml/2006/main" prst="rect">
-            <a:avLst/>
-          </a:prstGeom>
-        </p:spPr>
-        <p:txBody>
-          <a:bodyPr xmlns:a="http://schemas.openxmlformats.org/drawingml/2006/main"/>
-          <a:lstStyle xmlns:a="http://schemas.openxmlformats.org/drawingml/2006/main"/>
-          <a:p xmlns:a="http://schemas.openxmlformats.org/drawingml/2006/main"/>
+          <a:prstGeom prst="rect">
+            <a:avLst/>
+          </a:prstGeom>
+        </p:spPr>
+        <p:txBody>
+          <a:bodyPr/>
+          <a:lstStyle/>
+          <a:p>
+            <a:endParaRPr/>
+          </a:p>
         </p:txBody>
       </p:sp>
       <p:sp>
         <p:nvSpPr>
           <p:cNvPr id="6" name="Footer Placeholder"/>
-          <p:cNvSpPr/>
+          <p:cNvSpPr>
+            <a:spLocks noGrp="1"/>
+          </p:cNvSpPr>
           <p:nvPr>
             <p:ph type="ftr" sz="quarter" idx="4"/>
           </p:nvPr>
         </p:nvSpPr>
         <p:spPr>
-          <a:prstGeom xmlns:a="http://schemas.openxmlformats.org/drawingml/2006/main" prst="rect">
-            <a:avLst/>
-          </a:prstGeom>
-        </p:spPr>
-        <p:txBody>
-          <a:bodyPr xmlns:a="http://schemas.openxmlformats.org/drawingml/2006/main"/>
-          <a:lstStyle xmlns:a="http://schemas.openxmlformats.org/drawingml/2006/main"/>
-          <a:p xmlns:a="http://schemas.openxmlformats.org/drawingml/2006/main"/>
+          <a:prstGeom prst="rect">
+            <a:avLst/>
+          </a:prstGeom>
+        </p:spPr>
+        <p:txBody>
+          <a:bodyPr/>
+          <a:lstStyle/>
+          <a:p>
+            <a:endParaRPr/>
+          </a:p>
         </p:txBody>
       </p:sp>
       <p:sp>
         <p:nvSpPr>
           <p:cNvPr id="7" name="Slide Number Placeholder"/>
-          <p:cNvSpPr/>
+          <p:cNvSpPr>
+            <a:spLocks noGrp="1"/>
+          </p:cNvSpPr>
           <p:nvPr>
             <p:ph type="sldNum" sz="quarter" idx="5"/>
           </p:nvPr>
         </p:nvSpPr>
         <p:spPr>
-          <a:prstGeom xmlns:a="http://schemas.openxmlformats.org/drawingml/2006/main" prst="rect">
-            <a:avLst/>
-          </a:prstGeom>
-        </p:spPr>
-        <p:txBody>
-          <a:bodyPr xmlns:a="http://schemas.openxmlformats.org/drawingml/2006/main"/>
-          <a:lstStyle xmlns:a="http://schemas.openxmlformats.org/drawingml/2006/main"/>
-          <a:p xmlns:a="http://schemas.openxmlformats.org/drawingml/2006/main"/>
+          <a:prstGeom prst="rect">
+            <a:avLst/>
+          </a:prstGeom>
+        </p:spPr>
+        <p:txBody>
+          <a:bodyPr/>
+          <a:lstStyle/>
+          <a:p>
+            <a:endParaRPr/>
+          </a:p>
         </p:txBody>
       </p:sp>
     </p:spTree>
   </p:cSld>
   <p:clrMap bg1="lt1" tx1="dk1" bg2="lt2" tx2="dk2" accent1="accent1" accent2="accent2" accent3="accent3" accent4="accent4" accent5="accent5" accent6="accent6" hlink="hlink" folHlink="folHlink"/>
   <p:notesStyle>
-    <a:lvl1pPr xmlns:a="http://schemas.openxmlformats.org/drawingml/2006/main" marL="0" algn="l" defTabSz="914400" rtl="0" eaLnBrk="1" latinLnBrk="0" hangingPunct="1">
+    <a:lvl1pPr marL="0" algn="l" defTabSz="914400" rtl="0" eaLnBrk="1" latinLnBrk="0" hangingPunct="1">
       <a:defRPr sz="1200" kern="1200"/>
     </a:lvl1pPr>
   </p:notesStyle>
 </p:notesMaster>
 </file>
 
-<file path=ppt/notesMasters/theme/theme3.xml><?xml version="1.0" encoding="utf-8"?>
-<a:theme xmlns:a="http://schemas.openxmlformats.org/drawingml/2006/main" name="ChatGPT">
-  <a:themeElements>
-    <a:clrScheme name="ChatGPT">
-      <a:dk1>
-        <a:srgbClr val="000000"/>
-      </a:dk1>
-      <a:lt1>
-        <a:srgbClr val="FFFFFF"/>
-      </a:lt1>
-      <a:dk2>
-        <a:srgbClr val="0E2841"/>
-      </a:dk2>
-      <a:lt2>
-        <a:srgbClr val="E8E8E8"/>
-      </a:lt2>
-      <a:accent1>
-        <a:srgbClr val="156082"/>
-      </a:accent1>
-      <a:accent2>
-        <a:srgbClr val="E97132"/>
-      </a:accent2>
-      <a:accent3>
-        <a:srgbClr val="196B24"/>
-      </a:accent3>
-      <a:accent4>
-        <a:srgbClr val="0F9ED5"/>
-      </a:accent4>
-      <a:accent5>
-        <a:srgbClr val="A02B93"/>
-      </a:accent5>
-      <a:accent6>
-        <a:srgbClr val="4EA72E"/>
-      </a:accent6>
-      <a:hlink>
-        <a:srgbClr val="467886"/>
-      </a:hlink>
-      <a:folHlink>
-        <a:srgbClr val="96607D"/>
-      </a:folHlink>
-    </a:clrScheme>
-    <a:fontScheme name="Office">
-      <a:majorFont>
-        <a:latin typeface="Calibri Light"/>
-        <a:ea typeface="Calibri Light"/>
-        <a:cs typeface="Calibri Light"/>
-      </a:majorFont>
-      <a:minorFont>
-        <a:latin typeface="Calibri"/>
-        <a:ea typeface="Calibri"/>
-        <a:cs typeface="Calibri"/>
-      </a:minorFont>
-    </a:fontScheme>
-    <a:fmtScheme name="ChatGPT">
-      <a:fillStyleLst>
-        <a:solidFill>
-          <a:schemeClr val="phClr"/>
-        </a:solidFill>
-        <a:gradFill>
-          <a:gsLst>
-            <a:gs pos="0">
-              <a:schemeClr val="phClr">
-                <a:tint val="67000"/>
-                <a:lumMod val="110000"/>
-                <a:satMod val="105000"/>
-              </a:schemeClr>
-            </a:gs>
-            <a:gs pos="50000">
-              <a:schemeClr val="phClr">
-                <a:tint val="73000"/>
-                <a:lumMod val="105000"/>
-                <a:satMod val="103000"/>
-              </a:schemeClr>
-            </a:gs>
-            <a:gs pos="100000">
-              <a:schemeClr val="phClr">
-                <a:tint val="81000"/>
-                <a:lumMod val="105000"/>
-                <a:satMod val="109000"/>
-              </a:schemeClr>
-            </a:gs>
-          </a:gsLst>
-          <a:lin ang="5400000" scaled="0"/>
-        </a:gradFill>
-        <a:gradFill>
-          <a:gsLst>
-            <a:gs pos="0">
-              <a:schemeClr val="phClr">
-                <a:tint val="94000"/>
-                <a:lumMod val="102000"/>
-                <a:satMod val="103000"/>
-              </a:schemeClr>
-            </a:gs>
-            <a:gs pos="50000">
-              <a:schemeClr val="phClr">
-                <a:shade val="100000"/>
-                <a:lumMod val="100000"/>
-                <a:satMod val="110000"/>
-              </a:schemeClr>
-            </a:gs>
-            <a:gs pos="100000">
-              <a:schemeClr val="phClr">
-                <a:shade val="78000"/>
-                <a:lumMod val="99000"/>
-                <a:satMod val="120000"/>
-              </a:schemeClr>
-            </a:gs>
-          </a:gsLst>
-          <a:lin ang="5400000" scaled="0"/>
-        </a:gradFill>
-      </a:fillStyleLst>
-      <a:lnStyleLst>
-        <a:ln w="12700">
-          <a:solidFill>
-            <a:schemeClr val="phClr"/>
-          </a:solidFill>
-          <a:prstDash val="solid"/>
-        </a:ln>
-        <a:ln w="19050">
-          <a:solidFill>
-            <a:schemeClr val="phClr"/>
-          </a:solidFill>
-          <a:prstDash val="solid"/>
-        </a:ln>
-        <a:ln w="25400">
-          <a:solidFill>
-            <a:schemeClr val="phClr"/>
-          </a:solidFill>
-          <a:prstDash val="solid"/>
-        </a:ln>
-      </a:lnStyleLst>
-      <a:effectStyleLst>
-        <a:effectStyle>
-          <a:effectLst/>
-        </a:effectStyle>
-        <a:effectStyle>
-          <a:effectLst/>
-        </a:effectStyle>
-        <a:effectStyle>
-          <a:effectLst>
-            <a:outerShdw blurRad="57150" dist="19050" dir="5400000">
-              <a:srgbClr val="000000">
-                <a:alpha val="16000"/>
-              </a:srgbClr>
-            </a:outerShdw>
-          </a:effectLst>
-        </a:effectStyle>
-        <a:effectStyle>
-          <a:effectLst>
-            <a:outerShdw blurRad="19050" dist="9525" dir="5400000">
-              <a:srgbClr val="000000">
-                <a:alpha val="6000"/>
-              </a:srgbClr>
-            </a:outerShdw>
-          </a:effectLst>
-        </a:effectStyle>
-        <a:effectStyle>
-          <a:effectLst>
-            <a:outerShdw blurRad="28575" dist="9525" dir="5400000">
-              <a:srgbClr val="000000">
-                <a:alpha val="8000"/>
-              </a:srgbClr>
-            </a:outerShdw>
-          </a:effectLst>
-        </a:effectStyle>
-        <a:effectStyle>
-          <a:effectLst>
-            <a:outerShdw blurRad="57150" dist="19050" dir="5400000">
-              <a:srgbClr val="000000">
-                <a:alpha val="10000"/>
-              </a:srgbClr>
-            </a:outerShdw>
-          </a:effectLst>
-        </a:effectStyle>
-        <a:effectStyle>
-          <a:effectLst>
-            <a:outerShdw blurRad="114300" dist="38100" dir="5400000">
-              <a:srgbClr val="000000">
-                <a:alpha val="12000"/>
-              </a:srgbClr>
-            </a:outerShdw>
-          </a:effectLst>
-        </a:effectStyle>
-        <a:effectStyle>
-          <a:effectLst>
-            <a:outerShdw blurRad="171450" dist="57150" dir="5400000">
-              <a:srgbClr val="000000">
-                <a:alpha val="16000"/>
-              </a:srgbClr>
-            </a:outerShdw>
-          </a:effectLst>
-        </a:effectStyle>
-        <a:effectStyle>
-          <a:effectLst>
-            <a:outerShdw blurRad="266700" dist="95250" dir="5400000">
-              <a:srgbClr val="000000">
-                <a:alpha val="24000"/>
-              </a:srgbClr>
-            </a:outerShdw>
-          </a:effectLst>
-        </a:effectStyle>
-      </a:effectStyleLst>
-      <a:bgFillStyleLst>
-        <a:solidFill>
-          <a:schemeClr val="phClr"/>
-        </a:solidFill>
-        <a:solidFill>
-          <a:schemeClr val="phClr">
-            <a:tint val="95000"/>
-            <a:satMod val="170000"/>
-          </a:schemeClr>
-        </a:solidFill>
-        <a:gradFill>
-          <a:gsLst>
-            <a:gs pos="0">
-              <a:schemeClr val="phClr">
-                <a:tint val="93000"/>
-                <a:shade val="98000"/>
-                <a:lumMod val="102000"/>
-                <a:satMod val="150000"/>
-              </a:schemeClr>
-            </a:gs>
-            <a:gs pos="50000">
-              <a:schemeClr val="phClr">
-                <a:tint val="98000"/>
-                <a:shade val="90000"/>
-                <a:lumMod val="103000"/>
-                <a:satMod val="130000"/>
-              </a:schemeClr>
-            </a:gs>
-            <a:gs pos="100000">
-              <a:schemeClr val="phClr">
-                <a:shade val="63000"/>
-                <a:satMod val="120000"/>
-              </a:schemeClr>
-            </a:gs>
-          </a:gsLst>
-          <a:lin ang="5400000" scaled="0"/>
-        </a:gradFill>
-      </a:bgFillStyleLst>
-    </a:fmtScheme>
-  </a:themeElements>
-</a:theme>
-</file>
-
 <file path=ppt/notesSlides/notesSlide1.xml><?xml version="1.0" encoding="utf-8"?>
-<p:notes xmlns:p="http://schemas.openxmlformats.org/presentationml/2006/main">
+<p:notes xmlns:a="http://schemas.openxmlformats.org/drawingml/2006/main" xmlns:r="http://schemas.openxmlformats.org/officeDocument/2006/relationships" xmlns:p="http://schemas.openxmlformats.org/presentationml/2006/main">
   <p:cSld>
     <p:spTree>
       <p:nvGrpSpPr>
@@ -418,16 +297,21 @@
         <p:nvPr/>
       </p:nvGrpSpPr>
       <p:grpSpPr>
-        <a:xfrm xmlns:a="http://schemas.openxmlformats.org/drawingml/2006/main"/>
+        <a:xfrm>
+          <a:off x="0" y="0"/>
+          <a:ext cx="0" cy="0"/>
+          <a:chOff x="0" y="0"/>
+          <a:chExt cx="0" cy="0"/>
+        </a:xfrm>
       </p:grpSpPr>
       <p:sp>
         <p:nvSpPr>
           <p:cNvPr id="2" name="Slide Image Placeholder 1"/>
           <p:cNvSpPr>
-            <a:spLocks xmlns:a="http://schemas.openxmlformats.org/drawingml/2006/main" noGrp="1"/>
+            <a:spLocks noGrp="1" noRot="1" noChangeAspect="1"/>
           </p:cNvSpPr>
           <p:nvPr>
-            <p:ph type="sldImg" idx="0"/>
+            <p:ph type="sldImg"/>
           </p:nvPr>
         </p:nvSpPr>
         <p:spPr/>
@@ -436,7 +320,7 @@
         <p:nvSpPr>
           <p:cNvPr id="3" name="Notes Placeholder 2"/>
           <p:cNvSpPr>
-            <a:spLocks xmlns:a="http://schemas.openxmlformats.org/drawingml/2006/main" noGrp="1"/>
+            <a:spLocks noGrp="1"/>
           </p:cNvSpPr>
           <p:nvPr>
             <p:ph type="body" idx="1"/>
@@ -444,24 +328,24 @@
         </p:nvSpPr>
         <p:spPr/>
         <p:txBody>
-          <a:bodyPr xmlns:a="http://schemas.openxmlformats.org/drawingml/2006/main"/>
-          <a:lstStyle xmlns:a="http://schemas.openxmlformats.org/drawingml/2006/main"/>
-          <a:p xmlns:a="http://schemas.openxmlformats.org/drawingml/2006/main">
+          <a:bodyPr/>
+          <a:lstStyle/>
+          <a:p>
             <a:r>
               <a:t>Source: reports/outreach/copy/pitch.md, 2026-09-14. Editorial draft from the existing investor brief.</a:t>
             </a:r>
           </a:p>
-          <a:p xmlns:a="http://schemas.openxmlformats.org/drawingml/2006/main">
+          <a:p>
             <a:r>
               <a:t>Lattice is the working company name in the founder brief. Opening: Textile manufacturing needs a microfibre number while the process can still respond. We are developing measurement at the dye-machine outlet. The technology is pre-prototype, not a validated product.</a:t>
             </a:r>
           </a:p>
-          <a:p xmlns:a="http://schemas.openxmlformats.org/drawingml/2006/main">
+          <a:p>
             <a:r>
               <a:t>Cover artwork generated with OpenAI image generation: false-colour violet textile fibre on black, cream pixel dithering and cyan detection highlight. Conceptual brand artwork, not laboratory evidence.</a:t>
             </a:r>
           </a:p>
-          <a:p xmlns:a="http://schemas.openxmlformats.org/drawingml/2006/main">
+          <a:p>
             <a:r>
               <a:t>Name/relationship to Baltic Jungle Lab remains a founder decision.</a:t>
             </a:r>
@@ -472,7 +356,7 @@
         <p:nvSpPr>
           <p:cNvPr id="4" name="Slide Number Placeholder 3"/>
           <p:cNvSpPr>
-            <a:spLocks xmlns:a="http://schemas.openxmlformats.org/drawingml/2006/main" noGrp="1"/>
+            <a:spLocks noGrp="1"/>
           </p:cNvSpPr>
           <p:nvPr>
             <p:ph type="sldNum" idx="5"/>
@@ -480,21 +364,23 @@
         </p:nvSpPr>
         <p:spPr/>
         <p:txBody>
-          <a:bodyPr xmlns:a="http://schemas.openxmlformats.org/drawingml/2006/main"/>
-          <a:lstStyle xmlns:a="http://schemas.openxmlformats.org/drawingml/2006/main"/>
-          <a:p xmlns:a="http://schemas.openxmlformats.org/drawingml/2006/main"/>
+          <a:bodyPr/>
+          <a:lstStyle/>
+          <a:p>
+            <a:endParaRPr/>
+          </a:p>
         </p:txBody>
       </p:sp>
     </p:spTree>
   </p:cSld>
   <p:clrMapOvr>
-    <a:masterClrMapping xmlns:a="http://schemas.openxmlformats.org/drawingml/2006/main"/>
+    <a:masterClrMapping/>
   </p:clrMapOvr>
 </p:notes>
 </file>
 
 <file path=ppt/notesSlides/notesSlide2.xml><?xml version="1.0" encoding="utf-8"?>
-<p:notes xmlns:p="http://schemas.openxmlformats.org/presentationml/2006/main">
+<p:notes xmlns:a="http://schemas.openxmlformats.org/drawingml/2006/main" xmlns:r="http://schemas.openxmlformats.org/officeDocument/2006/relationships" xmlns:p="http://schemas.openxmlformats.org/presentationml/2006/main">
   <p:cSld>
     <p:spTree>
       <p:nvGrpSpPr>
@@ -503,16 +389,21 @@
         <p:nvPr/>
       </p:nvGrpSpPr>
       <p:grpSpPr>
-        <a:xfrm xmlns:a="http://schemas.openxmlformats.org/drawingml/2006/main"/>
+        <a:xfrm>
+          <a:off x="0" y="0"/>
+          <a:ext cx="0" cy="0"/>
+          <a:chOff x="0" y="0"/>
+          <a:chExt cx="0" cy="0"/>
+        </a:xfrm>
       </p:grpSpPr>
       <p:sp>
         <p:nvSpPr>
           <p:cNvPr id="2" name="Slide Image Placeholder 1"/>
           <p:cNvSpPr>
-            <a:spLocks xmlns:a="http://schemas.openxmlformats.org/drawingml/2006/main" noGrp="1"/>
+            <a:spLocks noGrp="1" noRot="1" noChangeAspect="1"/>
           </p:cNvSpPr>
           <p:nvPr>
-            <p:ph type="sldImg" idx="0"/>
+            <p:ph type="sldImg"/>
           </p:nvPr>
         </p:nvSpPr>
         <p:spPr/>
@@ -521,7 +412,7 @@
         <p:nvSpPr>
           <p:cNvPr id="3" name="Notes Placeholder 2"/>
           <p:cNvSpPr>
-            <a:spLocks xmlns:a="http://schemas.openxmlformats.org/drawingml/2006/main" noGrp="1"/>
+            <a:spLocks noGrp="1"/>
           </p:cNvSpPr>
           <p:nvPr>
             <p:ph type="body" idx="1"/>
@@ -529,24 +420,24 @@
         </p:nvSpPr>
         <p:spPr/>
         <p:txBody>
-          <a:bodyPr xmlns:a="http://schemas.openxmlformats.org/drawingml/2006/main"/>
-          <a:lstStyle xmlns:a="http://schemas.openxmlformats.org/drawingml/2006/main"/>
-          <a:p xmlns:a="http://schemas.openxmlformats.org/drawingml/2006/main">
+          <a:bodyPr/>
+          <a:lstStyle/>
+          <a:p>
             <a:r>
               <a:t>Source: reports/outreach/copy/pitch.md, 2026-09-14. Editorial draft from the existing investor brief.</a:t>
             </a:r>
           </a:p>
-          <a:p xmlns:a="http://schemas.openxmlformats.org/drawingml/2006/main">
+          <a:p>
             <a:r>
               <a:t>Evidence E7: H&amp;M supplier wastewater control uses TSS (30 mg/L), not fibre counts. The team reported that it does not necessarily control microfibre directly. Quote kept in context.</a:t>
             </a:r>
           </a:p>
-          <a:p xmlns:a="http://schemas.openxmlformats.org/drawingml/2006/main">
+          <a:p>
             <a:r>
               <a:t>Evidence E15: Measurlabs micro-Raman wastewater analysis, €390 per sample plus €97 order fee, results four weeks after receipt. This is one commercial example, not a universal turnaround. https://measurlabs.com/products/microplastics-in-water-and-wastewater-micro-raman/</a:t>
             </a:r>
           </a:p>
-          <a:p xmlns:a="http://schemas.openxmlformats.org/drawingml/2006/main">
+          <a:p>
             <a:r>
               <a:t>Sources: reports/03-validation/evidence.md, E3, E7, E15.</a:t>
             </a:r>
@@ -557,7 +448,7 @@
         <p:nvSpPr>
           <p:cNvPr id="4" name="Slide Number Placeholder 3"/>
           <p:cNvSpPr>
-            <a:spLocks xmlns:a="http://schemas.openxmlformats.org/drawingml/2006/main" noGrp="1"/>
+            <a:spLocks noGrp="1"/>
           </p:cNvSpPr>
           <p:nvPr>
             <p:ph type="sldNum" idx="5"/>
@@ -565,21 +456,23 @@
         </p:nvSpPr>
         <p:spPr/>
         <p:txBody>
-          <a:bodyPr xmlns:a="http://schemas.openxmlformats.org/drawingml/2006/main"/>
-          <a:lstStyle xmlns:a="http://schemas.openxmlformats.org/drawingml/2006/main"/>
-          <a:p xmlns:a="http://schemas.openxmlformats.org/drawingml/2006/main"/>
+          <a:bodyPr/>
+          <a:lstStyle/>
+          <a:p>
+            <a:endParaRPr/>
+          </a:p>
         </p:txBody>
       </p:sp>
     </p:spTree>
   </p:cSld>
   <p:clrMapOvr>
-    <a:masterClrMapping xmlns:a="http://schemas.openxmlformats.org/drawingml/2006/main"/>
+    <a:masterClrMapping/>
   </p:clrMapOvr>
 </p:notes>
 </file>
 
 <file path=ppt/notesSlides/notesSlide3.xml><?xml version="1.0" encoding="utf-8"?>
-<p:notes xmlns:p="http://schemas.openxmlformats.org/presentationml/2006/main">
+<p:notes xmlns:a="http://schemas.openxmlformats.org/drawingml/2006/main" xmlns:r="http://schemas.openxmlformats.org/officeDocument/2006/relationships" xmlns:p="http://schemas.openxmlformats.org/presentationml/2006/main">
   <p:cSld>
     <p:spTree>
       <p:nvGrpSpPr>
@@ -588,16 +481,21 @@
         <p:nvPr/>
       </p:nvGrpSpPr>
       <p:grpSpPr>
-        <a:xfrm xmlns:a="http://schemas.openxmlformats.org/drawingml/2006/main"/>
+        <a:xfrm>
+          <a:off x="0" y="0"/>
+          <a:ext cx="0" cy="0"/>
+          <a:chOff x="0" y="0"/>
+          <a:chExt cx="0" cy="0"/>
+        </a:xfrm>
       </p:grpSpPr>
       <p:sp>
         <p:nvSpPr>
           <p:cNvPr id="2" name="Slide Image Placeholder 1"/>
           <p:cNvSpPr>
-            <a:spLocks xmlns:a="http://schemas.openxmlformats.org/drawingml/2006/main" noGrp="1"/>
+            <a:spLocks noGrp="1" noRot="1" noChangeAspect="1"/>
           </p:cNvSpPr>
           <p:nvPr>
-            <p:ph type="sldImg" idx="0"/>
+            <p:ph type="sldImg"/>
           </p:nvPr>
         </p:nvSpPr>
         <p:spPr/>
@@ -606,7 +504,7 @@
         <p:nvSpPr>
           <p:cNvPr id="3" name="Notes Placeholder 2"/>
           <p:cNvSpPr>
-            <a:spLocks xmlns:a="http://schemas.openxmlformats.org/drawingml/2006/main" noGrp="1"/>
+            <a:spLocks noGrp="1"/>
           </p:cNvSpPr>
           <p:nvPr>
             <p:ph type="body" idx="1"/>
@@ -614,29 +512,29 @@
         </p:nvSpPr>
         <p:spPr/>
         <p:txBody>
-          <a:bodyPr xmlns:a="http://schemas.openxmlformats.org/drawingml/2006/main"/>
-          <a:lstStyle xmlns:a="http://schemas.openxmlformats.org/drawingml/2006/main"/>
-          <a:p xmlns:a="http://schemas.openxmlformats.org/drawingml/2006/main">
+          <a:bodyPr/>
+          <a:lstStyle/>
+          <a:p>
             <a:r>
               <a:t>Source: reports/outreach/copy/pitch.md, 2026-09-14. Editorial draft from the existing investor brief.</a:t>
             </a:r>
           </a:p>
-          <a:p xmlns:a="http://schemas.openxmlformats.org/drawingml/2006/main">
+          <a:p>
             <a:r>
               <a:t>Proposed at-line architecture from the optical technology brief, 2026-09-07, private/tech/optical-tech-brief-2026-09-07.pdf. Discharge bypass, conditioning, membrane capture, polarised imaging, classifier, output linked to stage, batch and machine.</a:t>
             </a:r>
           </a:p>
-          <a:p xmlns:a="http://schemas.openxmlformats.org/drawingml/2006/main">
+          <a:p>
             <a:r>
               <a:t>Count and size first. Synthetic versus natural classification remains a testable technical target. Do not claim that natural fibres universally stay dark under crossed polarisers. Do not assert polymer identity, accuracy or a measured response time.</a:t>
             </a:r>
           </a:p>
-          <a:p xmlns:a="http://schemas.openxmlformats.org/drawingml/2006/main">
+          <a:p>
             <a:r>
               <a:t>Evidence E10: adidas prioritises size distribution and identifies contrast/background noise in dyed effluent as a key risk. Evidence E8: interest in before/after ETP measurement without flow stoppage.</a:t>
             </a:r>
           </a:p>
-          <a:p xmlns:a="http://schemas.openxmlformats.org/drawingml/2006/main">
+          <a:p>
             <a:r>
               <a:t>Current state in the source brief: imaging-rig design exists. Stage 0 has not run and the lab kit is planned after investment.</a:t>
             </a:r>
@@ -647,7 +545,7 @@
         <p:nvSpPr>
           <p:cNvPr id="4" name="Slide Number Placeholder 3"/>
           <p:cNvSpPr>
-            <a:spLocks xmlns:a="http://schemas.openxmlformats.org/drawingml/2006/main" noGrp="1"/>
+            <a:spLocks noGrp="1"/>
           </p:cNvSpPr>
           <p:nvPr>
             <p:ph type="sldNum" idx="5"/>
@@ -655,21 +553,23 @@
         </p:nvSpPr>
         <p:spPr/>
         <p:txBody>
-          <a:bodyPr xmlns:a="http://schemas.openxmlformats.org/drawingml/2006/main"/>
-          <a:lstStyle xmlns:a="http://schemas.openxmlformats.org/drawingml/2006/main"/>
-          <a:p xmlns:a="http://schemas.openxmlformats.org/drawingml/2006/main"/>
+          <a:bodyPr/>
+          <a:lstStyle/>
+          <a:p>
+            <a:endParaRPr/>
+          </a:p>
         </p:txBody>
       </p:sp>
     </p:spTree>
   </p:cSld>
   <p:clrMapOvr>
-    <a:masterClrMapping xmlns:a="http://schemas.openxmlformats.org/drawingml/2006/main"/>
+    <a:masterClrMapping/>
   </p:clrMapOvr>
 </p:notes>
 </file>
 
 <file path=ppt/notesSlides/notesSlide4.xml><?xml version="1.0" encoding="utf-8"?>
-<p:notes xmlns:p="http://schemas.openxmlformats.org/presentationml/2006/main">
+<p:notes xmlns:a="http://schemas.openxmlformats.org/drawingml/2006/main" xmlns:r="http://schemas.openxmlformats.org/officeDocument/2006/relationships" xmlns:p="http://schemas.openxmlformats.org/presentationml/2006/main">
   <p:cSld>
     <p:spTree>
       <p:nvGrpSpPr>
@@ -678,16 +578,21 @@
         <p:nvPr/>
       </p:nvGrpSpPr>
       <p:grpSpPr>
-        <a:xfrm xmlns:a="http://schemas.openxmlformats.org/drawingml/2006/main"/>
+        <a:xfrm>
+          <a:off x="0" y="0"/>
+          <a:ext cx="0" cy="0"/>
+          <a:chOff x="0" y="0"/>
+          <a:chExt cx="0" cy="0"/>
+        </a:xfrm>
       </p:grpSpPr>
       <p:sp>
         <p:nvSpPr>
           <p:cNvPr id="2" name="Slide Image Placeholder 1"/>
           <p:cNvSpPr>
-            <a:spLocks xmlns:a="http://schemas.openxmlformats.org/drawingml/2006/main" noGrp="1"/>
+            <a:spLocks noGrp="1" noRot="1" noChangeAspect="1"/>
           </p:cNvSpPr>
           <p:nvPr>
-            <p:ph type="sldImg" idx="0"/>
+            <p:ph type="sldImg"/>
           </p:nvPr>
         </p:nvSpPr>
         <p:spPr/>
@@ -696,7 +601,7 @@
         <p:nvSpPr>
           <p:cNvPr id="3" name="Notes Placeholder 2"/>
           <p:cNvSpPr>
-            <a:spLocks xmlns:a="http://schemas.openxmlformats.org/drawingml/2006/main" noGrp="1"/>
+            <a:spLocks noGrp="1"/>
           </p:cNvSpPr>
           <p:nvPr>
             <p:ph type="body" idx="1"/>
@@ -704,29 +609,29 @@
         </p:nvSpPr>
         <p:spPr/>
         <p:txBody>
-          <a:bodyPr xmlns:a="http://schemas.openxmlformats.org/drawingml/2006/main"/>
-          <a:lstStyle xmlns:a="http://schemas.openxmlformats.org/drawingml/2006/main"/>
-          <a:p xmlns:a="http://schemas.openxmlformats.org/drawingml/2006/main">
+          <a:bodyPr/>
+          <a:lstStyle/>
+          <a:p>
             <a:r>
               <a:t>Source: reports/outreach/copy/pitch.md, 2026-09-14. Editorial draft from the existing investor brief.</a:t>
             </a:r>
           </a:p>
-          <a:p xmlns:a="http://schemas.openxmlformats.org/drawingml/2006/main">
+          <a:p>
             <a:r>
               <a:t>Evidence E13: The Microfibre Consortium and ZDHC launched Phase 2 research at 15 facilities, co-funded by adidas, lululemon, Primark and Tesco, comparing TSS with image-based fibre counts. https://www.roadmaptozero.com/post/the-microfibre-consortium-and-zdhc-advance-joint-research-to-strengthen-wastewater-monitoring-of-fibre-fragmentation</a:t>
             </a:r>
           </a:p>
-          <a:p xmlns:a="http://schemas.openxmlformats.org/drawingml/2006/main">
+          <a:p>
             <a:r>
               <a:t>Evidence E4: Inditex Green to Wear 3.2, July 2026, B-ranking criterion for fibres/microfibres released without internal control. This is a supplier grading requirement, not a demand for a numerical fibre count.</a:t>
             </a:r>
           </a:p>
-          <a:p xmlns:a="http://schemas.openxmlformats.org/drawingml/2006/main">
+          <a:p>
             <a:r>
               <a:t>Evidence E14: TMC/ZDHC state intent to set maximum allowable effluent fibre limits, but no timing is given.</a:t>
             </a:r>
           </a:p>
-          <a:p xmlns:a="http://schemas.openxmlformats.org/drawingml/2006/main">
+          <a:p>
             <a:r>
               <a:t>Countercase: if the proxy validates, existing TSS measurement may be good enough. E11: adidas expects limited near-term regulatory/claims pull. All dates and research claims here are from supplied source artifacts, not independently refreshed for this draft.</a:t>
             </a:r>
@@ -737,7 +642,7 @@
         <p:nvSpPr>
           <p:cNvPr id="4" name="Slide Number Placeholder 3"/>
           <p:cNvSpPr>
-            <a:spLocks xmlns:a="http://schemas.openxmlformats.org/drawingml/2006/main" noGrp="1"/>
+            <a:spLocks noGrp="1"/>
           </p:cNvSpPr>
           <p:nvPr>
             <p:ph type="sldNum" idx="5"/>
@@ -745,21 +650,23 @@
         </p:nvSpPr>
         <p:spPr/>
         <p:txBody>
-          <a:bodyPr xmlns:a="http://schemas.openxmlformats.org/drawingml/2006/main"/>
-          <a:lstStyle xmlns:a="http://schemas.openxmlformats.org/drawingml/2006/main"/>
-          <a:p xmlns:a="http://schemas.openxmlformats.org/drawingml/2006/main"/>
+          <a:bodyPr/>
+          <a:lstStyle/>
+          <a:p>
+            <a:endParaRPr/>
+          </a:p>
         </p:txBody>
       </p:sp>
     </p:spTree>
   </p:cSld>
   <p:clrMapOvr>
-    <a:masterClrMapping xmlns:a="http://schemas.openxmlformats.org/drawingml/2006/main"/>
+    <a:masterClrMapping/>
   </p:clrMapOvr>
 </p:notes>
 </file>
 
 <file path=ppt/notesSlides/notesSlide5.xml><?xml version="1.0" encoding="utf-8"?>
-<p:notes xmlns:p="http://schemas.openxmlformats.org/presentationml/2006/main">
+<p:notes xmlns:a="http://schemas.openxmlformats.org/drawingml/2006/main" xmlns:r="http://schemas.openxmlformats.org/officeDocument/2006/relationships" xmlns:p="http://schemas.openxmlformats.org/presentationml/2006/main">
   <p:cSld>
     <p:spTree>
       <p:nvGrpSpPr>
@@ -768,16 +675,21 @@
         <p:nvPr/>
       </p:nvGrpSpPr>
       <p:grpSpPr>
-        <a:xfrm xmlns:a="http://schemas.openxmlformats.org/drawingml/2006/main"/>
+        <a:xfrm>
+          <a:off x="0" y="0"/>
+          <a:ext cx="0" cy="0"/>
+          <a:chOff x="0" y="0"/>
+          <a:chExt cx="0" cy="0"/>
+        </a:xfrm>
       </p:grpSpPr>
       <p:sp>
         <p:nvSpPr>
           <p:cNvPr id="2" name="Slide Image Placeholder 1"/>
           <p:cNvSpPr>
-            <a:spLocks xmlns:a="http://schemas.openxmlformats.org/drawingml/2006/main" noGrp="1"/>
+            <a:spLocks noGrp="1" noRot="1" noChangeAspect="1"/>
           </p:cNvSpPr>
           <p:nvPr>
-            <p:ph type="sldImg" idx="0"/>
+            <p:ph type="sldImg"/>
           </p:nvPr>
         </p:nvSpPr>
         <p:spPr/>
@@ -786,7 +698,7 @@
         <p:nvSpPr>
           <p:cNvPr id="3" name="Notes Placeholder 2"/>
           <p:cNvSpPr>
-            <a:spLocks xmlns:a="http://schemas.openxmlformats.org/drawingml/2006/main" noGrp="1"/>
+            <a:spLocks noGrp="1"/>
           </p:cNvSpPr>
           <p:nvPr>
             <p:ph type="body" idx="1"/>
@@ -794,24 +706,24 @@
         </p:nvSpPr>
         <p:spPr/>
         <p:txBody>
-          <a:bodyPr xmlns:a="http://schemas.openxmlformats.org/drawingml/2006/main"/>
-          <a:lstStyle xmlns:a="http://schemas.openxmlformats.org/drawingml/2006/main"/>
-          <a:p xmlns:a="http://schemas.openxmlformats.org/drawingml/2006/main">
+          <a:bodyPr/>
+          <a:lstStyle/>
+          <a:p>
             <a:r>
               <a:t>Source: reports/outreach/copy/pitch.md, 2026-09-14. Editorial draft from the existing investor brief.</a:t>
             </a:r>
           </a:p>
-          <a:p xmlns:a="http://schemas.openxmlformats.org/drawingml/2006/main">
+          <a:p>
             <a:r>
               <a:t>Founder biographies: founders/sandra-zalas.md and founders/izgin-ozdas.md. Current title allocation follows the 2026-09-14 pitch, which is newer than some founder records. Sandra founded Baltic Jungle Lab and is a PFR School of Pioneers winner. Izgin contributed to CNC robot automation at IMTEK and holds a Cambridge MPhil in Industrial Systems, Manufacturing &amp; Management with interoperability work.</a:t>
             </a:r>
           </a:p>
-          <a:p xmlns:a="http://schemas.openxmlformats.org/drawingml/2006/main">
+          <a:p>
             <a:r>
               <a:t>Jeffrey Chang introduced ML/computer-vision experience on the Matter call. Irfan Ali role comes from the founder pitch, with his one-line bio still open. Proposed advisor names remain explicitly unconfirmed for external naming.</a:t>
             </a:r>
           </a:p>
-          <a:p xmlns:a="http://schemas.openxmlformats.org/drawingml/2006/main">
+          <a:p>
             <a:r>
               <a:t>Founder decisions outstanding: Igor Veredyn introduced himself on H&amp;M call as technical co-founder; whether he belongs on the team slide is unresolved. Confirm final roles, Sandra biography and advisor consent before external circulation.</a:t>
             </a:r>
@@ -822,7 +734,7 @@
         <p:nvSpPr>
           <p:cNvPr id="4" name="Slide Number Placeholder 3"/>
           <p:cNvSpPr>
-            <a:spLocks xmlns:a="http://schemas.openxmlformats.org/drawingml/2006/main" noGrp="1"/>
+            <a:spLocks noGrp="1"/>
           </p:cNvSpPr>
           <p:nvPr>
             <p:ph type="sldNum" idx="5"/>
@@ -830,21 +742,23 @@
         </p:nvSpPr>
         <p:spPr/>
         <p:txBody>
-          <a:bodyPr xmlns:a="http://schemas.openxmlformats.org/drawingml/2006/main"/>
-          <a:lstStyle xmlns:a="http://schemas.openxmlformats.org/drawingml/2006/main"/>
-          <a:p xmlns:a="http://schemas.openxmlformats.org/drawingml/2006/main"/>
+          <a:bodyPr/>
+          <a:lstStyle/>
+          <a:p>
+            <a:endParaRPr/>
+          </a:p>
         </p:txBody>
       </p:sp>
     </p:spTree>
   </p:cSld>
   <p:clrMapOvr>
-    <a:masterClrMapping xmlns:a="http://schemas.openxmlformats.org/drawingml/2006/main"/>
+    <a:masterClrMapping/>
   </p:clrMapOvr>
 </p:notes>
 </file>
 
 <file path=ppt/notesSlides/notesSlide6.xml><?xml version="1.0" encoding="utf-8"?>
-<p:notes xmlns:p="http://schemas.openxmlformats.org/presentationml/2006/main">
+<p:notes xmlns:a="http://schemas.openxmlformats.org/drawingml/2006/main" xmlns:r="http://schemas.openxmlformats.org/officeDocument/2006/relationships" xmlns:p="http://schemas.openxmlformats.org/presentationml/2006/main">
   <p:cSld>
     <p:spTree>
       <p:nvGrpSpPr>
@@ -853,16 +767,21 @@
         <p:nvPr/>
       </p:nvGrpSpPr>
       <p:grpSpPr>
-        <a:xfrm xmlns:a="http://schemas.openxmlformats.org/drawingml/2006/main"/>
+        <a:xfrm>
+          <a:off x="0" y="0"/>
+          <a:ext cx="0" cy="0"/>
+          <a:chOff x="0" y="0"/>
+          <a:chExt cx="0" cy="0"/>
+        </a:xfrm>
       </p:grpSpPr>
       <p:sp>
         <p:nvSpPr>
           <p:cNvPr id="2" name="Slide Image Placeholder 1"/>
           <p:cNvSpPr>
-            <a:spLocks xmlns:a="http://schemas.openxmlformats.org/drawingml/2006/main" noGrp="1"/>
+            <a:spLocks noGrp="1" noRot="1" noChangeAspect="1"/>
           </p:cNvSpPr>
           <p:nvPr>
-            <p:ph type="sldImg" idx="0"/>
+            <p:ph type="sldImg"/>
           </p:nvPr>
         </p:nvSpPr>
         <p:spPr/>
@@ -871,7 +790,7 @@
         <p:nvSpPr>
           <p:cNvPr id="3" name="Notes Placeholder 2"/>
           <p:cNvSpPr>
-            <a:spLocks xmlns:a="http://schemas.openxmlformats.org/drawingml/2006/main" noGrp="1"/>
+            <a:spLocks noGrp="1"/>
           </p:cNvSpPr>
           <p:nvPr>
             <p:ph type="body" idx="1"/>
@@ -879,29 +798,29 @@
         </p:nvSpPr>
         <p:spPr/>
         <p:txBody>
-          <a:bodyPr xmlns:a="http://schemas.openxmlformats.org/drawingml/2006/main"/>
-          <a:lstStyle xmlns:a="http://schemas.openxmlformats.org/drawingml/2006/main"/>
-          <a:p xmlns:a="http://schemas.openxmlformats.org/drawingml/2006/main">
+          <a:bodyPr/>
+          <a:lstStyle/>
+          <a:p>
             <a:r>
               <a:t>Source: reports/outreach/copy/pitch.md, 2026-09-14. Editorial draft from the existing investor brief.</a:t>
             </a:r>
           </a:p>
-          <a:p xmlns:a="http://schemas.openxmlformats.org/drawingml/2006/main">
+          <a:p>
             <a:r>
               <a:t>Evidence E10: adidas microfibre lead Varija Subasingha said this was the first such device she had come across. It is an observation by one interviewee, not a novelty or exclusivity claim. E9: offered potential brand-partner/Fashion for Good introductions conditional on a good prototype.</a:t>
             </a:r>
           </a:p>
-          <a:p xmlns:a="http://schemas.openxmlformats.org/drawingml/2006/main">
+          <a:p>
             <a:r>
               <a:t>Evidence E8: H&amp;M innovation/water team quote, with ellipsis retained, referred to monitoring compared with filtration/ETP solutions known to them. E9: supplier access was tentative, not arranged.</a:t>
             </a:r>
           </a:p>
-          <a:p xmlns:a="http://schemas.openxmlformats.org/drawingml/2006/main">
+          <a:p>
             <a:r>
               <a:t>Matter conversations are under NDA. This slide intentionally carries only relationship status and publicly described industry. Any further pilot invitation details require the founders to approve wording against the NDA.</a:t>
             </a:r>
           </a:p>
-          <a:p xmlns:a="http://schemas.openxmlformats.org/drawingml/2006/main">
+          <a:p>
             <a:r>
               <a:t>All relationships are active conversations, not revenue, paid design partnerships or signed pilots. Sources: E5-E10, reports/03-validation/evidence.md.</a:t>
             </a:r>
@@ -912,7 +831,7 @@
         <p:nvSpPr>
           <p:cNvPr id="4" name="Slide Number Placeholder 3"/>
           <p:cNvSpPr>
-            <a:spLocks xmlns:a="http://schemas.openxmlformats.org/drawingml/2006/main" noGrp="1"/>
+            <a:spLocks noGrp="1"/>
           </p:cNvSpPr>
           <p:nvPr>
             <p:ph type="sldNum" idx="5"/>
@@ -920,21 +839,23 @@
         </p:nvSpPr>
         <p:spPr/>
         <p:txBody>
-          <a:bodyPr xmlns:a="http://schemas.openxmlformats.org/drawingml/2006/main"/>
-          <a:lstStyle xmlns:a="http://schemas.openxmlformats.org/drawingml/2006/main"/>
-          <a:p xmlns:a="http://schemas.openxmlformats.org/drawingml/2006/main"/>
+          <a:bodyPr/>
+          <a:lstStyle/>
+          <a:p>
+            <a:endParaRPr/>
+          </a:p>
         </p:txBody>
       </p:sp>
     </p:spTree>
   </p:cSld>
   <p:clrMapOvr>
-    <a:masterClrMapping xmlns:a="http://schemas.openxmlformats.org/drawingml/2006/main"/>
+    <a:masterClrMapping/>
   </p:clrMapOvr>
 </p:notes>
 </file>
 
 <file path=ppt/notesSlides/notesSlide7.xml><?xml version="1.0" encoding="utf-8"?>
-<p:notes xmlns:p="http://schemas.openxmlformats.org/presentationml/2006/main">
+<p:notes xmlns:a="http://schemas.openxmlformats.org/drawingml/2006/main" xmlns:r="http://schemas.openxmlformats.org/officeDocument/2006/relationships" xmlns:p="http://schemas.openxmlformats.org/presentationml/2006/main">
   <p:cSld>
     <p:spTree>
       <p:nvGrpSpPr>
@@ -943,16 +864,21 @@
         <p:nvPr/>
       </p:nvGrpSpPr>
       <p:grpSpPr>
-        <a:xfrm xmlns:a="http://schemas.openxmlformats.org/drawingml/2006/main"/>
+        <a:xfrm>
+          <a:off x="0" y="0"/>
+          <a:ext cx="0" cy="0"/>
+          <a:chOff x="0" y="0"/>
+          <a:chExt cx="0" cy="0"/>
+        </a:xfrm>
       </p:grpSpPr>
       <p:sp>
         <p:nvSpPr>
           <p:cNvPr id="2" name="Slide Image Placeholder 1"/>
           <p:cNvSpPr>
-            <a:spLocks xmlns:a="http://schemas.openxmlformats.org/drawingml/2006/main" noGrp="1"/>
+            <a:spLocks noGrp="1" noRot="1" noChangeAspect="1"/>
           </p:cNvSpPr>
           <p:nvPr>
-            <p:ph type="sldImg" idx="0"/>
+            <p:ph type="sldImg"/>
           </p:nvPr>
         </p:nvSpPr>
         <p:spPr/>
@@ -961,7 +887,7 @@
         <p:nvSpPr>
           <p:cNvPr id="3" name="Notes Placeholder 2"/>
           <p:cNvSpPr>
-            <a:spLocks xmlns:a="http://schemas.openxmlformats.org/drawingml/2006/main" noGrp="1"/>
+            <a:spLocks noGrp="1"/>
           </p:cNvSpPr>
           <p:nvPr>
             <p:ph type="body" idx="1"/>
@@ -969,29 +895,29 @@
         </p:nvSpPr>
         <p:spPr/>
         <p:txBody>
-          <a:bodyPr xmlns:a="http://schemas.openxmlformats.org/drawingml/2006/main"/>
-          <a:lstStyle xmlns:a="http://schemas.openxmlformats.org/drawingml/2006/main"/>
-          <a:p xmlns:a="http://schemas.openxmlformats.org/drawingml/2006/main">
+          <a:bodyPr/>
+          <a:lstStyle/>
+          <a:p>
             <a:r>
               <a:t>Source: reports/outreach/copy/pitch.md, 2026-09-14. Editorial draft from the existing investor brief.</a:t>
             </a:r>
           </a:p>
-          <a:p xmlns:a="http://schemas.openxmlformats.org/drawingml/2006/main">
+          <a:p>
             <a:r>
               <a:t>Market figures are assumptions in the existing pitch. Installed base 50,000-150,000 inferred from shipment flow, an assumed 15-20 year service life and local manufacturers outside the reporting sample. Do not present the installed base as a measured count.</a:t>
             </a:r>
           </a:p>
-          <a:p xmlns:a="http://schemas.openxmlformats.org/drawingml/2006/main">
+          <a:p>
             <a:r>
               <a:t>Annual software scenario: 50,000 × $100/month × 12 = $60M; 150,000 × $250/month × 12 = $450M. Assumes 100% adoption and one paid subscription per machine. No tested willingness to pay, validated price or sales forecast.</a:t>
             </a:r>
           </a:p>
-          <a:p xmlns:a="http://schemas.openxmlformats.org/drawingml/2006/main">
+          <a:p>
             <a:r>
               <a:t>Shipment source used in the brief: ITMF via https://www.textileworld.com/textile-world/2026/07/itmf-global-textile-machinery-shipments-shrunk-in-2025-except-for-spinning/ . Do not confuse annual shipments with the installed base.</a:t>
             </a:r>
           </a:p>
-          <a:p xmlns:a="http://schemas.openxmlformats.org/drawingml/2006/main">
+          <a:p>
             <a:r>
               <a:t>Expansion is a founder vision from input-context/belief.md, not validated demand in every liquid process. Funding amount, use-of-funds allocation, and timeline remain founder decisions.</a:t>
             </a:r>
@@ -1002,7 +928,7 @@
         <p:nvSpPr>
           <p:cNvPr id="4" name="Slide Number Placeholder 3"/>
           <p:cNvSpPr>
-            <a:spLocks xmlns:a="http://schemas.openxmlformats.org/drawingml/2006/main" noGrp="1"/>
+            <a:spLocks noGrp="1"/>
           </p:cNvSpPr>
           <p:nvPr>
             <p:ph type="sldNum" idx="5"/>
@@ -1010,21 +936,23 @@
         </p:nvSpPr>
         <p:spPr/>
         <p:txBody>
-          <a:bodyPr xmlns:a="http://schemas.openxmlformats.org/drawingml/2006/main"/>
-          <a:lstStyle xmlns:a="http://schemas.openxmlformats.org/drawingml/2006/main"/>
-          <a:p xmlns:a="http://schemas.openxmlformats.org/drawingml/2006/main"/>
+          <a:bodyPr/>
+          <a:lstStyle/>
+          <a:p>
+            <a:endParaRPr/>
+          </a:p>
         </p:txBody>
       </p:sp>
     </p:spTree>
   </p:cSld>
   <p:clrMapOvr>
-    <a:masterClrMapping xmlns:a="http://schemas.openxmlformats.org/drawingml/2006/main"/>
+    <a:masterClrMapping/>
   </p:clrMapOvr>
 </p:notes>
 </file>
 
 <file path=ppt/slideLayouts/slideLayout1.xml><?xml version="1.0" encoding="utf-8"?>
-<p:sldLayout xmlns:p="http://schemas.openxmlformats.org/presentationml/2006/main" type="title">
+<p:sldLayout xmlns:a="http://schemas.openxmlformats.org/drawingml/2006/main" xmlns:r="http://schemas.openxmlformats.org/officeDocument/2006/relationships" xmlns:p="http://schemas.openxmlformats.org/presentationml/2006/main" type="title">
   <p:cSld name="Title Slide">
     <p:spTree>
       <p:nvGrpSpPr>
@@ -1033,19 +961,27 @@
         <p:nvPr/>
       </p:nvGrpSpPr>
       <p:grpSpPr>
-        <a:xfrm xmlns:a="http://schemas.openxmlformats.org/drawingml/2006/main"/>
+        <a:xfrm>
+          <a:off x="0" y="0"/>
+          <a:ext cx="0" cy="0"/>
+          <a:chOff x="0" y="0"/>
+          <a:chExt cx="0" cy="0"/>
+        </a:xfrm>
       </p:grpSpPr>
     </p:spTree>
   </p:cSld>
+  <p:clrMapOvr>
+    <a:masterClrMapping/>
+  </p:clrMapOvr>
 </p:sldLayout>
 </file>
 
 <file path=ppt/slideMasters/slideMaster1.xml><?xml version="1.0" encoding="utf-8"?>
-<p:sldMaster xmlns:p="http://schemas.openxmlformats.org/presentationml/2006/main">
+<p:sldMaster xmlns:a="http://schemas.openxmlformats.org/drawingml/2006/main" xmlns:r="http://schemas.openxmlformats.org/officeDocument/2006/relationships" xmlns:p="http://schemas.openxmlformats.org/presentationml/2006/main">
   <p:cSld name="Master">
     <p:bg>
       <p:bgRef idx="1001">
-        <a:schemeClr xmlns:a="http://schemas.openxmlformats.org/drawingml/2006/main" val="bg1"/>
+        <a:schemeClr val="bg1"/>
       </p:bgRef>
     </p:bg>
     <p:spTree>
@@ -1055,17 +991,22 @@
         <p:nvPr/>
       </p:nvGrpSpPr>
       <p:grpSpPr>
-        <a:xfrm xmlns:a="http://schemas.openxmlformats.org/drawingml/2006/main"/>
+        <a:xfrm>
+          <a:off x="0" y="0"/>
+          <a:ext cx="0" cy="0"/>
+          <a:chOff x="0" y="0"/>
+          <a:chExt cx="0" cy="0"/>
+        </a:xfrm>
       </p:grpSpPr>
     </p:spTree>
   </p:cSld>
   <p:clrMap bg1="lt1" tx1="dk1" bg2="lt2" tx2="dk2" accent1="accent1" accent2="accent2" accent3="accent3" accent4="accent4" accent5="accent5" accent6="accent6" hlink="hlink" folHlink="folHlink"/>
   <p:sldLayoutIdLst>
-    <p:sldLayoutId xmlns:r="http://schemas.openxmlformats.org/officeDocument/2006/relationships" id="2147483649" r:id="Rb524abd89bd94297"/>
+    <p:sldLayoutId id="2147483649" r:id="rId1"/>
   </p:sldLayoutIdLst>
   <p:txStyles>
     <p:titleStyle>
-      <a:lvl1pPr xmlns:a="http://schemas.openxmlformats.org/drawingml/2006/main" algn="l">
+      <a:lvl1pPr algn="l">
         <a:lnSpc>
           <a:spcPct val="90000"/>
         </a:lnSpc>
@@ -1084,7 +1025,7 @@
       </a:lvl1pPr>
     </p:titleStyle>
     <p:bodyStyle>
-      <a:lvl1pPr xmlns:a="http://schemas.openxmlformats.org/drawingml/2006/main" marL="228600" indent="-228600" algn="l">
+      <a:lvl1pPr marL="228600" indent="-228600" algn="l">
         <a:lnSpc>
           <a:spcPct val="90000"/>
         </a:lnSpc>
@@ -1101,7 +1042,7 @@
           <a:cs typeface="+mn-lt"/>
         </a:defRPr>
       </a:lvl1pPr>
-      <a:lvl2pPr xmlns:a="http://schemas.openxmlformats.org/drawingml/2006/main" marL="685800" indent="-228600" algn="l">
+      <a:lvl2pPr marL="685800" indent="-228600" algn="l">
         <a:lnSpc>
           <a:spcPct val="90000"/>
         </a:lnSpc>
@@ -1118,7 +1059,7 @@
           <a:cs typeface="+mn-lt"/>
         </a:defRPr>
       </a:lvl2pPr>
-      <a:lvl3pPr xmlns:a="http://schemas.openxmlformats.org/drawingml/2006/main" marL="1143000" indent="-228600" algn="l">
+      <a:lvl3pPr marL="1143000" indent="-228600" algn="l">
         <a:lnSpc>
           <a:spcPct val="90000"/>
         </a:lnSpc>
@@ -1135,7 +1076,7 @@
           <a:cs typeface="+mn-lt"/>
         </a:defRPr>
       </a:lvl3pPr>
-      <a:lvl4pPr xmlns:a="http://schemas.openxmlformats.org/drawingml/2006/main" marL="1600200" indent="-228600" algn="l">
+      <a:lvl4pPr marL="1600200" indent="-228600" algn="l">
         <a:lnSpc>
           <a:spcPct val="90000"/>
         </a:lnSpc>
@@ -1152,7 +1093,7 @@
           <a:cs typeface="+mn-lt"/>
         </a:defRPr>
       </a:lvl4pPr>
-      <a:lvl5pPr xmlns:a="http://schemas.openxmlformats.org/drawingml/2006/main" marL="2057400" indent="-228600" algn="l">
+      <a:lvl5pPr marL="2057400" indent="-228600" algn="l">
         <a:lnSpc>
           <a:spcPct val="90000"/>
         </a:lnSpc>
@@ -1169,7 +1110,7 @@
           <a:cs typeface="+mn-lt"/>
         </a:defRPr>
       </a:lvl5pPr>
-      <a:lvl6pPr xmlns:a="http://schemas.openxmlformats.org/drawingml/2006/main" marL="2514600" indent="-228600" algn="l">
+      <a:lvl6pPr marL="2514600" indent="-228600" algn="l">
         <a:lnSpc>
           <a:spcPct val="90000"/>
         </a:lnSpc>
@@ -1186,7 +1127,7 @@
           <a:cs typeface="+mn-lt"/>
         </a:defRPr>
       </a:lvl6pPr>
-      <a:lvl7pPr xmlns:a="http://schemas.openxmlformats.org/drawingml/2006/main" marL="2971800" indent="-228600" algn="l">
+      <a:lvl7pPr marL="2971800" indent="-228600" algn="l">
         <a:lnSpc>
           <a:spcPct val="90000"/>
         </a:lnSpc>
@@ -1203,7 +1144,7 @@
           <a:cs typeface="+mn-lt"/>
         </a:defRPr>
       </a:lvl7pPr>
-      <a:lvl8pPr xmlns:a="http://schemas.openxmlformats.org/drawingml/2006/main" marL="3429000" indent="-228600" algn="l">
+      <a:lvl8pPr marL="3429000" indent="-228600" algn="l">
         <a:lnSpc>
           <a:spcPct val="90000"/>
         </a:lnSpc>
@@ -1220,7 +1161,7 @@
           <a:cs typeface="+mn-lt"/>
         </a:defRPr>
       </a:lvl8pPr>
-      <a:lvl9pPr xmlns:a="http://schemas.openxmlformats.org/drawingml/2006/main" marL="3886200" indent="-228600" algn="l">
+      <a:lvl9pPr marL="3886200" indent="-228600" algn="l">
         <a:lnSpc>
           <a:spcPct val="90000"/>
         </a:lnSpc>
@@ -1239,7 +1180,7 @@
       </a:lvl9pPr>
     </p:bodyStyle>
     <p:otherStyle>
-      <a:lvl1pPr xmlns:a="http://schemas.openxmlformats.org/drawingml/2006/main" marL="0" algn="l">
+      <a:lvl1pPr marL="0" algn="l">
         <a:buNone/>
         <a:defRPr sz="1800">
           <a:solidFill>
@@ -1250,7 +1191,7 @@
           <a:cs typeface="+mn-lt"/>
         </a:defRPr>
       </a:lvl1pPr>
-      <a:lvl2pPr xmlns:a="http://schemas.openxmlformats.org/drawingml/2006/main" marL="457200" algn="l">
+      <a:lvl2pPr marL="457200" algn="l">
         <a:buNone/>
         <a:defRPr sz="1800">
           <a:solidFill>
@@ -1261,7 +1202,7 @@
           <a:cs typeface="+mn-lt"/>
         </a:defRPr>
       </a:lvl2pPr>
-      <a:lvl3pPr xmlns:a="http://schemas.openxmlformats.org/drawingml/2006/main" marL="914400" algn="l">
+      <a:lvl3pPr marL="914400" algn="l">
         <a:buNone/>
         <a:defRPr sz="1800">
           <a:solidFill>
@@ -1272,7 +1213,7 @@
           <a:cs typeface="+mn-lt"/>
         </a:defRPr>
       </a:lvl3pPr>
-      <a:lvl4pPr xmlns:a="http://schemas.openxmlformats.org/drawingml/2006/main" marL="1371600" algn="l">
+      <a:lvl4pPr marL="1371600" algn="l">
         <a:buNone/>
         <a:defRPr sz="1800">
           <a:solidFill>
@@ -1283,7 +1224,7 @@
           <a:cs typeface="+mn-lt"/>
         </a:defRPr>
       </a:lvl4pPr>
-      <a:lvl5pPr xmlns:a="http://schemas.openxmlformats.org/drawingml/2006/main" marL="1828800" algn="l">
+      <a:lvl5pPr marL="1828800" algn="l">
         <a:buNone/>
         <a:defRPr sz="1800">
           <a:solidFill>
@@ -1294,7 +1235,7 @@
           <a:cs typeface="+mn-lt"/>
         </a:defRPr>
       </a:lvl5pPr>
-      <a:lvl6pPr xmlns:a="http://schemas.openxmlformats.org/drawingml/2006/main" marL="2286000" algn="l">
+      <a:lvl6pPr marL="2286000" algn="l">
         <a:buNone/>
         <a:defRPr sz="1800">
           <a:solidFill>
@@ -1305,7 +1246,7 @@
           <a:cs typeface="+mn-lt"/>
         </a:defRPr>
       </a:lvl6pPr>
-      <a:lvl7pPr xmlns:a="http://schemas.openxmlformats.org/drawingml/2006/main" marL="2743200" algn="l">
+      <a:lvl7pPr marL="2743200" algn="l">
         <a:buNone/>
         <a:defRPr sz="1800">
           <a:solidFill>
@@ -1316,7 +1257,7 @@
           <a:cs typeface="+mn-lt"/>
         </a:defRPr>
       </a:lvl7pPr>
-      <a:lvl8pPr xmlns:a="http://schemas.openxmlformats.org/drawingml/2006/main" marL="3200400" algn="l">
+      <a:lvl8pPr marL="3200400" algn="l">
         <a:buNone/>
         <a:defRPr sz="1800">
           <a:solidFill>
@@ -1327,7 +1268,7 @@
           <a:cs typeface="+mn-lt"/>
         </a:defRPr>
       </a:lvl8pPr>
-      <a:lvl9pPr xmlns:a="http://schemas.openxmlformats.org/drawingml/2006/main" marL="3657600" algn="l">
+      <a:lvl9pPr marL="3657600" algn="l">
         <a:buNone/>
         <a:defRPr sz="1800">
           <a:solidFill>
@@ -1343,259 +1284,15 @@
 </p:sldMaster>
 </file>
 
-<file path=ppt/slideMasters/theme/theme2.xml><?xml version="1.0" encoding="utf-8"?>
-<a:theme xmlns:a="http://schemas.openxmlformats.org/drawingml/2006/main" name="ChatGPT">
-  <a:themeElements>
-    <a:clrScheme name="ChatGPT">
-      <a:dk1>
-        <a:srgbClr val="000000"/>
-      </a:dk1>
-      <a:lt1>
-        <a:srgbClr val="FFFFFF"/>
-      </a:lt1>
-      <a:dk2>
-        <a:srgbClr val="0E2841"/>
-      </a:dk2>
-      <a:lt2>
-        <a:srgbClr val="E8E8E8"/>
-      </a:lt2>
-      <a:accent1>
-        <a:srgbClr val="156082"/>
-      </a:accent1>
-      <a:accent2>
-        <a:srgbClr val="E97132"/>
-      </a:accent2>
-      <a:accent3>
-        <a:srgbClr val="196B24"/>
-      </a:accent3>
-      <a:accent4>
-        <a:srgbClr val="0F9ED5"/>
-      </a:accent4>
-      <a:accent5>
-        <a:srgbClr val="A02B93"/>
-      </a:accent5>
-      <a:accent6>
-        <a:srgbClr val="4EA72E"/>
-      </a:accent6>
-      <a:hlink>
-        <a:srgbClr val="467886"/>
-      </a:hlink>
-      <a:folHlink>
-        <a:srgbClr val="96607D"/>
-      </a:folHlink>
-    </a:clrScheme>
-    <a:fontScheme name="Office">
-      <a:majorFont>
-        <a:latin typeface="Calibri Light"/>
-        <a:ea typeface="Calibri Light"/>
-        <a:cs typeface="Calibri Light"/>
-      </a:majorFont>
-      <a:minorFont>
-        <a:latin typeface="Calibri"/>
-        <a:ea typeface="Calibri"/>
-        <a:cs typeface="Calibri"/>
-      </a:minorFont>
-    </a:fontScheme>
-    <a:fmtScheme name="ChatGPT">
-      <a:fillStyleLst>
-        <a:solidFill>
-          <a:schemeClr val="phClr"/>
-        </a:solidFill>
-        <a:gradFill>
-          <a:gsLst>
-            <a:gs pos="0">
-              <a:schemeClr val="phClr">
-                <a:tint val="67000"/>
-                <a:lumMod val="110000"/>
-                <a:satMod val="105000"/>
-              </a:schemeClr>
-            </a:gs>
-            <a:gs pos="50000">
-              <a:schemeClr val="phClr">
-                <a:tint val="73000"/>
-                <a:lumMod val="105000"/>
-                <a:satMod val="103000"/>
-              </a:schemeClr>
-            </a:gs>
-            <a:gs pos="100000">
-              <a:schemeClr val="phClr">
-                <a:tint val="81000"/>
-                <a:lumMod val="105000"/>
-                <a:satMod val="109000"/>
-              </a:schemeClr>
-            </a:gs>
-          </a:gsLst>
-          <a:lin ang="5400000" scaled="0"/>
-        </a:gradFill>
-        <a:gradFill>
-          <a:gsLst>
-            <a:gs pos="0">
-              <a:schemeClr val="phClr">
-                <a:tint val="94000"/>
-                <a:lumMod val="102000"/>
-                <a:satMod val="103000"/>
-              </a:schemeClr>
-            </a:gs>
-            <a:gs pos="50000">
-              <a:schemeClr val="phClr">
-                <a:shade val="100000"/>
-                <a:lumMod val="100000"/>
-                <a:satMod val="110000"/>
-              </a:schemeClr>
-            </a:gs>
-            <a:gs pos="100000">
-              <a:schemeClr val="phClr">
-                <a:shade val="78000"/>
-                <a:lumMod val="99000"/>
-                <a:satMod val="120000"/>
-              </a:schemeClr>
-            </a:gs>
-          </a:gsLst>
-          <a:lin ang="5400000" scaled="0"/>
-        </a:gradFill>
-      </a:fillStyleLst>
-      <a:lnStyleLst>
-        <a:ln w="12700">
-          <a:solidFill>
-            <a:schemeClr val="phClr"/>
-          </a:solidFill>
-          <a:prstDash val="solid"/>
-        </a:ln>
-        <a:ln w="19050">
-          <a:solidFill>
-            <a:schemeClr val="phClr"/>
-          </a:solidFill>
-          <a:prstDash val="solid"/>
-        </a:ln>
-        <a:ln w="25400">
-          <a:solidFill>
-            <a:schemeClr val="phClr"/>
-          </a:solidFill>
-          <a:prstDash val="solid"/>
-        </a:ln>
-      </a:lnStyleLst>
-      <a:effectStyleLst>
-        <a:effectStyle>
-          <a:effectLst/>
-        </a:effectStyle>
-        <a:effectStyle>
-          <a:effectLst/>
-        </a:effectStyle>
-        <a:effectStyle>
-          <a:effectLst>
-            <a:outerShdw blurRad="57150" dist="19050" dir="5400000">
-              <a:srgbClr val="000000">
-                <a:alpha val="16000"/>
-              </a:srgbClr>
-            </a:outerShdw>
-          </a:effectLst>
-        </a:effectStyle>
-        <a:effectStyle>
-          <a:effectLst>
-            <a:outerShdw blurRad="19050" dist="9525" dir="5400000">
-              <a:srgbClr val="000000">
-                <a:alpha val="6000"/>
-              </a:srgbClr>
-            </a:outerShdw>
-          </a:effectLst>
-        </a:effectStyle>
-        <a:effectStyle>
-          <a:effectLst>
-            <a:outerShdw blurRad="28575" dist="9525" dir="5400000">
-              <a:srgbClr val="000000">
-                <a:alpha val="8000"/>
-              </a:srgbClr>
-            </a:outerShdw>
-          </a:effectLst>
-        </a:effectStyle>
-        <a:effectStyle>
-          <a:effectLst>
-            <a:outerShdw blurRad="57150" dist="19050" dir="5400000">
-              <a:srgbClr val="000000">
-                <a:alpha val="10000"/>
-              </a:srgbClr>
-            </a:outerShdw>
-          </a:effectLst>
-        </a:effectStyle>
-        <a:effectStyle>
-          <a:effectLst>
-            <a:outerShdw blurRad="114300" dist="38100" dir="5400000">
-              <a:srgbClr val="000000">
-                <a:alpha val="12000"/>
-              </a:srgbClr>
-            </a:outerShdw>
-          </a:effectLst>
-        </a:effectStyle>
-        <a:effectStyle>
-          <a:effectLst>
-            <a:outerShdw blurRad="171450" dist="57150" dir="5400000">
-              <a:srgbClr val="000000">
-                <a:alpha val="16000"/>
-              </a:srgbClr>
-            </a:outerShdw>
-          </a:effectLst>
-        </a:effectStyle>
-        <a:effectStyle>
-          <a:effectLst>
-            <a:outerShdw blurRad="266700" dist="95250" dir="5400000">
-              <a:srgbClr val="000000">
-                <a:alpha val="24000"/>
-              </a:srgbClr>
-            </a:outerShdw>
-          </a:effectLst>
-        </a:effectStyle>
-      </a:effectStyleLst>
-      <a:bgFillStyleLst>
-        <a:solidFill>
-          <a:schemeClr val="phClr"/>
-        </a:solidFill>
-        <a:solidFill>
-          <a:schemeClr val="phClr">
-            <a:tint val="95000"/>
-            <a:satMod val="170000"/>
-          </a:schemeClr>
-        </a:solidFill>
-        <a:gradFill>
-          <a:gsLst>
-            <a:gs pos="0">
-              <a:schemeClr val="phClr">
-                <a:tint val="93000"/>
-                <a:shade val="98000"/>
-                <a:lumMod val="102000"/>
-                <a:satMod val="150000"/>
-              </a:schemeClr>
-            </a:gs>
-            <a:gs pos="50000">
-              <a:schemeClr val="phClr">
-                <a:tint val="98000"/>
-                <a:shade val="90000"/>
-                <a:lumMod val="103000"/>
-                <a:satMod val="130000"/>
-              </a:schemeClr>
-            </a:gs>
-            <a:gs pos="100000">
-              <a:schemeClr val="phClr">
-                <a:shade val="63000"/>
-                <a:satMod val="120000"/>
-              </a:schemeClr>
-            </a:gs>
-          </a:gsLst>
-          <a:lin ang="5400000" scaled="0"/>
-        </a:gradFill>
-      </a:bgFillStyleLst>
-    </a:fmtScheme>
-  </a:themeElements>
-</a:theme>
-</file>
-
 <file path=ppt/slides/slide1.xml><?xml version="1.0" encoding="utf-8"?>
-<p:sld xmlns:p="http://schemas.openxmlformats.org/presentationml/2006/main">
+<p:sld xmlns:a="http://schemas.openxmlformats.org/drawingml/2006/main" xmlns:r="http://schemas.openxmlformats.org/officeDocument/2006/relationships" xmlns:p="http://schemas.openxmlformats.org/presentationml/2006/main">
   <p:cSld>
     <p:bg>
       <p:bgPr>
-        <a:solidFill xmlns:a="http://schemas.openxmlformats.org/drawingml/2006/main">
+        <a:solidFill>
           <a:srgbClr val="000000"/>
         </a:solidFill>
+        <a:effectLst/>
       </p:bgPr>
     </p:bg>
     <p:spTree>
@@ -1605,29 +1302,34 @@
         <p:nvPr/>
       </p:nvGrpSpPr>
       <p:grpSpPr>
-        <a:xfrm xmlns:a="http://schemas.openxmlformats.org/drawingml/2006/main"/>
+        <a:xfrm>
+          <a:off x="0" y="0"/>
+          <a:ext cx="0" cy="0"/>
+          <a:chOff x="0" y="0"/>
+          <a:chExt cx="0" cy="0"/>
+        </a:xfrm>
       </p:grpSpPr>
       <p:pic>
         <p:nvPicPr>
-          <p:cNvPr id="7" name=""/>
+          <p:cNvPr id="7" name="Picture 6"/>
           <p:cNvPicPr>
-            <a:picLocks xmlns:a="http://schemas.openxmlformats.org/drawingml/2006/main" noChangeAspect="1"/>
+            <a:picLocks noChangeAspect="1"/>
           </p:cNvPicPr>
           <p:nvPr/>
         </p:nvPicPr>
         <p:blipFill>
-          <a:blip xmlns:r="http://schemas.openxmlformats.org/officeDocument/2006/relationships" xmlns:a="http://schemas.openxmlformats.org/drawingml/2006/main" r:embed="R6b66a8de7c2741ab"/>
-          <a:srcRect xmlns:a="http://schemas.openxmlformats.org/drawingml/2006/main" l="0" t="27" r="0" b="27"/>
-          <a:stretch xmlns:a="http://schemas.openxmlformats.org/drawingml/2006/main">
-            <a:fillRect l="0" t="0" r="0" b="0"/>
+          <a:blip r:embed="rId3"/>
+          <a:srcRect t="27" b="27"/>
+          <a:stretch>
+            <a:fillRect/>
           </a:stretch>
         </p:blipFill>
         <p:spPr>
-          <a:xfrm xmlns:a="http://schemas.openxmlformats.org/drawingml/2006/main">
+          <a:xfrm>
             <a:off x="0" y="0"/>
             <a:ext cx="12192000" cy="6858000"/>
           </a:xfrm>
-          <a:prstGeom xmlns:a="http://schemas.openxmlformats.org/drawingml/2006/main" prst="rect">
+          <a:prstGeom prst="rect">
             <a:avLst/>
           </a:prstGeom>
         </p:spPr>
@@ -1635,36 +1337,36 @@
       <p:sp>
         <p:nvSpPr>
           <p:cNvPr id="2" name="text-1">
-            <a:extLst xmlns:a="http://schemas.openxmlformats.org/drawingml/2006/main">
+            <a:extLst>
               <a:ext uri="{FF2B5EF4-FFF2-40B4-BE49-F238E27FC236}">
                 <a16:creationId xmlns:a16="http://schemas.microsoft.com/office/drawing/2014/main" id="{F3C16A0F-ED3E-450C-8B85-C62B11708457}"/>
               </a:ext>
             </a:extLst>
           </p:cNvPr>
           <p:cNvSpPr>
-            <a:spLocks xmlns:a="http://schemas.openxmlformats.org/drawingml/2006/main" noGrp="1"/>
-          </p:cNvSpPr>
-          <p:nvPr/>
-        </p:nvSpPr>
-        <p:spPr>
-          <a:xfrm xmlns:a="http://schemas.openxmlformats.org/drawingml/2006/main">
+            <a:spLocks noGrp="1"/>
+          </p:cNvSpPr>
+          <p:nvPr/>
+        </p:nvSpPr>
+        <p:spPr>
+          <a:xfrm>
             <a:off x="571500" y="1581150"/>
             <a:ext cx="6667500" cy="1952625"/>
           </a:xfrm>
-          <a:prstGeom xmlns:a="http://schemas.openxmlformats.org/drawingml/2006/main" prst="rect">
-            <a:avLst/>
-          </a:prstGeom>
-          <a:noFill xmlns:a="http://schemas.openxmlformats.org/drawingml/2006/main"/>
-          <a:ln xmlns:a="http://schemas.openxmlformats.org/drawingml/2006/main" w="0">
-            <a:noFill/>
-          </a:ln>
-        </p:spPr>
-        <p:txBody>
-          <a:bodyPr xmlns:a="http://schemas.openxmlformats.org/drawingml/2006/main" lIns="0" tIns="0" rIns="0" bIns="0" anchor="t">
-            <a:noAutofit/>
-          </a:bodyPr>
-          <a:lstStyle xmlns:a="http://schemas.openxmlformats.org/drawingml/2006/main"/>
-          <a:p xmlns:a="http://schemas.openxmlformats.org/drawingml/2006/main">
+          <a:prstGeom prst="rect">
+            <a:avLst/>
+          </a:prstGeom>
+          <a:noFill/>
+          <a:ln w="0">
+            <a:noFill/>
+          </a:ln>
+        </p:spPr>
+        <p:txBody>
+          <a:bodyPr lIns="0" tIns="0" rIns="0" bIns="0" anchor="t">
+            <a:noAutofit/>
+          </a:bodyPr>
+          <a:lstStyle/>
+          <a:p>
             <a:pPr>
               <a:defRPr sz="13050" b="1">
                 <a:solidFill>
@@ -1692,36 +1394,36 @@
       <p:sp>
         <p:nvSpPr>
           <p:cNvPr id="3" name="text-2">
-            <a:extLst xmlns:a="http://schemas.openxmlformats.org/drawingml/2006/main">
+            <a:extLst>
               <a:ext uri="{FF2B5EF4-FFF2-40B4-BE49-F238E27FC236}">
                 <a16:creationId xmlns:a16="http://schemas.microsoft.com/office/drawing/2014/main" id="{ADD2316A-0BB6-49E2-BF97-D3894D96B7F0}"/>
               </a:ext>
             </a:extLst>
           </p:cNvPr>
           <p:cNvSpPr>
-            <a:spLocks xmlns:a="http://schemas.openxmlformats.org/drawingml/2006/main" noGrp="1"/>
-          </p:cNvSpPr>
-          <p:nvPr/>
-        </p:nvSpPr>
-        <p:spPr>
-          <a:xfrm xmlns:a="http://schemas.openxmlformats.org/drawingml/2006/main">
+            <a:spLocks noGrp="1"/>
+          </p:cNvSpPr>
+          <p:nvPr/>
+        </p:nvSpPr>
+        <p:spPr>
+          <a:xfrm>
             <a:off x="628650" y="3667125"/>
             <a:ext cx="6477000" cy="590550"/>
           </a:xfrm>
-          <a:prstGeom xmlns:a="http://schemas.openxmlformats.org/drawingml/2006/main" prst="rect">
-            <a:avLst/>
-          </a:prstGeom>
-          <a:noFill xmlns:a="http://schemas.openxmlformats.org/drawingml/2006/main"/>
-          <a:ln xmlns:a="http://schemas.openxmlformats.org/drawingml/2006/main" w="0">
-            <a:noFill/>
-          </a:ln>
-        </p:spPr>
-        <p:txBody>
-          <a:bodyPr xmlns:a="http://schemas.openxmlformats.org/drawingml/2006/main" lIns="0" tIns="0" rIns="0" bIns="0" anchor="t">
-            <a:noAutofit/>
-          </a:bodyPr>
-          <a:lstStyle xmlns:a="http://schemas.openxmlformats.org/drawingml/2006/main"/>
-          <a:p xmlns:a="http://schemas.openxmlformats.org/drawingml/2006/main">
+          <a:prstGeom prst="rect">
+            <a:avLst/>
+          </a:prstGeom>
+          <a:noFill/>
+          <a:ln w="0">
+            <a:noFill/>
+          </a:ln>
+        </p:spPr>
+        <p:txBody>
+          <a:bodyPr lIns="0" tIns="0" rIns="0" bIns="0" anchor="t">
+            <a:noAutofit/>
+          </a:bodyPr>
+          <a:lstStyle/>
+          <a:p>
             <a:pPr>
               <a:defRPr sz="3225" b="0">
                 <a:solidFill>
@@ -1749,36 +1451,36 @@
       <p:sp>
         <p:nvSpPr>
           <p:cNvPr id="4" name="text-3">
-            <a:extLst xmlns:a="http://schemas.openxmlformats.org/drawingml/2006/main">
+            <a:extLst>
               <a:ext uri="{FF2B5EF4-FFF2-40B4-BE49-F238E27FC236}">
                 <a16:creationId xmlns:a16="http://schemas.microsoft.com/office/drawing/2014/main" id="{6C68AEA1-FC0B-42DE-B2C8-DC8F11ED0D20}"/>
               </a:ext>
             </a:extLst>
           </p:cNvPr>
           <p:cNvSpPr>
-            <a:spLocks xmlns:a="http://schemas.openxmlformats.org/drawingml/2006/main" noGrp="1"/>
-          </p:cNvSpPr>
-          <p:nvPr/>
-        </p:nvSpPr>
-        <p:spPr>
-          <a:xfrm xmlns:a="http://schemas.openxmlformats.org/drawingml/2006/main">
+            <a:spLocks noGrp="1"/>
+          </p:cNvSpPr>
+          <p:nvPr/>
+        </p:nvSpPr>
+        <p:spPr>
+          <a:xfrm>
             <a:off x="647700" y="4448175"/>
             <a:ext cx="5524500" cy="952500"/>
           </a:xfrm>
-          <a:prstGeom xmlns:a="http://schemas.openxmlformats.org/drawingml/2006/main" prst="rect">
-            <a:avLst/>
-          </a:prstGeom>
-          <a:noFill xmlns:a="http://schemas.openxmlformats.org/drawingml/2006/main"/>
-          <a:ln xmlns:a="http://schemas.openxmlformats.org/drawingml/2006/main" w="0">
-            <a:noFill/>
-          </a:ln>
-        </p:spPr>
-        <p:txBody>
-          <a:bodyPr xmlns:a="http://schemas.openxmlformats.org/drawingml/2006/main" lIns="0" tIns="0" rIns="0" bIns="0" anchor="t">
-            <a:noAutofit/>
-          </a:bodyPr>
-          <a:lstStyle xmlns:a="http://schemas.openxmlformats.org/drawingml/2006/main"/>
-          <a:p xmlns:a="http://schemas.openxmlformats.org/drawingml/2006/main">
+          <a:prstGeom prst="rect">
+            <a:avLst/>
+          </a:prstGeom>
+          <a:noFill/>
+          <a:ln w="0">
+            <a:noFill/>
+          </a:ln>
+        </p:spPr>
+        <p:txBody>
+          <a:bodyPr lIns="0" tIns="0" rIns="0" bIns="0" anchor="t">
+            <a:noAutofit/>
+          </a:bodyPr>
+          <a:lstStyle/>
+          <a:p>
             <a:pPr>
               <a:defRPr sz="2175" b="0">
                 <a:solidFill>
@@ -1801,7 +1503,7 @@
               <a:t>Microfibre measurement</a:t>
             </a:r>
           </a:p>
-          <a:p xmlns:a="http://schemas.openxmlformats.org/drawingml/2006/main">
+          <a:p>
             <a:pPr>
               <a:defRPr sz="2175" b="0">
                 <a:solidFill>
@@ -1829,36 +1531,36 @@
       <p:sp>
         <p:nvSpPr>
           <p:cNvPr id="5" name="text-4">
-            <a:extLst xmlns:a="http://schemas.openxmlformats.org/drawingml/2006/main">
+            <a:extLst>
               <a:ext uri="{FF2B5EF4-FFF2-40B4-BE49-F238E27FC236}">
                 <a16:creationId xmlns:a16="http://schemas.microsoft.com/office/drawing/2014/main" id="{A2C7543A-0CB9-4F18-A122-7C086B059FFE}"/>
               </a:ext>
             </a:extLst>
           </p:cNvPr>
           <p:cNvSpPr>
-            <a:spLocks xmlns:a="http://schemas.openxmlformats.org/drawingml/2006/main" noGrp="1"/>
-          </p:cNvSpPr>
-          <p:nvPr/>
-        </p:nvSpPr>
-        <p:spPr>
-          <a:xfrm xmlns:a="http://schemas.openxmlformats.org/drawingml/2006/main">
+            <a:spLocks noGrp="1"/>
+          </p:cNvSpPr>
+          <p:nvPr/>
+        </p:nvSpPr>
+        <p:spPr>
+          <a:xfrm>
             <a:off x="647700" y="6191250"/>
             <a:ext cx="6096000" cy="266700"/>
           </a:xfrm>
-          <a:prstGeom xmlns:a="http://schemas.openxmlformats.org/drawingml/2006/main" prst="rect">
-            <a:avLst/>
-          </a:prstGeom>
-          <a:noFill xmlns:a="http://schemas.openxmlformats.org/drawingml/2006/main"/>
-          <a:ln xmlns:a="http://schemas.openxmlformats.org/drawingml/2006/main" w="0">
-            <a:noFill/>
-          </a:ln>
-        </p:spPr>
-        <p:txBody>
-          <a:bodyPr xmlns:a="http://schemas.openxmlformats.org/drawingml/2006/main" lIns="0" tIns="0" rIns="0" bIns="0" anchor="t">
-            <a:noAutofit/>
-          </a:bodyPr>
-          <a:lstStyle xmlns:a="http://schemas.openxmlformats.org/drawingml/2006/main"/>
-          <a:p xmlns:a="http://schemas.openxmlformats.org/drawingml/2006/main">
+          <a:prstGeom prst="rect">
+            <a:avLst/>
+          </a:prstGeom>
+          <a:noFill/>
+          <a:ln w="0">
+            <a:noFill/>
+          </a:ln>
+        </p:spPr>
+        <p:txBody>
+          <a:bodyPr lIns="0" tIns="0" rIns="0" bIns="0" anchor="t">
+            <a:noAutofit/>
+          </a:bodyPr>
+          <a:lstStyle/>
+          <a:p>
             <a:pPr>
               <a:defRPr sz="1500" b="0">
                 <a:solidFill>
@@ -1886,36 +1588,36 @@
       <p:sp>
         <p:nvSpPr>
           <p:cNvPr id="6" name="text-5">
-            <a:extLst xmlns:a="http://schemas.openxmlformats.org/drawingml/2006/main">
+            <a:extLst>
               <a:ext uri="{FF2B5EF4-FFF2-40B4-BE49-F238E27FC236}">
                 <a16:creationId xmlns:a16="http://schemas.microsoft.com/office/drawing/2014/main" id="{DF4E582A-2242-4A62-9F74-FDE0C3E24448}"/>
               </a:ext>
             </a:extLst>
           </p:cNvPr>
           <p:cNvSpPr>
-            <a:spLocks xmlns:a="http://schemas.openxmlformats.org/drawingml/2006/main" noGrp="1"/>
-          </p:cNvSpPr>
-          <p:nvPr/>
-        </p:nvSpPr>
-        <p:spPr>
-          <a:xfrm xmlns:a="http://schemas.openxmlformats.org/drawingml/2006/main">
+            <a:spLocks noGrp="1"/>
+          </p:cNvSpPr>
+          <p:nvPr/>
+        </p:nvSpPr>
+        <p:spPr>
+          <a:xfrm>
             <a:off x="647700" y="476250"/>
             <a:ext cx="6667500" cy="247650"/>
           </a:xfrm>
-          <a:prstGeom xmlns:a="http://schemas.openxmlformats.org/drawingml/2006/main" prst="rect">
-            <a:avLst/>
-          </a:prstGeom>
-          <a:noFill xmlns:a="http://schemas.openxmlformats.org/drawingml/2006/main"/>
-          <a:ln xmlns:a="http://schemas.openxmlformats.org/drawingml/2006/main" w="0">
-            <a:noFill/>
-          </a:ln>
-        </p:spPr>
-        <p:txBody>
-          <a:bodyPr xmlns:a="http://schemas.openxmlformats.org/drawingml/2006/main" lIns="0" tIns="0" rIns="0" bIns="0" anchor="t">
-            <a:noAutofit/>
-          </a:bodyPr>
-          <a:lstStyle xmlns:a="http://schemas.openxmlformats.org/drawingml/2006/main"/>
-          <a:p xmlns:a="http://schemas.openxmlformats.org/drawingml/2006/main">
+          <a:prstGeom prst="rect">
+            <a:avLst/>
+          </a:prstGeom>
+          <a:noFill/>
+          <a:ln w="0">
+            <a:noFill/>
+          </a:ln>
+        </p:spPr>
+        <p:txBody>
+          <a:bodyPr lIns="0" tIns="0" rIns="0" bIns="0" anchor="t">
+            <a:noAutofit/>
+          </a:bodyPr>
+          <a:lstStyle/>
+          <a:p>
             <a:pPr>
               <a:defRPr sz="1125" b="0">
                 <a:solidFill>
@@ -1947,17 +1649,21 @@
       </p:ext>
     </p:extLst>
   </p:cSld>
+  <p:clrMapOvr>
+    <a:masterClrMapping/>
+  </p:clrMapOvr>
 </p:sld>
 </file>
 
 <file path=ppt/slides/slide2.xml><?xml version="1.0" encoding="utf-8"?>
-<p:sld xmlns:p="http://schemas.openxmlformats.org/presentationml/2006/main">
+<p:sld xmlns:a="http://schemas.openxmlformats.org/drawingml/2006/main" xmlns:r="http://schemas.openxmlformats.org/officeDocument/2006/relationships" xmlns:p="http://schemas.openxmlformats.org/presentationml/2006/main">
   <p:cSld>
     <p:bg>
       <p:bgPr>
-        <a:solidFill xmlns:a="http://schemas.openxmlformats.org/drawingml/2006/main">
+        <a:solidFill>
           <a:srgbClr val="000000"/>
         </a:solidFill>
+        <a:effectLst/>
       </p:bgPr>
     </p:bg>
     <p:spTree>
@@ -1967,41 +1673,46 @@
         <p:nvPr/>
       </p:nvGrpSpPr>
       <p:grpSpPr>
-        <a:xfrm xmlns:a="http://schemas.openxmlformats.org/drawingml/2006/main"/>
+        <a:xfrm>
+          <a:off x="0" y="0"/>
+          <a:ext cx="0" cy="0"/>
+          <a:chOff x="0" y="0"/>
+          <a:chExt cx="0" cy="0"/>
+        </a:xfrm>
       </p:grpSpPr>
       <p:sp>
         <p:nvSpPr>
           <p:cNvPr id="11" name="text-6">
-            <a:extLst xmlns:a="http://schemas.openxmlformats.org/drawingml/2006/main">
+            <a:extLst>
               <a:ext uri="{FF2B5EF4-FFF2-40B4-BE49-F238E27FC236}">
                 <a16:creationId xmlns:a16="http://schemas.microsoft.com/office/drawing/2014/main" id="{7AE58081-4975-4B16-8D9B-7B26853E371E}"/>
               </a:ext>
             </a:extLst>
           </p:cNvPr>
           <p:cNvSpPr>
-            <a:spLocks xmlns:a="http://schemas.openxmlformats.org/drawingml/2006/main" noGrp="1"/>
-          </p:cNvSpPr>
-          <p:nvPr/>
-        </p:nvSpPr>
-        <p:spPr>
-          <a:xfrm xmlns:a="http://schemas.openxmlformats.org/drawingml/2006/main">
+            <a:spLocks noGrp="1"/>
+          </p:cNvSpPr>
+          <p:nvPr/>
+        </p:nvSpPr>
+        <p:spPr>
+          <a:xfrm>
             <a:off x="609600" y="400050"/>
             <a:ext cx="9525000" cy="247650"/>
           </a:xfrm>
-          <a:prstGeom xmlns:a="http://schemas.openxmlformats.org/drawingml/2006/main" prst="rect">
-            <a:avLst/>
-          </a:prstGeom>
-          <a:noFill xmlns:a="http://schemas.openxmlformats.org/drawingml/2006/main"/>
-          <a:ln xmlns:a="http://schemas.openxmlformats.org/drawingml/2006/main" w="0">
-            <a:noFill/>
-          </a:ln>
-        </p:spPr>
-        <p:txBody>
-          <a:bodyPr xmlns:a="http://schemas.openxmlformats.org/drawingml/2006/main" lIns="0" tIns="0" rIns="0" bIns="0" anchor="t">
-            <a:noAutofit/>
-          </a:bodyPr>
-          <a:lstStyle xmlns:a="http://schemas.openxmlformats.org/drawingml/2006/main"/>
-          <a:p xmlns:a="http://schemas.openxmlformats.org/drawingml/2006/main">
+          <a:prstGeom prst="rect">
+            <a:avLst/>
+          </a:prstGeom>
+          <a:noFill/>
+          <a:ln w="0">
+            <a:noFill/>
+          </a:ln>
+        </p:spPr>
+        <p:txBody>
+          <a:bodyPr lIns="0" tIns="0" rIns="0" bIns="0" anchor="t">
+            <a:noAutofit/>
+          </a:bodyPr>
+          <a:lstStyle/>
+          <a:p>
             <a:pPr>
               <a:defRPr sz="1200" b="0">
                 <a:solidFill>
@@ -2029,36 +1740,36 @@
       <p:sp>
         <p:nvSpPr>
           <p:cNvPr id="2" name="text-7">
-            <a:extLst xmlns:a="http://schemas.openxmlformats.org/drawingml/2006/main">
+            <a:extLst>
               <a:ext uri="{FF2B5EF4-FFF2-40B4-BE49-F238E27FC236}">
                 <a16:creationId xmlns:a16="http://schemas.microsoft.com/office/drawing/2014/main" id="{1E1B2358-9F80-4D0E-A64C-6C2CFE62ABF3}"/>
               </a:ext>
             </a:extLst>
           </p:cNvPr>
           <p:cNvSpPr>
-            <a:spLocks xmlns:a="http://schemas.openxmlformats.org/drawingml/2006/main" noGrp="1"/>
-          </p:cNvSpPr>
-          <p:nvPr/>
-        </p:nvSpPr>
-        <p:spPr>
-          <a:xfrm xmlns:a="http://schemas.openxmlformats.org/drawingml/2006/main">
+            <a:spLocks noGrp="1"/>
+          </p:cNvSpPr>
+          <p:nvPr/>
+        </p:nvSpPr>
+        <p:spPr>
+          <a:xfrm>
             <a:off x="11049000" y="400050"/>
             <a:ext cx="523875" cy="238125"/>
           </a:xfrm>
-          <a:prstGeom xmlns:a="http://schemas.openxmlformats.org/drawingml/2006/main" prst="rect">
-            <a:avLst/>
-          </a:prstGeom>
-          <a:noFill xmlns:a="http://schemas.openxmlformats.org/drawingml/2006/main"/>
-          <a:ln xmlns:a="http://schemas.openxmlformats.org/drawingml/2006/main" w="0">
-            <a:noFill/>
-          </a:ln>
-        </p:spPr>
-        <p:txBody>
-          <a:bodyPr xmlns:a="http://schemas.openxmlformats.org/drawingml/2006/main" lIns="0" tIns="0" rIns="0" bIns="0" anchor="t">
-            <a:noAutofit/>
-          </a:bodyPr>
-          <a:lstStyle xmlns:a="http://schemas.openxmlformats.org/drawingml/2006/main"/>
-          <a:p xmlns:a="http://schemas.openxmlformats.org/drawingml/2006/main">
+          <a:prstGeom prst="rect">
+            <a:avLst/>
+          </a:prstGeom>
+          <a:noFill/>
+          <a:ln w="0">
+            <a:noFill/>
+          </a:ln>
+        </p:spPr>
+        <p:txBody>
+          <a:bodyPr lIns="0" tIns="0" rIns="0" bIns="0" anchor="t">
+            <a:noAutofit/>
+          </a:bodyPr>
+          <a:lstStyle/>
+          <a:p>
             <a:pPr>
               <a:defRPr sz="1200" b="0">
                 <a:solidFill>
@@ -2086,36 +1797,36 @@
       <p:sp>
         <p:nvSpPr>
           <p:cNvPr id="3" name="text-8">
-            <a:extLst xmlns:a="http://schemas.openxmlformats.org/drawingml/2006/main">
+            <a:extLst>
               <a:ext uri="{FF2B5EF4-FFF2-40B4-BE49-F238E27FC236}">
                 <a16:creationId xmlns:a16="http://schemas.microsoft.com/office/drawing/2014/main" id="{FC8275F1-70E6-43CE-BCB9-D80A8C38794B}"/>
               </a:ext>
             </a:extLst>
           </p:cNvPr>
           <p:cNvSpPr>
-            <a:spLocks xmlns:a="http://schemas.openxmlformats.org/drawingml/2006/main" noGrp="1"/>
-          </p:cNvSpPr>
-          <p:nvPr/>
-        </p:nvSpPr>
-        <p:spPr>
-          <a:xfrm xmlns:a="http://schemas.openxmlformats.org/drawingml/2006/main">
+            <a:spLocks noGrp="1"/>
+          </p:cNvSpPr>
+          <p:nvPr/>
+        </p:nvSpPr>
+        <p:spPr>
+          <a:xfrm>
             <a:off x="609600" y="1009650"/>
             <a:ext cx="10810875" cy="1504950"/>
           </a:xfrm>
-          <a:prstGeom xmlns:a="http://schemas.openxmlformats.org/drawingml/2006/main" prst="rect">
-            <a:avLst/>
-          </a:prstGeom>
-          <a:noFill xmlns:a="http://schemas.openxmlformats.org/drawingml/2006/main"/>
-          <a:ln xmlns:a="http://schemas.openxmlformats.org/drawingml/2006/main" w="0">
-            <a:noFill/>
-          </a:ln>
-        </p:spPr>
-        <p:txBody>
-          <a:bodyPr xmlns:a="http://schemas.openxmlformats.org/drawingml/2006/main" lIns="0" tIns="0" rIns="0" bIns="0" anchor="t">
-            <a:noAutofit/>
-          </a:bodyPr>
-          <a:lstStyle xmlns:a="http://schemas.openxmlformats.org/drawingml/2006/main"/>
-          <a:p xmlns:a="http://schemas.openxmlformats.org/drawingml/2006/main">
+          <a:prstGeom prst="rect">
+            <a:avLst/>
+          </a:prstGeom>
+          <a:noFill/>
+          <a:ln w="0">
+            <a:noFill/>
+          </a:ln>
+        </p:spPr>
+        <p:txBody>
+          <a:bodyPr lIns="0" tIns="0" rIns="0" bIns="0" anchor="t">
+            <a:noAutofit/>
+          </a:bodyPr>
+          <a:lstStyle/>
+          <a:p>
             <a:pPr>
               <a:defRPr sz="4575" b="1">
                 <a:solidFill>
@@ -2138,7 +1849,7 @@
               <a:t>The batch is gone.</a:t>
             </a:r>
           </a:p>
-          <a:p xmlns:a="http://schemas.openxmlformats.org/drawingml/2006/main">
+          <a:p>
             <a:pPr>
               <a:defRPr sz="4575" b="1">
                 <a:solidFill>
@@ -2166,36 +1877,36 @@
       <p:sp>
         <p:nvSpPr>
           <p:cNvPr id="4" name="text-9">
-            <a:extLst xmlns:a="http://schemas.openxmlformats.org/drawingml/2006/main">
+            <a:extLst>
               <a:ext uri="{FF2B5EF4-FFF2-40B4-BE49-F238E27FC236}">
                 <a16:creationId xmlns:a16="http://schemas.microsoft.com/office/drawing/2014/main" id="{B337B4A7-E617-4C1A-9C32-320EAAE71A8D}"/>
               </a:ext>
             </a:extLst>
           </p:cNvPr>
           <p:cNvSpPr>
-            <a:spLocks xmlns:a="http://schemas.openxmlformats.org/drawingml/2006/main" noGrp="1"/>
-          </p:cNvSpPr>
-          <p:nvPr/>
-        </p:nvSpPr>
-        <p:spPr>
-          <a:xfrm xmlns:a="http://schemas.openxmlformats.org/drawingml/2006/main">
+            <a:spLocks noGrp="1"/>
+          </p:cNvSpPr>
+          <p:nvPr/>
+        </p:nvSpPr>
+        <p:spPr>
+          <a:xfrm>
             <a:off x="552450" y="2705100"/>
             <a:ext cx="3048000" cy="1809750"/>
           </a:xfrm>
-          <a:prstGeom xmlns:a="http://schemas.openxmlformats.org/drawingml/2006/main" prst="rect">
-            <a:avLst/>
-          </a:prstGeom>
-          <a:noFill xmlns:a="http://schemas.openxmlformats.org/drawingml/2006/main"/>
-          <a:ln xmlns:a="http://schemas.openxmlformats.org/drawingml/2006/main" w="0">
-            <a:noFill/>
-          </a:ln>
-        </p:spPr>
-        <p:txBody>
-          <a:bodyPr xmlns:a="http://schemas.openxmlformats.org/drawingml/2006/main" lIns="0" tIns="0" rIns="0" bIns="0" anchor="t">
-            <a:noAutofit/>
-          </a:bodyPr>
-          <a:lstStyle xmlns:a="http://schemas.openxmlformats.org/drawingml/2006/main"/>
-          <a:p xmlns:a="http://schemas.openxmlformats.org/drawingml/2006/main">
+          <a:prstGeom prst="rect">
+            <a:avLst/>
+          </a:prstGeom>
+          <a:noFill/>
+          <a:ln w="0">
+            <a:noFill/>
+          </a:ln>
+        </p:spPr>
+        <p:txBody>
+          <a:bodyPr lIns="0" tIns="0" rIns="0" bIns="0" anchor="t">
+            <a:noAutofit/>
+          </a:bodyPr>
+          <a:lstStyle/>
+          <a:p>
             <a:pPr>
               <a:defRPr sz="12750" b="1">
                 <a:solidFill>
@@ -2223,36 +1934,36 @@
       <p:sp>
         <p:nvSpPr>
           <p:cNvPr id="5" name="text-10">
-            <a:extLst xmlns:a="http://schemas.openxmlformats.org/drawingml/2006/main">
+            <a:extLst>
               <a:ext uri="{FF2B5EF4-FFF2-40B4-BE49-F238E27FC236}">
                 <a16:creationId xmlns:a16="http://schemas.microsoft.com/office/drawing/2014/main" id="{58ABA6FD-8B2F-466D-8CCF-6FCE9E1F810C}"/>
               </a:ext>
             </a:extLst>
           </p:cNvPr>
           <p:cNvSpPr>
-            <a:spLocks xmlns:a="http://schemas.openxmlformats.org/drawingml/2006/main" noGrp="1"/>
-          </p:cNvSpPr>
-          <p:nvPr/>
-        </p:nvSpPr>
-        <p:spPr>
-          <a:xfrm xmlns:a="http://schemas.openxmlformats.org/drawingml/2006/main">
+            <a:spLocks noGrp="1"/>
+          </p:cNvSpPr>
+          <p:nvPr/>
+        </p:nvSpPr>
+        <p:spPr>
+          <a:xfrm>
             <a:off x="647700" y="4505325"/>
             <a:ext cx="3524250" cy="638175"/>
           </a:xfrm>
-          <a:prstGeom xmlns:a="http://schemas.openxmlformats.org/drawingml/2006/main" prst="rect">
-            <a:avLst/>
-          </a:prstGeom>
-          <a:noFill xmlns:a="http://schemas.openxmlformats.org/drawingml/2006/main"/>
-          <a:ln xmlns:a="http://schemas.openxmlformats.org/drawingml/2006/main" w="0">
-            <a:noFill/>
-          </a:ln>
-        </p:spPr>
-        <p:txBody>
-          <a:bodyPr xmlns:a="http://schemas.openxmlformats.org/drawingml/2006/main" lIns="0" tIns="0" rIns="0" bIns="0" anchor="t">
-            <a:noAutofit/>
-          </a:bodyPr>
-          <a:lstStyle xmlns:a="http://schemas.openxmlformats.org/drawingml/2006/main"/>
-          <a:p xmlns:a="http://schemas.openxmlformats.org/drawingml/2006/main">
+          <a:prstGeom prst="rect">
+            <a:avLst/>
+          </a:prstGeom>
+          <a:noFill/>
+          <a:ln w="0">
+            <a:noFill/>
+          </a:ln>
+        </p:spPr>
+        <p:txBody>
+          <a:bodyPr lIns="0" tIns="0" rIns="0" bIns="0" anchor="t">
+            <a:noAutofit/>
+          </a:bodyPr>
+          <a:lstStyle/>
+          <a:p>
             <a:pPr>
               <a:defRPr sz="3825" b="1">
                 <a:solidFill>
@@ -2280,36 +1991,36 @@
       <p:sp>
         <p:nvSpPr>
           <p:cNvPr id="6" name="text-11">
-            <a:extLst xmlns:a="http://schemas.openxmlformats.org/drawingml/2006/main">
+            <a:extLst>
               <a:ext uri="{FF2B5EF4-FFF2-40B4-BE49-F238E27FC236}">
                 <a16:creationId xmlns:a16="http://schemas.microsoft.com/office/drawing/2014/main" id="{1146186E-5544-4099-AECF-A4AA1D073CAB}"/>
               </a:ext>
             </a:extLst>
           </p:cNvPr>
           <p:cNvSpPr>
-            <a:spLocks xmlns:a="http://schemas.openxmlformats.org/drawingml/2006/main" noGrp="1"/>
-          </p:cNvSpPr>
-          <p:nvPr/>
-        </p:nvSpPr>
-        <p:spPr>
-          <a:xfrm xmlns:a="http://schemas.openxmlformats.org/drawingml/2006/main">
+            <a:spLocks noGrp="1"/>
+          </p:cNvSpPr>
+          <p:nvPr/>
+        </p:nvSpPr>
+        <p:spPr>
+          <a:xfrm>
             <a:off x="666750" y="5372100"/>
             <a:ext cx="4667250" cy="371475"/>
           </a:xfrm>
-          <a:prstGeom xmlns:a="http://schemas.openxmlformats.org/drawingml/2006/main" prst="rect">
-            <a:avLst/>
-          </a:prstGeom>
-          <a:noFill xmlns:a="http://schemas.openxmlformats.org/drawingml/2006/main"/>
-          <a:ln xmlns:a="http://schemas.openxmlformats.org/drawingml/2006/main" w="0">
-            <a:noFill/>
-          </a:ln>
-        </p:spPr>
-        <p:txBody>
-          <a:bodyPr xmlns:a="http://schemas.openxmlformats.org/drawingml/2006/main" lIns="0" tIns="0" rIns="0" bIns="0" anchor="t">
-            <a:noAutofit/>
-          </a:bodyPr>
-          <a:lstStyle xmlns:a="http://schemas.openxmlformats.org/drawingml/2006/main"/>
-          <a:p xmlns:a="http://schemas.openxmlformats.org/drawingml/2006/main">
+          <a:prstGeom prst="rect">
+            <a:avLst/>
+          </a:prstGeom>
+          <a:noFill/>
+          <a:ln w="0">
+            <a:noFill/>
+          </a:ln>
+        </p:spPr>
+        <p:txBody>
+          <a:bodyPr lIns="0" tIns="0" rIns="0" bIns="0" anchor="t">
+            <a:noAutofit/>
+          </a:bodyPr>
+          <a:lstStyle/>
+          <a:p>
             <a:pPr>
               <a:defRPr sz="1875" b="0">
                 <a:solidFill>
@@ -2337,36 +2048,36 @@
       <p:sp>
         <p:nvSpPr>
           <p:cNvPr id="7" name="text-12">
-            <a:extLst xmlns:a="http://schemas.openxmlformats.org/drawingml/2006/main">
+            <a:extLst>
               <a:ext uri="{FF2B5EF4-FFF2-40B4-BE49-F238E27FC236}">
                 <a16:creationId xmlns:a16="http://schemas.microsoft.com/office/drawing/2014/main" id="{0DB99B50-3BD9-4C31-8C5A-15770FE614E0}"/>
               </a:ext>
             </a:extLst>
           </p:cNvPr>
           <p:cNvSpPr>
-            <a:spLocks xmlns:a="http://schemas.openxmlformats.org/drawingml/2006/main" noGrp="1"/>
-          </p:cNvSpPr>
-          <p:nvPr/>
-        </p:nvSpPr>
-        <p:spPr>
-          <a:xfrm xmlns:a="http://schemas.openxmlformats.org/drawingml/2006/main">
+            <a:spLocks noGrp="1"/>
+          </p:cNvSpPr>
+          <p:nvPr/>
+        </p:nvSpPr>
+        <p:spPr>
+          <a:xfrm>
             <a:off x="5572125" y="2990850"/>
             <a:ext cx="5962650" cy="1238250"/>
           </a:xfrm>
-          <a:prstGeom xmlns:a="http://schemas.openxmlformats.org/drawingml/2006/main" prst="rect">
-            <a:avLst/>
-          </a:prstGeom>
-          <a:noFill xmlns:a="http://schemas.openxmlformats.org/drawingml/2006/main"/>
-          <a:ln xmlns:a="http://schemas.openxmlformats.org/drawingml/2006/main" w="0">
-            <a:noFill/>
-          </a:ln>
-        </p:spPr>
-        <p:txBody>
-          <a:bodyPr xmlns:a="http://schemas.openxmlformats.org/drawingml/2006/main" lIns="0" tIns="0" rIns="0" bIns="0" anchor="t">
-            <a:noAutofit/>
-          </a:bodyPr>
-          <a:lstStyle xmlns:a="http://schemas.openxmlformats.org/drawingml/2006/main"/>
-          <a:p xmlns:a="http://schemas.openxmlformats.org/drawingml/2006/main">
+          <a:prstGeom prst="rect">
+            <a:avLst/>
+          </a:prstGeom>
+          <a:noFill/>
+          <a:ln w="0">
+            <a:noFill/>
+          </a:ln>
+        </p:spPr>
+        <p:txBody>
+          <a:bodyPr lIns="0" tIns="0" rIns="0" bIns="0" anchor="t">
+            <a:noAutofit/>
+          </a:bodyPr>
+          <a:lstStyle/>
+          <a:p>
             <a:pPr>
               <a:defRPr sz="3150" b="0">
                 <a:solidFill>
@@ -2389,7 +2100,7 @@
               <a:t>“We do not necessarily</a:t>
             </a:r>
           </a:p>
-          <a:p xmlns:a="http://schemas.openxmlformats.org/drawingml/2006/main">
+          <a:p>
             <a:pPr>
               <a:defRPr sz="3150" b="0">
                 <a:solidFill>
@@ -2417,36 +2128,36 @@
       <p:sp>
         <p:nvSpPr>
           <p:cNvPr id="8" name="text-13">
-            <a:extLst xmlns:a="http://schemas.openxmlformats.org/drawingml/2006/main">
+            <a:extLst>
               <a:ext uri="{FF2B5EF4-FFF2-40B4-BE49-F238E27FC236}">
                 <a16:creationId xmlns:a16="http://schemas.microsoft.com/office/drawing/2014/main" id="{2FECA9A0-224D-476B-B772-60BD053BDB37}"/>
               </a:ext>
             </a:extLst>
           </p:cNvPr>
           <p:cNvSpPr>
-            <a:spLocks xmlns:a="http://schemas.openxmlformats.org/drawingml/2006/main" noGrp="1"/>
-          </p:cNvSpPr>
-          <p:nvPr/>
-        </p:nvSpPr>
-        <p:spPr>
-          <a:xfrm xmlns:a="http://schemas.openxmlformats.org/drawingml/2006/main">
+            <a:spLocks noGrp="1"/>
+          </p:cNvSpPr>
+          <p:nvPr/>
+        </p:nvSpPr>
+        <p:spPr>
+          <a:xfrm>
             <a:off x="5591175" y="4371975"/>
             <a:ext cx="5619750" cy="285750"/>
           </a:xfrm>
-          <a:prstGeom xmlns:a="http://schemas.openxmlformats.org/drawingml/2006/main" prst="rect">
-            <a:avLst/>
-          </a:prstGeom>
-          <a:noFill xmlns:a="http://schemas.openxmlformats.org/drawingml/2006/main"/>
-          <a:ln xmlns:a="http://schemas.openxmlformats.org/drawingml/2006/main" w="0">
-            <a:noFill/>
-          </a:ln>
-        </p:spPr>
-        <p:txBody>
-          <a:bodyPr xmlns:a="http://schemas.openxmlformats.org/drawingml/2006/main" lIns="0" tIns="0" rIns="0" bIns="0" anchor="t">
-            <a:noAutofit/>
-          </a:bodyPr>
-          <a:lstStyle xmlns:a="http://schemas.openxmlformats.org/drawingml/2006/main"/>
-          <a:p xmlns:a="http://schemas.openxmlformats.org/drawingml/2006/main">
+          <a:prstGeom prst="rect">
+            <a:avLst/>
+          </a:prstGeom>
+          <a:noFill/>
+          <a:ln w="0">
+            <a:noFill/>
+          </a:ln>
+        </p:spPr>
+        <p:txBody>
+          <a:bodyPr lIns="0" tIns="0" rIns="0" bIns="0" anchor="t">
+            <a:noAutofit/>
+          </a:bodyPr>
+          <a:lstStyle/>
+          <a:p>
             <a:pPr>
               <a:defRPr sz="1650" b="0">
                 <a:solidFill>
@@ -2474,36 +2185,36 @@
       <p:sp>
         <p:nvSpPr>
           <p:cNvPr id="9" name="text-14">
-            <a:extLst xmlns:a="http://schemas.openxmlformats.org/drawingml/2006/main">
+            <a:extLst>
               <a:ext uri="{FF2B5EF4-FFF2-40B4-BE49-F238E27FC236}">
                 <a16:creationId xmlns:a16="http://schemas.microsoft.com/office/drawing/2014/main" id="{C4950FBF-3D8E-4827-9C37-49EF7B26C1F7}"/>
               </a:ext>
             </a:extLst>
           </p:cNvPr>
           <p:cNvSpPr>
-            <a:spLocks xmlns:a="http://schemas.openxmlformats.org/drawingml/2006/main" noGrp="1"/>
-          </p:cNvSpPr>
-          <p:nvPr/>
-        </p:nvSpPr>
-        <p:spPr>
-          <a:xfrm xmlns:a="http://schemas.openxmlformats.org/drawingml/2006/main">
+            <a:spLocks noGrp="1"/>
+          </p:cNvSpPr>
+          <p:nvPr/>
+        </p:nvSpPr>
+        <p:spPr>
+          <a:xfrm>
             <a:off x="5591175" y="4981575"/>
             <a:ext cx="5810250" cy="762000"/>
           </a:xfrm>
-          <a:prstGeom xmlns:a="http://schemas.openxmlformats.org/drawingml/2006/main" prst="rect">
-            <a:avLst/>
-          </a:prstGeom>
-          <a:noFill xmlns:a="http://schemas.openxmlformats.org/drawingml/2006/main"/>
-          <a:ln xmlns:a="http://schemas.openxmlformats.org/drawingml/2006/main" w="0">
-            <a:noFill/>
-          </a:ln>
-        </p:spPr>
-        <p:txBody>
-          <a:bodyPr xmlns:a="http://schemas.openxmlformats.org/drawingml/2006/main" lIns="0" tIns="0" rIns="0" bIns="0" anchor="t">
-            <a:noAutofit/>
-          </a:bodyPr>
-          <a:lstStyle xmlns:a="http://schemas.openxmlformats.org/drawingml/2006/main"/>
-          <a:p xmlns:a="http://schemas.openxmlformats.org/drawingml/2006/main">
+          <a:prstGeom prst="rect">
+            <a:avLst/>
+          </a:prstGeom>
+          <a:noFill/>
+          <a:ln w="0">
+            <a:noFill/>
+          </a:ln>
+        </p:spPr>
+        <p:txBody>
+          <a:bodyPr lIns="0" tIns="0" rIns="0" bIns="0" anchor="t">
+            <a:noAutofit/>
+          </a:bodyPr>
+          <a:lstStyle/>
+          <a:p>
             <a:pPr>
               <a:defRPr sz="1875" b="0">
                 <a:solidFill>
@@ -2526,7 +2237,7 @@
               <a:t>Mills use total suspended solids as a proxy.</a:t>
             </a:r>
           </a:p>
-          <a:p xmlns:a="http://schemas.openxmlformats.org/drawingml/2006/main">
+          <a:p>
             <a:pPr>
               <a:defRPr sz="1875" b="0">
                 <a:solidFill>
@@ -2554,36 +2265,36 @@
       <p:sp>
         <p:nvSpPr>
           <p:cNvPr id="10" name="text-15">
-            <a:extLst xmlns:a="http://schemas.openxmlformats.org/drawingml/2006/main">
+            <a:extLst>
               <a:ext uri="{FF2B5EF4-FFF2-40B4-BE49-F238E27FC236}">
                 <a16:creationId xmlns:a16="http://schemas.microsoft.com/office/drawing/2014/main" id="{BB0F67F9-081C-4916-A22E-F7030FAF7163}"/>
               </a:ext>
             </a:extLst>
           </p:cNvPr>
           <p:cNvSpPr>
-            <a:spLocks xmlns:a="http://schemas.openxmlformats.org/drawingml/2006/main" noGrp="1"/>
-          </p:cNvSpPr>
-          <p:nvPr/>
-        </p:nvSpPr>
-        <p:spPr>
-          <a:xfrm xmlns:a="http://schemas.openxmlformats.org/drawingml/2006/main">
+            <a:spLocks noGrp="1"/>
+          </p:cNvSpPr>
+          <p:nvPr/>
+        </p:nvSpPr>
+        <p:spPr>
+          <a:xfrm>
             <a:off x="657225" y="6305550"/>
             <a:ext cx="10668000" cy="257175"/>
           </a:xfrm>
-          <a:prstGeom xmlns:a="http://schemas.openxmlformats.org/drawingml/2006/main" prst="rect">
-            <a:avLst/>
-          </a:prstGeom>
-          <a:noFill xmlns:a="http://schemas.openxmlformats.org/drawingml/2006/main"/>
-          <a:ln xmlns:a="http://schemas.openxmlformats.org/drawingml/2006/main" w="0">
-            <a:noFill/>
-          </a:ln>
-        </p:spPr>
-        <p:txBody>
-          <a:bodyPr xmlns:a="http://schemas.openxmlformats.org/drawingml/2006/main" lIns="0" tIns="0" rIns="0" bIns="0" anchor="t">
-            <a:noAutofit/>
-          </a:bodyPr>
-          <a:lstStyle xmlns:a="http://schemas.openxmlformats.org/drawingml/2006/main"/>
-          <a:p xmlns:a="http://schemas.openxmlformats.org/drawingml/2006/main">
+          <a:prstGeom prst="rect">
+            <a:avLst/>
+          </a:prstGeom>
+          <a:noFill/>
+          <a:ln w="0">
+            <a:noFill/>
+          </a:ln>
+        </p:spPr>
+        <p:txBody>
+          <a:bodyPr lIns="0" tIns="0" rIns="0" bIns="0" anchor="t">
+            <a:noAutofit/>
+          </a:bodyPr>
+          <a:lstStyle/>
+          <a:p>
             <a:pPr>
               <a:defRPr sz="1125" b="0">
                 <a:solidFill>
@@ -2615,17 +2326,21 @@
       </p:ext>
     </p:extLst>
   </p:cSld>
+  <p:clrMapOvr>
+    <a:masterClrMapping/>
+  </p:clrMapOvr>
 </p:sld>
 </file>
 
 <file path=ppt/slides/slide3.xml><?xml version="1.0" encoding="utf-8"?>
-<p:sld xmlns:p="http://schemas.openxmlformats.org/presentationml/2006/main">
+<p:sld xmlns:a="http://schemas.openxmlformats.org/drawingml/2006/main" xmlns:r="http://schemas.openxmlformats.org/officeDocument/2006/relationships" xmlns:p="http://schemas.openxmlformats.org/presentationml/2006/main">
   <p:cSld>
     <p:bg>
       <p:bgPr>
-        <a:solidFill xmlns:a="http://schemas.openxmlformats.org/drawingml/2006/main">
+        <a:solidFill>
           <a:srgbClr val="000000"/>
         </a:solidFill>
+        <a:effectLst/>
       </p:bgPr>
     </p:bg>
     <p:spTree>
@@ -2635,41 +2350,46 @@
         <p:nvPr/>
       </p:nvGrpSpPr>
       <p:grpSpPr>
-        <a:xfrm xmlns:a="http://schemas.openxmlformats.org/drawingml/2006/main"/>
+        <a:xfrm>
+          <a:off x="0" y="0"/>
+          <a:ext cx="0" cy="0"/>
+          <a:chOff x="0" y="0"/>
+          <a:chExt cx="0" cy="0"/>
+        </a:xfrm>
       </p:grpSpPr>
       <p:sp>
         <p:nvSpPr>
           <p:cNvPr id="17" name="text-16">
-            <a:extLst xmlns:a="http://schemas.openxmlformats.org/drawingml/2006/main">
+            <a:extLst>
               <a:ext uri="{FF2B5EF4-FFF2-40B4-BE49-F238E27FC236}">
                 <a16:creationId xmlns:a16="http://schemas.microsoft.com/office/drawing/2014/main" id="{52ACBD5B-731F-4CDF-B16F-1F94ECD07883}"/>
               </a:ext>
             </a:extLst>
           </p:cNvPr>
           <p:cNvSpPr>
-            <a:spLocks xmlns:a="http://schemas.openxmlformats.org/drawingml/2006/main" noGrp="1"/>
-          </p:cNvSpPr>
-          <p:nvPr/>
-        </p:nvSpPr>
-        <p:spPr>
-          <a:xfrm xmlns:a="http://schemas.openxmlformats.org/drawingml/2006/main">
+            <a:spLocks noGrp="1"/>
+          </p:cNvSpPr>
+          <p:nvPr/>
+        </p:nvSpPr>
+        <p:spPr>
+          <a:xfrm>
             <a:off x="609600" y="400050"/>
             <a:ext cx="9525000" cy="247650"/>
           </a:xfrm>
-          <a:prstGeom xmlns:a="http://schemas.openxmlformats.org/drawingml/2006/main" prst="rect">
-            <a:avLst/>
-          </a:prstGeom>
-          <a:noFill xmlns:a="http://schemas.openxmlformats.org/drawingml/2006/main"/>
-          <a:ln xmlns:a="http://schemas.openxmlformats.org/drawingml/2006/main" w="0">
-            <a:noFill/>
-          </a:ln>
-        </p:spPr>
-        <p:txBody>
-          <a:bodyPr xmlns:a="http://schemas.openxmlformats.org/drawingml/2006/main" lIns="0" tIns="0" rIns="0" bIns="0" anchor="t">
-            <a:noAutofit/>
-          </a:bodyPr>
-          <a:lstStyle xmlns:a="http://schemas.openxmlformats.org/drawingml/2006/main"/>
-          <a:p xmlns:a="http://schemas.openxmlformats.org/drawingml/2006/main">
+          <a:prstGeom prst="rect">
+            <a:avLst/>
+          </a:prstGeom>
+          <a:noFill/>
+          <a:ln w="0">
+            <a:noFill/>
+          </a:ln>
+        </p:spPr>
+        <p:txBody>
+          <a:bodyPr lIns="0" tIns="0" rIns="0" bIns="0" anchor="t">
+            <a:noAutofit/>
+          </a:bodyPr>
+          <a:lstStyle/>
+          <a:p>
             <a:pPr>
               <a:defRPr sz="1200" b="0">
                 <a:solidFill>
@@ -2697,36 +2417,36 @@
       <p:sp>
         <p:nvSpPr>
           <p:cNvPr id="2" name="text-17">
-            <a:extLst xmlns:a="http://schemas.openxmlformats.org/drawingml/2006/main">
+            <a:extLst>
               <a:ext uri="{FF2B5EF4-FFF2-40B4-BE49-F238E27FC236}">
                 <a16:creationId xmlns:a16="http://schemas.microsoft.com/office/drawing/2014/main" id="{E7E95FD8-7C87-4E04-ACEF-49D0DA093E39}"/>
               </a:ext>
             </a:extLst>
           </p:cNvPr>
           <p:cNvSpPr>
-            <a:spLocks xmlns:a="http://schemas.openxmlformats.org/drawingml/2006/main" noGrp="1"/>
-          </p:cNvSpPr>
-          <p:nvPr/>
-        </p:nvSpPr>
-        <p:spPr>
-          <a:xfrm xmlns:a="http://schemas.openxmlformats.org/drawingml/2006/main">
+            <a:spLocks noGrp="1"/>
+          </p:cNvSpPr>
+          <p:nvPr/>
+        </p:nvSpPr>
+        <p:spPr>
+          <a:xfrm>
             <a:off x="11049000" y="400050"/>
             <a:ext cx="523875" cy="238125"/>
           </a:xfrm>
-          <a:prstGeom xmlns:a="http://schemas.openxmlformats.org/drawingml/2006/main" prst="rect">
-            <a:avLst/>
-          </a:prstGeom>
-          <a:noFill xmlns:a="http://schemas.openxmlformats.org/drawingml/2006/main"/>
-          <a:ln xmlns:a="http://schemas.openxmlformats.org/drawingml/2006/main" w="0">
-            <a:noFill/>
-          </a:ln>
-        </p:spPr>
-        <p:txBody>
-          <a:bodyPr xmlns:a="http://schemas.openxmlformats.org/drawingml/2006/main" lIns="0" tIns="0" rIns="0" bIns="0" anchor="t">
-            <a:noAutofit/>
-          </a:bodyPr>
-          <a:lstStyle xmlns:a="http://schemas.openxmlformats.org/drawingml/2006/main"/>
-          <a:p xmlns:a="http://schemas.openxmlformats.org/drawingml/2006/main">
+          <a:prstGeom prst="rect">
+            <a:avLst/>
+          </a:prstGeom>
+          <a:noFill/>
+          <a:ln w="0">
+            <a:noFill/>
+          </a:ln>
+        </p:spPr>
+        <p:txBody>
+          <a:bodyPr lIns="0" tIns="0" rIns="0" bIns="0" anchor="t">
+            <a:noAutofit/>
+          </a:bodyPr>
+          <a:lstStyle/>
+          <a:p>
             <a:pPr>
               <a:defRPr sz="1200" b="0">
                 <a:solidFill>
@@ -2754,36 +2474,36 @@
       <p:sp>
         <p:nvSpPr>
           <p:cNvPr id="3" name="text-18">
-            <a:extLst xmlns:a="http://schemas.openxmlformats.org/drawingml/2006/main">
+            <a:extLst>
               <a:ext uri="{FF2B5EF4-FFF2-40B4-BE49-F238E27FC236}">
                 <a16:creationId xmlns:a16="http://schemas.microsoft.com/office/drawing/2014/main" id="{CAEF1C18-4B2D-49C5-BDAE-97D721EEA692}"/>
               </a:ext>
             </a:extLst>
           </p:cNvPr>
           <p:cNvSpPr>
-            <a:spLocks xmlns:a="http://schemas.openxmlformats.org/drawingml/2006/main" noGrp="1"/>
-          </p:cNvSpPr>
-          <p:nvPr/>
-        </p:nvSpPr>
-        <p:spPr>
-          <a:xfrm xmlns:a="http://schemas.openxmlformats.org/drawingml/2006/main">
+            <a:spLocks noGrp="1"/>
+          </p:cNvSpPr>
+          <p:nvPr/>
+        </p:nvSpPr>
+        <p:spPr>
+          <a:xfrm>
             <a:off x="609600" y="1009650"/>
             <a:ext cx="10572750" cy="1438275"/>
           </a:xfrm>
-          <a:prstGeom xmlns:a="http://schemas.openxmlformats.org/drawingml/2006/main" prst="rect">
-            <a:avLst/>
-          </a:prstGeom>
-          <a:noFill xmlns:a="http://schemas.openxmlformats.org/drawingml/2006/main"/>
-          <a:ln xmlns:a="http://schemas.openxmlformats.org/drawingml/2006/main" w="0">
-            <a:noFill/>
-          </a:ln>
-        </p:spPr>
-        <p:txBody>
-          <a:bodyPr xmlns:a="http://schemas.openxmlformats.org/drawingml/2006/main" lIns="0" tIns="0" rIns="0" bIns="0" anchor="t">
-            <a:noAutofit/>
-          </a:bodyPr>
-          <a:lstStyle xmlns:a="http://schemas.openxmlformats.org/drawingml/2006/main"/>
-          <a:p xmlns:a="http://schemas.openxmlformats.org/drawingml/2006/main">
+          <a:prstGeom prst="rect">
+            <a:avLst/>
+          </a:prstGeom>
+          <a:noFill/>
+          <a:ln w="0">
+            <a:noFill/>
+          </a:ln>
+        </p:spPr>
+        <p:txBody>
+          <a:bodyPr lIns="0" tIns="0" rIns="0" bIns="0" anchor="t">
+            <a:noAutofit/>
+          </a:bodyPr>
+          <a:lstStyle/>
+          <a:p>
             <a:pPr>
               <a:defRPr sz="4650" b="1">
                 <a:solidFill>
@@ -2806,7 +2526,7 @@
               <a:t>A microfibre number</a:t>
             </a:r>
           </a:p>
-          <a:p xmlns:a="http://schemas.openxmlformats.org/drawingml/2006/main">
+          <a:p>
             <a:pPr>
               <a:defRPr sz="4650" b="1">
                 <a:solidFill>
@@ -2834,36 +2554,36 @@
       <p:sp>
         <p:nvSpPr>
           <p:cNvPr id="4" name="text-19">
-            <a:extLst xmlns:a="http://schemas.openxmlformats.org/drawingml/2006/main">
+            <a:extLst>
               <a:ext uri="{FF2B5EF4-FFF2-40B4-BE49-F238E27FC236}">
                 <a16:creationId xmlns:a16="http://schemas.microsoft.com/office/drawing/2014/main" id="{C491AD7E-368A-4863-81BC-9D9315FBC8E6}"/>
               </a:ext>
             </a:extLst>
           </p:cNvPr>
           <p:cNvSpPr>
-            <a:spLocks xmlns:a="http://schemas.openxmlformats.org/drawingml/2006/main" noGrp="1"/>
-          </p:cNvSpPr>
-          <p:nvPr/>
-        </p:nvSpPr>
-        <p:spPr>
-          <a:xfrm xmlns:a="http://schemas.openxmlformats.org/drawingml/2006/main">
+            <a:spLocks noGrp="1"/>
+          </p:cNvSpPr>
+          <p:nvPr/>
+        </p:nvSpPr>
+        <p:spPr>
+          <a:xfrm>
             <a:off x="628650" y="2695575"/>
             <a:ext cx="10763250" cy="419100"/>
           </a:xfrm>
-          <a:prstGeom xmlns:a="http://schemas.openxmlformats.org/drawingml/2006/main" prst="rect">
-            <a:avLst/>
-          </a:prstGeom>
-          <a:noFill xmlns:a="http://schemas.openxmlformats.org/drawingml/2006/main"/>
-          <a:ln xmlns:a="http://schemas.openxmlformats.org/drawingml/2006/main" w="0">
-            <a:noFill/>
-          </a:ln>
-        </p:spPr>
-        <p:txBody>
-          <a:bodyPr xmlns:a="http://schemas.openxmlformats.org/drawingml/2006/main" lIns="0" tIns="0" rIns="0" bIns="0" anchor="t">
-            <a:noAutofit/>
-          </a:bodyPr>
-          <a:lstStyle xmlns:a="http://schemas.openxmlformats.org/drawingml/2006/main"/>
-          <a:p xmlns:a="http://schemas.openxmlformats.org/drawingml/2006/main">
+          <a:prstGeom prst="rect">
+            <a:avLst/>
+          </a:prstGeom>
+          <a:noFill/>
+          <a:ln w="0">
+            <a:noFill/>
+          </a:ln>
+        </p:spPr>
+        <p:txBody>
+          <a:bodyPr lIns="0" tIns="0" rIns="0" bIns="0" anchor="t">
+            <a:noAutofit/>
+          </a:bodyPr>
+          <a:lstStyle/>
+          <a:p>
             <a:pPr>
               <a:defRPr sz="2175" b="0">
                 <a:solidFill>
@@ -2891,36 +2611,36 @@
       <p:sp>
         <p:nvSpPr>
           <p:cNvPr id="5" name="text-20">
-            <a:extLst xmlns:a="http://schemas.openxmlformats.org/drawingml/2006/main">
+            <a:extLst>
               <a:ext uri="{FF2B5EF4-FFF2-40B4-BE49-F238E27FC236}">
                 <a16:creationId xmlns:a16="http://schemas.microsoft.com/office/drawing/2014/main" id="{410071C4-30D9-4652-8EA7-280CFBD62B14}"/>
               </a:ext>
             </a:extLst>
           </p:cNvPr>
           <p:cNvSpPr>
-            <a:spLocks xmlns:a="http://schemas.openxmlformats.org/drawingml/2006/main" noGrp="1"/>
-          </p:cNvSpPr>
-          <p:nvPr/>
-        </p:nvSpPr>
-        <p:spPr>
-          <a:xfrm xmlns:a="http://schemas.openxmlformats.org/drawingml/2006/main">
+            <a:spLocks noGrp="1"/>
+          </p:cNvSpPr>
+          <p:nvPr/>
+        </p:nvSpPr>
+        <p:spPr>
+          <a:xfrm>
             <a:off x="647700" y="3705225"/>
             <a:ext cx="857250" cy="457200"/>
           </a:xfrm>
-          <a:prstGeom xmlns:a="http://schemas.openxmlformats.org/drawingml/2006/main" prst="rect">
-            <a:avLst/>
-          </a:prstGeom>
-          <a:noFill xmlns:a="http://schemas.openxmlformats.org/drawingml/2006/main"/>
-          <a:ln xmlns:a="http://schemas.openxmlformats.org/drawingml/2006/main" w="0">
-            <a:noFill/>
-          </a:ln>
-        </p:spPr>
-        <p:txBody>
-          <a:bodyPr xmlns:a="http://schemas.openxmlformats.org/drawingml/2006/main" lIns="0" tIns="0" rIns="0" bIns="0" anchor="t">
-            <a:noAutofit/>
-          </a:bodyPr>
-          <a:lstStyle xmlns:a="http://schemas.openxmlformats.org/drawingml/2006/main"/>
-          <a:p xmlns:a="http://schemas.openxmlformats.org/drawingml/2006/main">
+          <a:prstGeom prst="rect">
+            <a:avLst/>
+          </a:prstGeom>
+          <a:noFill/>
+          <a:ln w="0">
+            <a:noFill/>
+          </a:ln>
+        </p:spPr>
+        <p:txBody>
+          <a:bodyPr lIns="0" tIns="0" rIns="0" bIns="0" anchor="t">
+            <a:noAutofit/>
+          </a:bodyPr>
+          <a:lstStyle/>
+          <a:p>
             <a:pPr>
               <a:defRPr sz="2400" b="1">
                 <a:solidFill>
@@ -2948,36 +2668,36 @@
       <p:sp>
         <p:nvSpPr>
           <p:cNvPr id="6" name="text-21">
-            <a:extLst xmlns:a="http://schemas.openxmlformats.org/drawingml/2006/main">
+            <a:extLst>
               <a:ext uri="{FF2B5EF4-FFF2-40B4-BE49-F238E27FC236}">
                 <a16:creationId xmlns:a16="http://schemas.microsoft.com/office/drawing/2014/main" id="{CA41BD95-4832-4767-B00C-567121C5B4E6}"/>
               </a:ext>
             </a:extLst>
           </p:cNvPr>
           <p:cNvSpPr>
-            <a:spLocks xmlns:a="http://schemas.openxmlformats.org/drawingml/2006/main" noGrp="1"/>
-          </p:cNvSpPr>
-          <p:nvPr/>
-        </p:nvSpPr>
-        <p:spPr>
-          <a:xfrm xmlns:a="http://schemas.openxmlformats.org/drawingml/2006/main">
+            <a:spLocks noGrp="1"/>
+          </p:cNvSpPr>
+          <p:nvPr/>
+        </p:nvSpPr>
+        <p:spPr>
+          <a:xfrm>
             <a:off x="647700" y="4314825"/>
             <a:ext cx="3238500" cy="457200"/>
           </a:xfrm>
-          <a:prstGeom xmlns:a="http://schemas.openxmlformats.org/drawingml/2006/main" prst="rect">
-            <a:avLst/>
-          </a:prstGeom>
-          <a:noFill xmlns:a="http://schemas.openxmlformats.org/drawingml/2006/main"/>
-          <a:ln xmlns:a="http://schemas.openxmlformats.org/drawingml/2006/main" w="0">
-            <a:noFill/>
-          </a:ln>
-        </p:spPr>
-        <p:txBody>
-          <a:bodyPr xmlns:a="http://schemas.openxmlformats.org/drawingml/2006/main" lIns="0" tIns="0" rIns="0" bIns="0" anchor="t">
-            <a:noAutofit/>
-          </a:bodyPr>
-          <a:lstStyle xmlns:a="http://schemas.openxmlformats.org/drawingml/2006/main"/>
-          <a:p xmlns:a="http://schemas.openxmlformats.org/drawingml/2006/main">
+          <a:prstGeom prst="rect">
+            <a:avLst/>
+          </a:prstGeom>
+          <a:noFill/>
+          <a:ln w="0">
+            <a:noFill/>
+          </a:ln>
+        </p:spPr>
+        <p:txBody>
+          <a:bodyPr lIns="0" tIns="0" rIns="0" bIns="0" anchor="t">
+            <a:noAutofit/>
+          </a:bodyPr>
+          <a:lstStyle/>
+          <a:p>
             <a:pPr>
               <a:defRPr sz="2325" b="1">
                 <a:solidFill>
@@ -3005,36 +2725,36 @@
       <p:sp>
         <p:nvSpPr>
           <p:cNvPr id="7" name="text-22">
-            <a:extLst xmlns:a="http://schemas.openxmlformats.org/drawingml/2006/main">
+            <a:extLst>
               <a:ext uri="{FF2B5EF4-FFF2-40B4-BE49-F238E27FC236}">
                 <a16:creationId xmlns:a16="http://schemas.microsoft.com/office/drawing/2014/main" id="{E1B4925D-826C-4737-9801-99D5766C4AA9}"/>
               </a:ext>
             </a:extLst>
           </p:cNvPr>
           <p:cNvSpPr>
-            <a:spLocks xmlns:a="http://schemas.openxmlformats.org/drawingml/2006/main" noGrp="1"/>
-          </p:cNvSpPr>
-          <p:nvPr/>
-        </p:nvSpPr>
-        <p:spPr>
-          <a:xfrm xmlns:a="http://schemas.openxmlformats.org/drawingml/2006/main">
+            <a:spLocks noGrp="1"/>
+          </p:cNvSpPr>
+          <p:nvPr/>
+        </p:nvSpPr>
+        <p:spPr>
+          <a:xfrm>
             <a:off x="647700" y="4914900"/>
             <a:ext cx="3105150" cy="790575"/>
           </a:xfrm>
-          <a:prstGeom xmlns:a="http://schemas.openxmlformats.org/drawingml/2006/main" prst="rect">
-            <a:avLst/>
-          </a:prstGeom>
-          <a:noFill xmlns:a="http://schemas.openxmlformats.org/drawingml/2006/main"/>
-          <a:ln xmlns:a="http://schemas.openxmlformats.org/drawingml/2006/main" w="0">
-            <a:noFill/>
-          </a:ln>
-        </p:spPr>
-        <p:txBody>
-          <a:bodyPr xmlns:a="http://schemas.openxmlformats.org/drawingml/2006/main" lIns="0" tIns="0" rIns="0" bIns="0" anchor="t">
-            <a:noAutofit/>
-          </a:bodyPr>
-          <a:lstStyle xmlns:a="http://schemas.openxmlformats.org/drawingml/2006/main"/>
-          <a:p xmlns:a="http://schemas.openxmlformats.org/drawingml/2006/main">
+          <a:prstGeom prst="rect">
+            <a:avLst/>
+          </a:prstGeom>
+          <a:noFill/>
+          <a:ln w="0">
+            <a:noFill/>
+          </a:ln>
+        </p:spPr>
+        <p:txBody>
+          <a:bodyPr lIns="0" tIns="0" rIns="0" bIns="0" anchor="t">
+            <a:noAutofit/>
+          </a:bodyPr>
+          <a:lstStyle/>
+          <a:p>
             <a:pPr>
               <a:defRPr sz="1800" b="0">
                 <a:solidFill>
@@ -3057,7 +2777,7 @@
               <a:t>A bypass draws</a:t>
             </a:r>
           </a:p>
-          <a:p xmlns:a="http://schemas.openxmlformats.org/drawingml/2006/main">
+          <a:p>
             <a:pPr>
               <a:defRPr sz="1800" b="0">
                 <a:solidFill>
@@ -3084,67 +2804,74 @@
       </p:sp>
       <p:sp>
         <p:nvSpPr>
-          <p:cNvPr id="8" name="">
-            <a:extLst xmlns:a="http://schemas.openxmlformats.org/drawingml/2006/main">
+          <p:cNvPr id="8" name="Straight Connector 7">
+            <a:extLst>
               <a:ext uri="{FF2B5EF4-FFF2-40B4-BE49-F238E27FC236}">
                 <a16:creationId xmlns:a16="http://schemas.microsoft.com/office/drawing/2014/main" id="{BE515B0F-C4E7-4785-9E61-66444A7E75D3}"/>
               </a:ext>
             </a:extLst>
           </p:cNvPr>
           <p:cNvSpPr>
-            <a:spLocks xmlns:a="http://schemas.openxmlformats.org/drawingml/2006/main" noGrp="1"/>
-          </p:cNvSpPr>
-          <p:nvPr/>
-        </p:nvSpPr>
-        <p:spPr>
-          <a:xfrm xmlns:a="http://schemas.openxmlformats.org/drawingml/2006/main">
+            <a:spLocks noGrp="1"/>
+          </p:cNvSpPr>
+          <p:nvPr/>
+        </p:nvSpPr>
+        <p:spPr>
+          <a:xfrm>
             <a:off x="1695450" y="3886200"/>
             <a:ext cx="2286000" cy="0"/>
           </a:xfrm>
-          <a:prstGeom xmlns:a="http://schemas.openxmlformats.org/drawingml/2006/main" prst="line">
-            <a:avLst/>
-          </a:prstGeom>
-          <a:noFill xmlns:a="http://schemas.openxmlformats.org/drawingml/2006/main"/>
-          <a:ln xmlns:a="http://schemas.openxmlformats.org/drawingml/2006/main" w="19050">
+          <a:prstGeom prst="line">
+            <a:avLst/>
+          </a:prstGeom>
+          <a:noFill/>
+          <a:ln w="19050">
             <a:solidFill>
               <a:srgbClr val="8A4FC7"/>
             </a:solidFill>
           </a:ln>
         </p:spPr>
+        <p:txBody>
+          <a:bodyPr/>
+          <a:lstStyle/>
+          <a:p>
+            <a:endParaRPr lang="en-US"/>
+          </a:p>
+        </p:txBody>
       </p:sp>
       <p:sp>
         <p:nvSpPr>
           <p:cNvPr id="9" name="text-23">
-            <a:extLst xmlns:a="http://schemas.openxmlformats.org/drawingml/2006/main">
+            <a:extLst>
               <a:ext uri="{FF2B5EF4-FFF2-40B4-BE49-F238E27FC236}">
                 <a16:creationId xmlns:a16="http://schemas.microsoft.com/office/drawing/2014/main" id="{CC0FB82A-AFF4-4855-82B8-69ADA06CE9EB}"/>
               </a:ext>
             </a:extLst>
           </p:cNvPr>
           <p:cNvSpPr>
-            <a:spLocks xmlns:a="http://schemas.openxmlformats.org/drawingml/2006/main" noGrp="1"/>
-          </p:cNvSpPr>
-          <p:nvPr/>
-        </p:nvSpPr>
-        <p:spPr>
-          <a:xfrm xmlns:a="http://schemas.openxmlformats.org/drawingml/2006/main">
+            <a:spLocks noGrp="1"/>
+          </p:cNvSpPr>
+          <p:nvPr/>
+        </p:nvSpPr>
+        <p:spPr>
+          <a:xfrm>
             <a:off x="4495800" y="3705225"/>
             <a:ext cx="857250" cy="457200"/>
           </a:xfrm>
-          <a:prstGeom xmlns:a="http://schemas.openxmlformats.org/drawingml/2006/main" prst="rect">
-            <a:avLst/>
-          </a:prstGeom>
-          <a:noFill xmlns:a="http://schemas.openxmlformats.org/drawingml/2006/main"/>
-          <a:ln xmlns:a="http://schemas.openxmlformats.org/drawingml/2006/main" w="0">
-            <a:noFill/>
-          </a:ln>
-        </p:spPr>
-        <p:txBody>
-          <a:bodyPr xmlns:a="http://schemas.openxmlformats.org/drawingml/2006/main" lIns="0" tIns="0" rIns="0" bIns="0" anchor="t">
-            <a:noAutofit/>
-          </a:bodyPr>
-          <a:lstStyle xmlns:a="http://schemas.openxmlformats.org/drawingml/2006/main"/>
-          <a:p xmlns:a="http://schemas.openxmlformats.org/drawingml/2006/main">
+          <a:prstGeom prst="rect">
+            <a:avLst/>
+          </a:prstGeom>
+          <a:noFill/>
+          <a:ln w="0">
+            <a:noFill/>
+          </a:ln>
+        </p:spPr>
+        <p:txBody>
+          <a:bodyPr lIns="0" tIns="0" rIns="0" bIns="0" anchor="t">
+            <a:noAutofit/>
+          </a:bodyPr>
+          <a:lstStyle/>
+          <a:p>
             <a:pPr>
               <a:defRPr sz="2400" b="1">
                 <a:solidFill>
@@ -3172,36 +2899,36 @@
       <p:sp>
         <p:nvSpPr>
           <p:cNvPr id="10" name="text-24">
-            <a:extLst xmlns:a="http://schemas.openxmlformats.org/drawingml/2006/main">
+            <a:extLst>
               <a:ext uri="{FF2B5EF4-FFF2-40B4-BE49-F238E27FC236}">
                 <a16:creationId xmlns:a16="http://schemas.microsoft.com/office/drawing/2014/main" id="{140EE68B-2122-4459-AEC0-D005F23CB547}"/>
               </a:ext>
             </a:extLst>
           </p:cNvPr>
           <p:cNvSpPr>
-            <a:spLocks xmlns:a="http://schemas.openxmlformats.org/drawingml/2006/main" noGrp="1"/>
-          </p:cNvSpPr>
-          <p:nvPr/>
-        </p:nvSpPr>
-        <p:spPr>
-          <a:xfrm xmlns:a="http://schemas.openxmlformats.org/drawingml/2006/main">
+            <a:spLocks noGrp="1"/>
+          </p:cNvSpPr>
+          <p:nvPr/>
+        </p:nvSpPr>
+        <p:spPr>
+          <a:xfrm>
             <a:off x="4495800" y="4314825"/>
             <a:ext cx="3238500" cy="457200"/>
           </a:xfrm>
-          <a:prstGeom xmlns:a="http://schemas.openxmlformats.org/drawingml/2006/main" prst="rect">
-            <a:avLst/>
-          </a:prstGeom>
-          <a:noFill xmlns:a="http://schemas.openxmlformats.org/drawingml/2006/main"/>
-          <a:ln xmlns:a="http://schemas.openxmlformats.org/drawingml/2006/main" w="0">
-            <a:noFill/>
-          </a:ln>
-        </p:spPr>
-        <p:txBody>
-          <a:bodyPr xmlns:a="http://schemas.openxmlformats.org/drawingml/2006/main" lIns="0" tIns="0" rIns="0" bIns="0" anchor="t">
-            <a:noAutofit/>
-          </a:bodyPr>
-          <a:lstStyle xmlns:a="http://schemas.openxmlformats.org/drawingml/2006/main"/>
-          <a:p xmlns:a="http://schemas.openxmlformats.org/drawingml/2006/main">
+          <a:prstGeom prst="rect">
+            <a:avLst/>
+          </a:prstGeom>
+          <a:noFill/>
+          <a:ln w="0">
+            <a:noFill/>
+          </a:ln>
+        </p:spPr>
+        <p:txBody>
+          <a:bodyPr lIns="0" tIns="0" rIns="0" bIns="0" anchor="t">
+            <a:noAutofit/>
+          </a:bodyPr>
+          <a:lstStyle/>
+          <a:p>
             <a:pPr>
               <a:defRPr sz="2325" b="1">
                 <a:solidFill>
@@ -3229,36 +2956,36 @@
       <p:sp>
         <p:nvSpPr>
           <p:cNvPr id="11" name="text-25">
-            <a:extLst xmlns:a="http://schemas.openxmlformats.org/drawingml/2006/main">
+            <a:extLst>
               <a:ext uri="{FF2B5EF4-FFF2-40B4-BE49-F238E27FC236}">
                 <a16:creationId xmlns:a16="http://schemas.microsoft.com/office/drawing/2014/main" id="{DC2025CC-1200-4D12-911A-BE3848A8BBD8}"/>
               </a:ext>
             </a:extLst>
           </p:cNvPr>
           <p:cNvSpPr>
-            <a:spLocks xmlns:a="http://schemas.openxmlformats.org/drawingml/2006/main" noGrp="1"/>
-          </p:cNvSpPr>
-          <p:nvPr/>
-        </p:nvSpPr>
-        <p:spPr>
-          <a:xfrm xmlns:a="http://schemas.openxmlformats.org/drawingml/2006/main">
+            <a:spLocks noGrp="1"/>
+          </p:cNvSpPr>
+          <p:nvPr/>
+        </p:nvSpPr>
+        <p:spPr>
+          <a:xfrm>
             <a:off x="4495800" y="4914900"/>
             <a:ext cx="3105150" cy="790575"/>
           </a:xfrm>
-          <a:prstGeom xmlns:a="http://schemas.openxmlformats.org/drawingml/2006/main" prst="rect">
-            <a:avLst/>
-          </a:prstGeom>
-          <a:noFill xmlns:a="http://schemas.openxmlformats.org/drawingml/2006/main"/>
-          <a:ln xmlns:a="http://schemas.openxmlformats.org/drawingml/2006/main" w="0">
-            <a:noFill/>
-          </a:ln>
-        </p:spPr>
-        <p:txBody>
-          <a:bodyPr xmlns:a="http://schemas.openxmlformats.org/drawingml/2006/main" lIns="0" tIns="0" rIns="0" bIns="0" anchor="t">
-            <a:noAutofit/>
-          </a:bodyPr>
-          <a:lstStyle xmlns:a="http://schemas.openxmlformats.org/drawingml/2006/main"/>
-          <a:p xmlns:a="http://schemas.openxmlformats.org/drawingml/2006/main">
+          <a:prstGeom prst="rect">
+            <a:avLst/>
+          </a:prstGeom>
+          <a:noFill/>
+          <a:ln w="0">
+            <a:noFill/>
+          </a:ln>
+        </p:spPr>
+        <p:txBody>
+          <a:bodyPr lIns="0" tIns="0" rIns="0" bIns="0" anchor="t">
+            <a:noAutofit/>
+          </a:bodyPr>
+          <a:lstStyle/>
+          <a:p>
             <a:pPr>
               <a:defRPr sz="1800" b="0">
                 <a:solidFill>
@@ -3281,7 +3008,7 @@
               <a:t>A membrane holds fibres</a:t>
             </a:r>
           </a:p>
-          <a:p xmlns:a="http://schemas.openxmlformats.org/drawingml/2006/main">
+          <a:p>
             <a:pPr>
               <a:defRPr sz="1800" b="0">
                 <a:solidFill>
@@ -3308,67 +3035,74 @@
       </p:sp>
       <p:sp>
         <p:nvSpPr>
-          <p:cNvPr id="12" name="">
-            <a:extLst xmlns:a="http://schemas.openxmlformats.org/drawingml/2006/main">
+          <p:cNvPr id="12" name="Straight Connector 11">
+            <a:extLst>
               <a:ext uri="{FF2B5EF4-FFF2-40B4-BE49-F238E27FC236}">
                 <a16:creationId xmlns:a16="http://schemas.microsoft.com/office/drawing/2014/main" id="{26BBC531-4AFD-42B7-B98E-D75548CD7013}"/>
               </a:ext>
             </a:extLst>
           </p:cNvPr>
           <p:cNvSpPr>
-            <a:spLocks xmlns:a="http://schemas.openxmlformats.org/drawingml/2006/main" noGrp="1"/>
-          </p:cNvSpPr>
-          <p:nvPr/>
-        </p:nvSpPr>
-        <p:spPr>
-          <a:xfrm xmlns:a="http://schemas.openxmlformats.org/drawingml/2006/main">
+            <a:spLocks noGrp="1"/>
+          </p:cNvSpPr>
+          <p:nvPr/>
+        </p:nvSpPr>
+        <p:spPr>
+          <a:xfrm>
             <a:off x="5543550" y="3886200"/>
             <a:ext cx="2286000" cy="0"/>
           </a:xfrm>
-          <a:prstGeom xmlns:a="http://schemas.openxmlformats.org/drawingml/2006/main" prst="line">
-            <a:avLst/>
-          </a:prstGeom>
-          <a:noFill xmlns:a="http://schemas.openxmlformats.org/drawingml/2006/main"/>
-          <a:ln xmlns:a="http://schemas.openxmlformats.org/drawingml/2006/main" w="19050">
+          <a:prstGeom prst="line">
+            <a:avLst/>
+          </a:prstGeom>
+          <a:noFill/>
+          <a:ln w="19050">
             <a:solidFill>
               <a:srgbClr val="3CC8D8"/>
             </a:solidFill>
           </a:ln>
         </p:spPr>
+        <p:txBody>
+          <a:bodyPr/>
+          <a:lstStyle/>
+          <a:p>
+            <a:endParaRPr lang="en-US"/>
+          </a:p>
+        </p:txBody>
       </p:sp>
       <p:sp>
         <p:nvSpPr>
           <p:cNvPr id="13" name="text-26">
-            <a:extLst xmlns:a="http://schemas.openxmlformats.org/drawingml/2006/main">
+            <a:extLst>
               <a:ext uri="{FF2B5EF4-FFF2-40B4-BE49-F238E27FC236}">
                 <a16:creationId xmlns:a16="http://schemas.microsoft.com/office/drawing/2014/main" id="{6AE6D615-BB39-4016-B841-079519BF6922}"/>
               </a:ext>
             </a:extLst>
           </p:cNvPr>
           <p:cNvSpPr>
-            <a:spLocks xmlns:a="http://schemas.openxmlformats.org/drawingml/2006/main" noGrp="1"/>
-          </p:cNvSpPr>
-          <p:nvPr/>
-        </p:nvSpPr>
-        <p:spPr>
-          <a:xfrm xmlns:a="http://schemas.openxmlformats.org/drawingml/2006/main">
+            <a:spLocks noGrp="1"/>
+          </p:cNvSpPr>
+          <p:nvPr/>
+        </p:nvSpPr>
+        <p:spPr>
+          <a:xfrm>
             <a:off x="8439150" y="3705225"/>
             <a:ext cx="857250" cy="457200"/>
           </a:xfrm>
-          <a:prstGeom xmlns:a="http://schemas.openxmlformats.org/drawingml/2006/main" prst="rect">
-            <a:avLst/>
-          </a:prstGeom>
-          <a:noFill xmlns:a="http://schemas.openxmlformats.org/drawingml/2006/main"/>
-          <a:ln xmlns:a="http://schemas.openxmlformats.org/drawingml/2006/main" w="0">
-            <a:noFill/>
-          </a:ln>
-        </p:spPr>
-        <p:txBody>
-          <a:bodyPr xmlns:a="http://schemas.openxmlformats.org/drawingml/2006/main" lIns="0" tIns="0" rIns="0" bIns="0" anchor="t">
-            <a:noAutofit/>
-          </a:bodyPr>
-          <a:lstStyle xmlns:a="http://schemas.openxmlformats.org/drawingml/2006/main"/>
-          <a:p xmlns:a="http://schemas.openxmlformats.org/drawingml/2006/main">
+          <a:prstGeom prst="rect">
+            <a:avLst/>
+          </a:prstGeom>
+          <a:noFill/>
+          <a:ln w="0">
+            <a:noFill/>
+          </a:ln>
+        </p:spPr>
+        <p:txBody>
+          <a:bodyPr lIns="0" tIns="0" rIns="0" bIns="0" anchor="t">
+            <a:noAutofit/>
+          </a:bodyPr>
+          <a:lstStyle/>
+          <a:p>
             <a:pPr>
               <a:defRPr sz="2400" b="1">
                 <a:solidFill>
@@ -3396,36 +3130,36 @@
       <p:sp>
         <p:nvSpPr>
           <p:cNvPr id="14" name="text-27">
-            <a:extLst xmlns:a="http://schemas.openxmlformats.org/drawingml/2006/main">
+            <a:extLst>
               <a:ext uri="{FF2B5EF4-FFF2-40B4-BE49-F238E27FC236}">
                 <a16:creationId xmlns:a16="http://schemas.microsoft.com/office/drawing/2014/main" id="{85CF6A96-BD91-4FFE-BF90-63448E19BA1E}"/>
               </a:ext>
             </a:extLst>
           </p:cNvPr>
           <p:cNvSpPr>
-            <a:spLocks xmlns:a="http://schemas.openxmlformats.org/drawingml/2006/main" noGrp="1"/>
-          </p:cNvSpPr>
-          <p:nvPr/>
-        </p:nvSpPr>
-        <p:spPr>
-          <a:xfrm xmlns:a="http://schemas.openxmlformats.org/drawingml/2006/main">
+            <a:spLocks noGrp="1"/>
+          </p:cNvSpPr>
+          <p:nvPr/>
+        </p:nvSpPr>
+        <p:spPr>
+          <a:xfrm>
             <a:off x="8439150" y="4314825"/>
             <a:ext cx="3238500" cy="457200"/>
           </a:xfrm>
-          <a:prstGeom xmlns:a="http://schemas.openxmlformats.org/drawingml/2006/main" prst="rect">
-            <a:avLst/>
-          </a:prstGeom>
-          <a:noFill xmlns:a="http://schemas.openxmlformats.org/drawingml/2006/main"/>
-          <a:ln xmlns:a="http://schemas.openxmlformats.org/drawingml/2006/main" w="0">
-            <a:noFill/>
-          </a:ln>
-        </p:spPr>
-        <p:txBody>
-          <a:bodyPr xmlns:a="http://schemas.openxmlformats.org/drawingml/2006/main" lIns="0" tIns="0" rIns="0" bIns="0" anchor="t">
-            <a:noAutofit/>
-          </a:bodyPr>
-          <a:lstStyle xmlns:a="http://schemas.openxmlformats.org/drawingml/2006/main"/>
-          <a:p xmlns:a="http://schemas.openxmlformats.org/drawingml/2006/main">
+          <a:prstGeom prst="rect">
+            <a:avLst/>
+          </a:prstGeom>
+          <a:noFill/>
+          <a:ln w="0">
+            <a:noFill/>
+          </a:ln>
+        </p:spPr>
+        <p:txBody>
+          <a:bodyPr lIns="0" tIns="0" rIns="0" bIns="0" anchor="t">
+            <a:noAutofit/>
+          </a:bodyPr>
+          <a:lstStyle/>
+          <a:p>
             <a:pPr>
               <a:defRPr sz="2325" b="1">
                 <a:solidFill>
@@ -3453,36 +3187,36 @@
       <p:sp>
         <p:nvSpPr>
           <p:cNvPr id="15" name="text-28">
-            <a:extLst xmlns:a="http://schemas.openxmlformats.org/drawingml/2006/main">
+            <a:extLst>
               <a:ext uri="{FF2B5EF4-FFF2-40B4-BE49-F238E27FC236}">
                 <a16:creationId xmlns:a16="http://schemas.microsoft.com/office/drawing/2014/main" id="{E847A675-ACCD-4BBC-A10E-9BE3C51458E5}"/>
               </a:ext>
             </a:extLst>
           </p:cNvPr>
           <p:cNvSpPr>
-            <a:spLocks xmlns:a="http://schemas.openxmlformats.org/drawingml/2006/main" noGrp="1"/>
-          </p:cNvSpPr>
-          <p:nvPr/>
-        </p:nvSpPr>
-        <p:spPr>
-          <a:xfrm xmlns:a="http://schemas.openxmlformats.org/drawingml/2006/main">
+            <a:spLocks noGrp="1"/>
+          </p:cNvSpPr>
+          <p:nvPr/>
+        </p:nvSpPr>
+        <p:spPr>
+          <a:xfrm>
             <a:off x="8439150" y="4914900"/>
             <a:ext cx="3105150" cy="790575"/>
           </a:xfrm>
-          <a:prstGeom xmlns:a="http://schemas.openxmlformats.org/drawingml/2006/main" prst="rect">
-            <a:avLst/>
-          </a:prstGeom>
-          <a:noFill xmlns:a="http://schemas.openxmlformats.org/drawingml/2006/main"/>
-          <a:ln xmlns:a="http://schemas.openxmlformats.org/drawingml/2006/main" w="0">
-            <a:noFill/>
-          </a:ln>
-        </p:spPr>
-        <p:txBody>
-          <a:bodyPr xmlns:a="http://schemas.openxmlformats.org/drawingml/2006/main" lIns="0" tIns="0" rIns="0" bIns="0" anchor="t">
-            <a:noAutofit/>
-          </a:bodyPr>
-          <a:lstStyle xmlns:a="http://schemas.openxmlformats.org/drawingml/2006/main"/>
-          <a:p xmlns:a="http://schemas.openxmlformats.org/drawingml/2006/main">
+          <a:prstGeom prst="rect">
+            <a:avLst/>
+          </a:prstGeom>
+          <a:noFill/>
+          <a:ln w="0">
+            <a:noFill/>
+          </a:ln>
+        </p:spPr>
+        <p:txBody>
+          <a:bodyPr lIns="0" tIns="0" rIns="0" bIns="0" anchor="t">
+            <a:noAutofit/>
+          </a:bodyPr>
+          <a:lstStyle/>
+          <a:p>
             <a:pPr>
               <a:defRPr sz="1800" b="0">
                 <a:solidFill>
@@ -3505,7 +3239,7 @@
               <a:t>Count and size fibres,</a:t>
             </a:r>
           </a:p>
-          <a:p xmlns:a="http://schemas.openxmlformats.org/drawingml/2006/main">
+          <a:p>
             <a:pPr>
               <a:defRPr sz="1800" b="0">
                 <a:solidFill>
@@ -3533,36 +3267,36 @@
       <p:sp>
         <p:nvSpPr>
           <p:cNvPr id="16" name="text-29">
-            <a:extLst xmlns:a="http://schemas.openxmlformats.org/drawingml/2006/main">
+            <a:extLst>
               <a:ext uri="{FF2B5EF4-FFF2-40B4-BE49-F238E27FC236}">
                 <a16:creationId xmlns:a16="http://schemas.microsoft.com/office/drawing/2014/main" id="{319EA897-F26D-4117-A620-E4B78A9BDA0F}"/>
               </a:ext>
             </a:extLst>
           </p:cNvPr>
           <p:cNvSpPr>
-            <a:spLocks xmlns:a="http://schemas.openxmlformats.org/drawingml/2006/main" noGrp="1"/>
-          </p:cNvSpPr>
-          <p:nvPr/>
-        </p:nvSpPr>
-        <p:spPr>
-          <a:xfrm xmlns:a="http://schemas.openxmlformats.org/drawingml/2006/main">
+            <a:spLocks noGrp="1"/>
+          </p:cNvSpPr>
+          <p:nvPr/>
+        </p:nvSpPr>
+        <p:spPr>
+          <a:xfrm>
             <a:off x="647700" y="6267450"/>
             <a:ext cx="10858500" cy="285750"/>
           </a:xfrm>
-          <a:prstGeom xmlns:a="http://schemas.openxmlformats.org/drawingml/2006/main" prst="rect">
-            <a:avLst/>
-          </a:prstGeom>
-          <a:noFill xmlns:a="http://schemas.openxmlformats.org/drawingml/2006/main"/>
-          <a:ln xmlns:a="http://schemas.openxmlformats.org/drawingml/2006/main" w="0">
-            <a:noFill/>
-          </a:ln>
-        </p:spPr>
-        <p:txBody>
-          <a:bodyPr xmlns:a="http://schemas.openxmlformats.org/drawingml/2006/main" lIns="0" tIns="0" rIns="0" bIns="0" anchor="t">
-            <a:noAutofit/>
-          </a:bodyPr>
-          <a:lstStyle xmlns:a="http://schemas.openxmlformats.org/drawingml/2006/main"/>
-          <a:p xmlns:a="http://schemas.openxmlformats.org/drawingml/2006/main">
+          <a:prstGeom prst="rect">
+            <a:avLst/>
+          </a:prstGeom>
+          <a:noFill/>
+          <a:ln w="0">
+            <a:noFill/>
+          </a:ln>
+        </p:spPr>
+        <p:txBody>
+          <a:bodyPr lIns="0" tIns="0" rIns="0" bIns="0" anchor="t">
+            <a:noAutofit/>
+          </a:bodyPr>
+          <a:lstStyle/>
+          <a:p>
             <a:pPr>
               <a:defRPr sz="1350" b="0">
                 <a:solidFill>
@@ -3594,17 +3328,21 @@
       </p:ext>
     </p:extLst>
   </p:cSld>
+  <p:clrMapOvr>
+    <a:masterClrMapping/>
+  </p:clrMapOvr>
 </p:sld>
 </file>
 
 <file path=ppt/slides/slide4.xml><?xml version="1.0" encoding="utf-8"?>
-<p:sld xmlns:p="http://schemas.openxmlformats.org/presentationml/2006/main">
+<p:sld xmlns:a="http://schemas.openxmlformats.org/drawingml/2006/main" xmlns:r="http://schemas.openxmlformats.org/officeDocument/2006/relationships" xmlns:p="http://schemas.openxmlformats.org/presentationml/2006/main">
   <p:cSld>
     <p:bg>
       <p:bgPr>
-        <a:solidFill xmlns:a="http://schemas.openxmlformats.org/drawingml/2006/main">
+        <a:solidFill>
           <a:srgbClr val="000000"/>
         </a:solidFill>
+        <a:effectLst/>
       </p:bgPr>
     </p:bg>
     <p:spTree>
@@ -3614,41 +3352,46 @@
         <p:nvPr/>
       </p:nvGrpSpPr>
       <p:grpSpPr>
-        <a:xfrm xmlns:a="http://schemas.openxmlformats.org/drawingml/2006/main"/>
+        <a:xfrm>
+          <a:off x="0" y="0"/>
+          <a:ext cx="0" cy="0"/>
+          <a:chOff x="0" y="0"/>
+          <a:chExt cx="0" cy="0"/>
+        </a:xfrm>
       </p:grpSpPr>
       <p:sp>
         <p:nvSpPr>
           <p:cNvPr id="11" name="text-30">
-            <a:extLst xmlns:a="http://schemas.openxmlformats.org/drawingml/2006/main">
+            <a:extLst>
               <a:ext uri="{FF2B5EF4-FFF2-40B4-BE49-F238E27FC236}">
                 <a16:creationId xmlns:a16="http://schemas.microsoft.com/office/drawing/2014/main" id="{5B383D9C-8106-4134-9A3B-D38DC8B8ADFE}"/>
               </a:ext>
             </a:extLst>
           </p:cNvPr>
           <p:cNvSpPr>
-            <a:spLocks xmlns:a="http://schemas.openxmlformats.org/drawingml/2006/main" noGrp="1"/>
-          </p:cNvSpPr>
-          <p:nvPr/>
-        </p:nvSpPr>
-        <p:spPr>
-          <a:xfrm xmlns:a="http://schemas.openxmlformats.org/drawingml/2006/main">
+            <a:spLocks noGrp="1"/>
+          </p:cNvSpPr>
+          <p:nvPr/>
+        </p:nvSpPr>
+        <p:spPr>
+          <a:xfrm>
             <a:off x="609600" y="400050"/>
             <a:ext cx="9525000" cy="247650"/>
           </a:xfrm>
-          <a:prstGeom xmlns:a="http://schemas.openxmlformats.org/drawingml/2006/main" prst="rect">
-            <a:avLst/>
-          </a:prstGeom>
-          <a:noFill xmlns:a="http://schemas.openxmlformats.org/drawingml/2006/main"/>
-          <a:ln xmlns:a="http://schemas.openxmlformats.org/drawingml/2006/main" w="0">
-            <a:noFill/>
-          </a:ln>
-        </p:spPr>
-        <p:txBody>
-          <a:bodyPr xmlns:a="http://schemas.openxmlformats.org/drawingml/2006/main" lIns="0" tIns="0" rIns="0" bIns="0" anchor="t">
-            <a:noAutofit/>
-          </a:bodyPr>
-          <a:lstStyle xmlns:a="http://schemas.openxmlformats.org/drawingml/2006/main"/>
-          <a:p xmlns:a="http://schemas.openxmlformats.org/drawingml/2006/main">
+          <a:prstGeom prst="rect">
+            <a:avLst/>
+          </a:prstGeom>
+          <a:noFill/>
+          <a:ln w="0">
+            <a:noFill/>
+          </a:ln>
+        </p:spPr>
+        <p:txBody>
+          <a:bodyPr lIns="0" tIns="0" rIns="0" bIns="0" anchor="t">
+            <a:noAutofit/>
+          </a:bodyPr>
+          <a:lstStyle/>
+          <a:p>
             <a:pPr>
               <a:defRPr sz="1200" b="0">
                 <a:solidFill>
@@ -3676,36 +3419,36 @@
       <p:sp>
         <p:nvSpPr>
           <p:cNvPr id="2" name="text-31">
-            <a:extLst xmlns:a="http://schemas.openxmlformats.org/drawingml/2006/main">
+            <a:extLst>
               <a:ext uri="{FF2B5EF4-FFF2-40B4-BE49-F238E27FC236}">
                 <a16:creationId xmlns:a16="http://schemas.microsoft.com/office/drawing/2014/main" id="{79A56C70-95D2-4FCC-A393-3B8F563232D9}"/>
               </a:ext>
             </a:extLst>
           </p:cNvPr>
           <p:cNvSpPr>
-            <a:spLocks xmlns:a="http://schemas.openxmlformats.org/drawingml/2006/main" noGrp="1"/>
-          </p:cNvSpPr>
-          <p:nvPr/>
-        </p:nvSpPr>
-        <p:spPr>
-          <a:xfrm xmlns:a="http://schemas.openxmlformats.org/drawingml/2006/main">
+            <a:spLocks noGrp="1"/>
+          </p:cNvSpPr>
+          <p:nvPr/>
+        </p:nvSpPr>
+        <p:spPr>
+          <a:xfrm>
             <a:off x="11049000" y="400050"/>
             <a:ext cx="523875" cy="238125"/>
           </a:xfrm>
-          <a:prstGeom xmlns:a="http://schemas.openxmlformats.org/drawingml/2006/main" prst="rect">
-            <a:avLst/>
-          </a:prstGeom>
-          <a:noFill xmlns:a="http://schemas.openxmlformats.org/drawingml/2006/main"/>
-          <a:ln xmlns:a="http://schemas.openxmlformats.org/drawingml/2006/main" w="0">
-            <a:noFill/>
-          </a:ln>
-        </p:spPr>
-        <p:txBody>
-          <a:bodyPr xmlns:a="http://schemas.openxmlformats.org/drawingml/2006/main" lIns="0" tIns="0" rIns="0" bIns="0" anchor="t">
-            <a:noAutofit/>
-          </a:bodyPr>
-          <a:lstStyle xmlns:a="http://schemas.openxmlformats.org/drawingml/2006/main"/>
-          <a:p xmlns:a="http://schemas.openxmlformats.org/drawingml/2006/main">
+          <a:prstGeom prst="rect">
+            <a:avLst/>
+          </a:prstGeom>
+          <a:noFill/>
+          <a:ln w="0">
+            <a:noFill/>
+          </a:ln>
+        </p:spPr>
+        <p:txBody>
+          <a:bodyPr lIns="0" tIns="0" rIns="0" bIns="0" anchor="t">
+            <a:noAutofit/>
+          </a:bodyPr>
+          <a:lstStyle/>
+          <a:p>
             <a:pPr>
               <a:defRPr sz="1200" b="0">
                 <a:solidFill>
@@ -3733,36 +3476,36 @@
       <p:sp>
         <p:nvSpPr>
           <p:cNvPr id="3" name="text-32">
-            <a:extLst xmlns:a="http://schemas.openxmlformats.org/drawingml/2006/main">
+            <a:extLst>
               <a:ext uri="{FF2B5EF4-FFF2-40B4-BE49-F238E27FC236}">
                 <a16:creationId xmlns:a16="http://schemas.microsoft.com/office/drawing/2014/main" id="{9A7B7398-BD9C-453D-8A7C-79219C7554F1}"/>
               </a:ext>
             </a:extLst>
           </p:cNvPr>
           <p:cNvSpPr>
-            <a:spLocks xmlns:a="http://schemas.openxmlformats.org/drawingml/2006/main" noGrp="1"/>
-          </p:cNvSpPr>
-          <p:nvPr/>
-        </p:nvSpPr>
-        <p:spPr>
-          <a:xfrm xmlns:a="http://schemas.openxmlformats.org/drawingml/2006/main">
+            <a:spLocks noGrp="1"/>
+          </p:cNvSpPr>
+          <p:nvPr/>
+        </p:nvSpPr>
+        <p:spPr>
+          <a:xfrm>
             <a:off x="609600" y="1019175"/>
             <a:ext cx="10953750" cy="1438275"/>
           </a:xfrm>
-          <a:prstGeom xmlns:a="http://schemas.openxmlformats.org/drawingml/2006/main" prst="rect">
-            <a:avLst/>
-          </a:prstGeom>
-          <a:noFill xmlns:a="http://schemas.openxmlformats.org/drawingml/2006/main"/>
-          <a:ln xmlns:a="http://schemas.openxmlformats.org/drawingml/2006/main" w="0">
-            <a:noFill/>
-          </a:ln>
-        </p:spPr>
-        <p:txBody>
-          <a:bodyPr xmlns:a="http://schemas.openxmlformats.org/drawingml/2006/main" lIns="0" tIns="0" rIns="0" bIns="0" anchor="t">
-            <a:noAutofit/>
-          </a:bodyPr>
-          <a:lstStyle xmlns:a="http://schemas.openxmlformats.org/drawingml/2006/main"/>
-          <a:p xmlns:a="http://schemas.openxmlformats.org/drawingml/2006/main">
+          <a:prstGeom prst="rect">
+            <a:avLst/>
+          </a:prstGeom>
+          <a:noFill/>
+          <a:ln w="0">
+            <a:noFill/>
+          </a:ln>
+        </p:spPr>
+        <p:txBody>
+          <a:bodyPr lIns="0" tIns="0" rIns="0" bIns="0" anchor="t">
+            <a:noAutofit/>
+          </a:bodyPr>
+          <a:lstStyle/>
+          <a:p>
             <a:pPr>
               <a:defRPr sz="4650" b="1">
                 <a:solidFill>
@@ -3785,7 +3528,7 @@
               <a:t>The industry is testing</a:t>
             </a:r>
           </a:p>
-          <a:p xmlns:a="http://schemas.openxmlformats.org/drawingml/2006/main">
+          <a:p>
             <a:pPr>
               <a:defRPr sz="4650" b="1">
                 <a:solidFill>
@@ -3813,36 +3556,36 @@
       <p:sp>
         <p:nvSpPr>
           <p:cNvPr id="4" name="text-33">
-            <a:extLst xmlns:a="http://schemas.openxmlformats.org/drawingml/2006/main">
+            <a:extLst>
               <a:ext uri="{FF2B5EF4-FFF2-40B4-BE49-F238E27FC236}">
                 <a16:creationId xmlns:a16="http://schemas.microsoft.com/office/drawing/2014/main" id="{5DB659AA-FA7A-42BA-9AA0-024317E91207}"/>
               </a:ext>
             </a:extLst>
           </p:cNvPr>
           <p:cNvSpPr>
-            <a:spLocks xmlns:a="http://schemas.openxmlformats.org/drawingml/2006/main" noGrp="1"/>
-          </p:cNvSpPr>
-          <p:nvPr/>
-        </p:nvSpPr>
-        <p:spPr>
-          <a:xfrm xmlns:a="http://schemas.openxmlformats.org/drawingml/2006/main">
+            <a:spLocks noGrp="1"/>
+          </p:cNvSpPr>
+          <p:nvPr/>
+        </p:nvSpPr>
+        <p:spPr>
+          <a:xfrm>
             <a:off x="552450" y="2800350"/>
             <a:ext cx="3810000" cy="1695450"/>
           </a:xfrm>
-          <a:prstGeom xmlns:a="http://schemas.openxmlformats.org/drawingml/2006/main" prst="rect">
-            <a:avLst/>
-          </a:prstGeom>
-          <a:noFill xmlns:a="http://schemas.openxmlformats.org/drawingml/2006/main"/>
-          <a:ln xmlns:a="http://schemas.openxmlformats.org/drawingml/2006/main" w="0">
-            <a:noFill/>
-          </a:ln>
-        </p:spPr>
-        <p:txBody>
-          <a:bodyPr xmlns:a="http://schemas.openxmlformats.org/drawingml/2006/main" lIns="0" tIns="0" rIns="0" bIns="0" anchor="t">
-            <a:noAutofit/>
-          </a:bodyPr>
-          <a:lstStyle xmlns:a="http://schemas.openxmlformats.org/drawingml/2006/main"/>
-          <a:p xmlns:a="http://schemas.openxmlformats.org/drawingml/2006/main">
+          <a:prstGeom prst="rect">
+            <a:avLst/>
+          </a:prstGeom>
+          <a:noFill/>
+          <a:ln w="0">
+            <a:noFill/>
+          </a:ln>
+        </p:spPr>
+        <p:txBody>
+          <a:bodyPr lIns="0" tIns="0" rIns="0" bIns="0" anchor="t">
+            <a:noAutofit/>
+          </a:bodyPr>
+          <a:lstStyle/>
+          <a:p>
             <a:pPr>
               <a:defRPr sz="11550" b="1">
                 <a:solidFill>
@@ -3854,7 +3597,7 @@
               </a:defRPr>
             </a:pPr>
             <a:r>
-              <a:rPr sz="11550" b="1">
+              <a:rPr sz="11550" b="1" dirty="0">
                 <a:solidFill>
                   <a:srgbClr val="3CC8D8"/>
                 </a:solidFill>
@@ -3870,36 +3613,36 @@
       <p:sp>
         <p:nvSpPr>
           <p:cNvPr id="5" name="text-34">
-            <a:extLst xmlns:a="http://schemas.openxmlformats.org/drawingml/2006/main">
+            <a:extLst>
               <a:ext uri="{FF2B5EF4-FFF2-40B4-BE49-F238E27FC236}">
                 <a16:creationId xmlns:a16="http://schemas.microsoft.com/office/drawing/2014/main" id="{F7E5E27F-F5AB-44FD-AC31-94F1BED7CD88}"/>
               </a:ext>
             </a:extLst>
           </p:cNvPr>
           <p:cNvSpPr>
-            <a:spLocks xmlns:a="http://schemas.openxmlformats.org/drawingml/2006/main" noGrp="1"/>
-          </p:cNvSpPr>
-          <p:nvPr/>
-        </p:nvSpPr>
-        <p:spPr>
-          <a:xfrm xmlns:a="http://schemas.openxmlformats.org/drawingml/2006/main">
+            <a:spLocks noGrp="1"/>
+          </p:cNvSpPr>
+          <p:nvPr/>
+        </p:nvSpPr>
+        <p:spPr>
+          <a:xfrm>
             <a:off x="638175" y="4467225"/>
             <a:ext cx="4048125" cy="552450"/>
           </a:xfrm>
-          <a:prstGeom xmlns:a="http://schemas.openxmlformats.org/drawingml/2006/main" prst="rect">
-            <a:avLst/>
-          </a:prstGeom>
-          <a:noFill xmlns:a="http://schemas.openxmlformats.org/drawingml/2006/main"/>
-          <a:ln xmlns:a="http://schemas.openxmlformats.org/drawingml/2006/main" w="0">
-            <a:noFill/>
-          </a:ln>
-        </p:spPr>
-        <p:txBody>
-          <a:bodyPr xmlns:a="http://schemas.openxmlformats.org/drawingml/2006/main" lIns="0" tIns="0" rIns="0" bIns="0" anchor="t">
-            <a:noAutofit/>
-          </a:bodyPr>
-          <a:lstStyle xmlns:a="http://schemas.openxmlformats.org/drawingml/2006/main"/>
-          <a:p xmlns:a="http://schemas.openxmlformats.org/drawingml/2006/main">
+          <a:prstGeom prst="rect">
+            <a:avLst/>
+          </a:prstGeom>
+          <a:noFill/>
+          <a:ln w="0">
+            <a:noFill/>
+          </a:ln>
+        </p:spPr>
+        <p:txBody>
+          <a:bodyPr lIns="0" tIns="0" rIns="0" bIns="0" anchor="t">
+            <a:noAutofit/>
+          </a:bodyPr>
+          <a:lstStyle/>
+          <a:p>
             <a:pPr>
               <a:defRPr sz="3450" b="1">
                 <a:solidFill>
@@ -3911,7 +3654,7 @@
               </a:defRPr>
             </a:pPr>
             <a:r>
-              <a:rPr sz="3450" b="1">
+              <a:rPr sz="3450" b="1" dirty="0">
                 <a:solidFill>
                   <a:srgbClr val="FFFFFF"/>
                 </a:solidFill>
@@ -3927,36 +3670,36 @@
       <p:sp>
         <p:nvSpPr>
           <p:cNvPr id="6" name="text-35">
-            <a:extLst xmlns:a="http://schemas.openxmlformats.org/drawingml/2006/main">
+            <a:extLst>
               <a:ext uri="{FF2B5EF4-FFF2-40B4-BE49-F238E27FC236}">
                 <a16:creationId xmlns:a16="http://schemas.microsoft.com/office/drawing/2014/main" id="{E1FBE35B-93C7-417A-9AB1-39ECE6DA26EB}"/>
               </a:ext>
             </a:extLst>
           </p:cNvPr>
           <p:cNvSpPr>
-            <a:spLocks xmlns:a="http://schemas.openxmlformats.org/drawingml/2006/main" noGrp="1"/>
-          </p:cNvSpPr>
-          <p:nvPr/>
-        </p:nvSpPr>
-        <p:spPr>
-          <a:xfrm xmlns:a="http://schemas.openxmlformats.org/drawingml/2006/main">
+            <a:spLocks noGrp="1"/>
+          </p:cNvSpPr>
+          <p:nvPr/>
+        </p:nvSpPr>
+        <p:spPr>
+          <a:xfrm>
             <a:off x="647700" y="5229225"/>
             <a:ext cx="4762500" cy="666750"/>
           </a:xfrm>
-          <a:prstGeom xmlns:a="http://schemas.openxmlformats.org/drawingml/2006/main" prst="rect">
-            <a:avLst/>
-          </a:prstGeom>
-          <a:noFill xmlns:a="http://schemas.openxmlformats.org/drawingml/2006/main"/>
-          <a:ln xmlns:a="http://schemas.openxmlformats.org/drawingml/2006/main" w="0">
-            <a:noFill/>
-          </a:ln>
-        </p:spPr>
-        <p:txBody>
-          <a:bodyPr xmlns:a="http://schemas.openxmlformats.org/drawingml/2006/main" lIns="0" tIns="0" rIns="0" bIns="0" anchor="t">
-            <a:noAutofit/>
-          </a:bodyPr>
-          <a:lstStyle xmlns:a="http://schemas.openxmlformats.org/drawingml/2006/main"/>
-          <a:p xmlns:a="http://schemas.openxmlformats.org/drawingml/2006/main">
+          <a:prstGeom prst="rect">
+            <a:avLst/>
+          </a:prstGeom>
+          <a:noFill/>
+          <a:ln w="0">
+            <a:noFill/>
+          </a:ln>
+        </p:spPr>
+        <p:txBody>
+          <a:bodyPr lIns="0" tIns="0" rIns="0" bIns="0" anchor="t">
+            <a:noAutofit/>
+          </a:bodyPr>
+          <a:lstStyle/>
+          <a:p>
             <a:pPr>
               <a:defRPr sz="1875" b="0">
                 <a:solidFill>
@@ -3984,36 +3727,36 @@
       <p:sp>
         <p:nvSpPr>
           <p:cNvPr id="7" name="text-36">
-            <a:extLst xmlns:a="http://schemas.openxmlformats.org/drawingml/2006/main">
+            <a:extLst>
               <a:ext uri="{FF2B5EF4-FFF2-40B4-BE49-F238E27FC236}">
                 <a16:creationId xmlns:a16="http://schemas.microsoft.com/office/drawing/2014/main" id="{6F8D4799-21FB-4797-907D-7A2AB71FF32E}"/>
               </a:ext>
             </a:extLst>
           </p:cNvPr>
           <p:cNvSpPr>
-            <a:spLocks xmlns:a="http://schemas.openxmlformats.org/drawingml/2006/main" noGrp="1"/>
-          </p:cNvSpPr>
-          <p:nvPr/>
-        </p:nvSpPr>
-        <p:spPr>
-          <a:xfrm xmlns:a="http://schemas.openxmlformats.org/drawingml/2006/main">
+            <a:spLocks noGrp="1"/>
+          </p:cNvSpPr>
+          <p:nvPr/>
+        </p:nvSpPr>
+        <p:spPr>
+          <a:xfrm>
             <a:off x="5943600" y="3038475"/>
             <a:ext cx="5600700" cy="952500"/>
           </a:xfrm>
-          <a:prstGeom xmlns:a="http://schemas.openxmlformats.org/drawingml/2006/main" prst="rect">
-            <a:avLst/>
-          </a:prstGeom>
-          <a:noFill xmlns:a="http://schemas.openxmlformats.org/drawingml/2006/main"/>
-          <a:ln xmlns:a="http://schemas.openxmlformats.org/drawingml/2006/main" w="0">
-            <a:noFill/>
-          </a:ln>
-        </p:spPr>
-        <p:txBody>
-          <a:bodyPr xmlns:a="http://schemas.openxmlformats.org/drawingml/2006/main" lIns="0" tIns="0" rIns="0" bIns="0" anchor="t">
-            <a:noAutofit/>
-          </a:bodyPr>
-          <a:lstStyle xmlns:a="http://schemas.openxmlformats.org/drawingml/2006/main"/>
-          <a:p xmlns:a="http://schemas.openxmlformats.org/drawingml/2006/main">
+          <a:prstGeom prst="rect">
+            <a:avLst/>
+          </a:prstGeom>
+          <a:noFill/>
+          <a:ln w="0">
+            <a:noFill/>
+          </a:ln>
+        </p:spPr>
+        <p:txBody>
+          <a:bodyPr lIns="0" tIns="0" rIns="0" bIns="0" anchor="t">
+            <a:noAutofit/>
+          </a:bodyPr>
+          <a:lstStyle/>
+          <a:p>
             <a:pPr>
               <a:defRPr sz="2550" b="1">
                 <a:solidFill>
@@ -4036,7 +3779,7 @@
               <a:t>Can suspended solids stand in</a:t>
             </a:r>
           </a:p>
-          <a:p xmlns:a="http://schemas.openxmlformats.org/drawingml/2006/main">
+          <a:p>
             <a:pPr>
               <a:defRPr sz="2550" b="1">
                 <a:solidFill>
@@ -4064,36 +3807,36 @@
       <p:sp>
         <p:nvSpPr>
           <p:cNvPr id="8" name="text-37">
-            <a:extLst xmlns:a="http://schemas.openxmlformats.org/drawingml/2006/main">
+            <a:extLst>
               <a:ext uri="{FF2B5EF4-FFF2-40B4-BE49-F238E27FC236}">
                 <a16:creationId xmlns:a16="http://schemas.microsoft.com/office/drawing/2014/main" id="{A0288C81-1076-4A9F-BAD5-3A13B45ED133}"/>
               </a:ext>
             </a:extLst>
           </p:cNvPr>
           <p:cNvSpPr>
-            <a:spLocks xmlns:a="http://schemas.openxmlformats.org/drawingml/2006/main" noGrp="1"/>
-          </p:cNvSpPr>
-          <p:nvPr/>
-        </p:nvSpPr>
-        <p:spPr>
-          <a:xfrm xmlns:a="http://schemas.openxmlformats.org/drawingml/2006/main">
+            <a:spLocks noGrp="1"/>
+          </p:cNvSpPr>
+          <p:nvPr/>
+        </p:nvSpPr>
+        <p:spPr>
+          <a:xfrm>
             <a:off x="5962650" y="4219575"/>
             <a:ext cx="5524500" cy="809625"/>
           </a:xfrm>
-          <a:prstGeom xmlns:a="http://schemas.openxmlformats.org/drawingml/2006/main" prst="rect">
-            <a:avLst/>
-          </a:prstGeom>
-          <a:noFill xmlns:a="http://schemas.openxmlformats.org/drawingml/2006/main"/>
-          <a:ln xmlns:a="http://schemas.openxmlformats.org/drawingml/2006/main" w="0">
-            <a:noFill/>
-          </a:ln>
-        </p:spPr>
-        <p:txBody>
-          <a:bodyPr xmlns:a="http://schemas.openxmlformats.org/drawingml/2006/main" lIns="0" tIns="0" rIns="0" bIns="0" anchor="t">
-            <a:noAutofit/>
-          </a:bodyPr>
-          <a:lstStyle xmlns:a="http://schemas.openxmlformats.org/drawingml/2006/main"/>
-          <a:p xmlns:a="http://schemas.openxmlformats.org/drawingml/2006/main">
+          <a:prstGeom prst="rect">
+            <a:avLst/>
+          </a:prstGeom>
+          <a:noFill/>
+          <a:ln w="0">
+            <a:noFill/>
+          </a:ln>
+        </p:spPr>
+        <p:txBody>
+          <a:bodyPr lIns="0" tIns="0" rIns="0" bIns="0" anchor="t">
+            <a:noAutofit/>
+          </a:bodyPr>
+          <a:lstStyle/>
+          <a:p>
             <a:pPr>
               <a:defRPr sz="1950" b="0">
                 <a:solidFill>
@@ -4116,7 +3859,7 @@
               <a:t>adidas, lululemon, Primark and Tesco</a:t>
             </a:r>
           </a:p>
-          <a:p xmlns:a="http://schemas.openxmlformats.org/drawingml/2006/main">
+          <a:p>
             <a:pPr>
               <a:defRPr sz="1950" b="0">
                 <a:solidFill>
@@ -4144,36 +3887,36 @@
       <p:sp>
         <p:nvSpPr>
           <p:cNvPr id="9" name="text-38">
-            <a:extLst xmlns:a="http://schemas.openxmlformats.org/drawingml/2006/main">
+            <a:extLst>
               <a:ext uri="{FF2B5EF4-FFF2-40B4-BE49-F238E27FC236}">
                 <a16:creationId xmlns:a16="http://schemas.microsoft.com/office/drawing/2014/main" id="{C0447ABA-586C-4BDC-BA53-7F83AE9BBF86}"/>
               </a:ext>
             </a:extLst>
           </p:cNvPr>
           <p:cNvSpPr>
-            <a:spLocks xmlns:a="http://schemas.openxmlformats.org/drawingml/2006/main" noGrp="1"/>
-          </p:cNvSpPr>
-          <p:nvPr/>
-        </p:nvSpPr>
-        <p:spPr>
-          <a:xfrm xmlns:a="http://schemas.openxmlformats.org/drawingml/2006/main">
+            <a:spLocks noGrp="1"/>
+          </p:cNvSpPr>
+          <p:nvPr/>
+        </p:nvSpPr>
+        <p:spPr>
+          <a:xfrm>
             <a:off x="5962650" y="5314950"/>
             <a:ext cx="5524500" cy="704850"/>
           </a:xfrm>
-          <a:prstGeom xmlns:a="http://schemas.openxmlformats.org/drawingml/2006/main" prst="rect">
-            <a:avLst/>
-          </a:prstGeom>
-          <a:noFill xmlns:a="http://schemas.openxmlformats.org/drawingml/2006/main"/>
-          <a:ln xmlns:a="http://schemas.openxmlformats.org/drawingml/2006/main" w="0">
-            <a:noFill/>
-          </a:ln>
-        </p:spPr>
-        <p:txBody>
-          <a:bodyPr xmlns:a="http://schemas.openxmlformats.org/drawingml/2006/main" lIns="0" tIns="0" rIns="0" bIns="0" anchor="t">
-            <a:noAutofit/>
-          </a:bodyPr>
-          <a:lstStyle xmlns:a="http://schemas.openxmlformats.org/drawingml/2006/main"/>
-          <a:p xmlns:a="http://schemas.openxmlformats.org/drawingml/2006/main">
+          <a:prstGeom prst="rect">
+            <a:avLst/>
+          </a:prstGeom>
+          <a:noFill/>
+          <a:ln w="0">
+            <a:noFill/>
+          </a:ln>
+        </p:spPr>
+        <p:txBody>
+          <a:bodyPr lIns="0" tIns="0" rIns="0" bIns="0" anchor="t">
+            <a:noAutofit/>
+          </a:bodyPr>
+          <a:lstStyle/>
+          <a:p>
             <a:pPr>
               <a:defRPr sz="1950" b="0">
                 <a:solidFill>
@@ -4196,7 +3939,7 @@
               <a:t>Inditex also grades mills on whether</a:t>
             </a:r>
           </a:p>
-          <a:p xmlns:a="http://schemas.openxmlformats.org/drawingml/2006/main">
+          <a:p>
             <a:pPr>
               <a:defRPr sz="1950" b="0">
                 <a:solidFill>
@@ -4224,36 +3967,36 @@
       <p:sp>
         <p:nvSpPr>
           <p:cNvPr id="10" name="text-39">
-            <a:extLst xmlns:a="http://schemas.openxmlformats.org/drawingml/2006/main">
+            <a:extLst>
               <a:ext uri="{FF2B5EF4-FFF2-40B4-BE49-F238E27FC236}">
                 <a16:creationId xmlns:a16="http://schemas.microsoft.com/office/drawing/2014/main" id="{C1CF175D-66FD-49AE-928D-177C9E0DA690}"/>
               </a:ext>
             </a:extLst>
           </p:cNvPr>
           <p:cNvSpPr>
-            <a:spLocks xmlns:a="http://schemas.openxmlformats.org/drawingml/2006/main" noGrp="1"/>
-          </p:cNvSpPr>
-          <p:nvPr/>
-        </p:nvSpPr>
-        <p:spPr>
-          <a:xfrm xmlns:a="http://schemas.openxmlformats.org/drawingml/2006/main">
+            <a:spLocks noGrp="1"/>
+          </p:cNvSpPr>
+          <p:nvPr/>
+        </p:nvSpPr>
+        <p:spPr>
+          <a:xfrm>
             <a:off x="647700" y="6315075"/>
             <a:ext cx="10877550" cy="257175"/>
           </a:xfrm>
-          <a:prstGeom xmlns:a="http://schemas.openxmlformats.org/drawingml/2006/main" prst="rect">
-            <a:avLst/>
-          </a:prstGeom>
-          <a:noFill xmlns:a="http://schemas.openxmlformats.org/drawingml/2006/main"/>
-          <a:ln xmlns:a="http://schemas.openxmlformats.org/drawingml/2006/main" w="0">
-            <a:noFill/>
-          </a:ln>
-        </p:spPr>
-        <p:txBody>
-          <a:bodyPr xmlns:a="http://schemas.openxmlformats.org/drawingml/2006/main" lIns="0" tIns="0" rIns="0" bIns="0" anchor="t">
-            <a:noAutofit/>
-          </a:bodyPr>
-          <a:lstStyle xmlns:a="http://schemas.openxmlformats.org/drawingml/2006/main"/>
-          <a:p xmlns:a="http://schemas.openxmlformats.org/drawingml/2006/main">
+          <a:prstGeom prst="rect">
+            <a:avLst/>
+          </a:prstGeom>
+          <a:noFill/>
+          <a:ln w="0">
+            <a:noFill/>
+          </a:ln>
+        </p:spPr>
+        <p:txBody>
+          <a:bodyPr lIns="0" tIns="0" rIns="0" bIns="0" anchor="t">
+            <a:noAutofit/>
+          </a:bodyPr>
+          <a:lstStyle/>
+          <a:p>
             <a:pPr>
               <a:defRPr sz="1125" b="0">
                 <a:solidFill>
@@ -4285,17 +4028,21 @@
       </p:ext>
     </p:extLst>
   </p:cSld>
+  <p:clrMapOvr>
+    <a:masterClrMapping/>
+  </p:clrMapOvr>
 </p:sld>
 </file>
 
 <file path=ppt/slides/slide5.xml><?xml version="1.0" encoding="utf-8"?>
-<p:sld xmlns:p="http://schemas.openxmlformats.org/presentationml/2006/main">
+<p:sld xmlns:a="http://schemas.openxmlformats.org/drawingml/2006/main" xmlns:r="http://schemas.openxmlformats.org/officeDocument/2006/relationships" xmlns:p="http://schemas.openxmlformats.org/presentationml/2006/main">
   <p:cSld>
     <p:bg>
       <p:bgPr>
-        <a:solidFill xmlns:a="http://schemas.openxmlformats.org/drawingml/2006/main">
+        <a:solidFill>
           <a:srgbClr val="000000"/>
         </a:solidFill>
+        <a:effectLst/>
       </p:bgPr>
     </p:bg>
     <p:spTree>
@@ -4305,41 +4052,46 @@
         <p:nvPr/>
       </p:nvGrpSpPr>
       <p:grpSpPr>
-        <a:xfrm xmlns:a="http://schemas.openxmlformats.org/drawingml/2006/main"/>
+        <a:xfrm>
+          <a:off x="0" y="0"/>
+          <a:ext cx="0" cy="0"/>
+          <a:chOff x="0" y="0"/>
+          <a:chExt cx="0" cy="0"/>
+        </a:xfrm>
       </p:grpSpPr>
       <p:sp>
         <p:nvSpPr>
           <p:cNvPr id="13" name="text-40">
-            <a:extLst xmlns:a="http://schemas.openxmlformats.org/drawingml/2006/main">
+            <a:extLst>
               <a:ext uri="{FF2B5EF4-FFF2-40B4-BE49-F238E27FC236}">
                 <a16:creationId xmlns:a16="http://schemas.microsoft.com/office/drawing/2014/main" id="{497182A1-45D5-4201-B882-57A6877EDF0F}"/>
               </a:ext>
             </a:extLst>
           </p:cNvPr>
           <p:cNvSpPr>
-            <a:spLocks xmlns:a="http://schemas.openxmlformats.org/drawingml/2006/main" noGrp="1"/>
-          </p:cNvSpPr>
-          <p:nvPr/>
-        </p:nvSpPr>
-        <p:spPr>
-          <a:xfrm xmlns:a="http://schemas.openxmlformats.org/drawingml/2006/main">
+            <a:spLocks noGrp="1"/>
+          </p:cNvSpPr>
+          <p:nvPr/>
+        </p:nvSpPr>
+        <p:spPr>
+          <a:xfrm>
             <a:off x="609600" y="400050"/>
             <a:ext cx="9525000" cy="247650"/>
           </a:xfrm>
-          <a:prstGeom xmlns:a="http://schemas.openxmlformats.org/drawingml/2006/main" prst="rect">
-            <a:avLst/>
-          </a:prstGeom>
-          <a:noFill xmlns:a="http://schemas.openxmlformats.org/drawingml/2006/main"/>
-          <a:ln xmlns:a="http://schemas.openxmlformats.org/drawingml/2006/main" w="0">
-            <a:noFill/>
-          </a:ln>
-        </p:spPr>
-        <p:txBody>
-          <a:bodyPr xmlns:a="http://schemas.openxmlformats.org/drawingml/2006/main" lIns="0" tIns="0" rIns="0" bIns="0" anchor="t">
-            <a:noAutofit/>
-          </a:bodyPr>
-          <a:lstStyle xmlns:a="http://schemas.openxmlformats.org/drawingml/2006/main"/>
-          <a:p xmlns:a="http://schemas.openxmlformats.org/drawingml/2006/main">
+          <a:prstGeom prst="rect">
+            <a:avLst/>
+          </a:prstGeom>
+          <a:noFill/>
+          <a:ln w="0">
+            <a:noFill/>
+          </a:ln>
+        </p:spPr>
+        <p:txBody>
+          <a:bodyPr lIns="0" tIns="0" rIns="0" bIns="0" anchor="t">
+            <a:noAutofit/>
+          </a:bodyPr>
+          <a:lstStyle/>
+          <a:p>
             <a:pPr>
               <a:defRPr sz="1200" b="0">
                 <a:solidFill>
@@ -4367,36 +4119,36 @@
       <p:sp>
         <p:nvSpPr>
           <p:cNvPr id="2" name="text-41">
-            <a:extLst xmlns:a="http://schemas.openxmlformats.org/drawingml/2006/main">
+            <a:extLst>
               <a:ext uri="{FF2B5EF4-FFF2-40B4-BE49-F238E27FC236}">
                 <a16:creationId xmlns:a16="http://schemas.microsoft.com/office/drawing/2014/main" id="{365A011D-695B-4168-9164-5E9B57AD76B9}"/>
               </a:ext>
             </a:extLst>
           </p:cNvPr>
           <p:cNvSpPr>
-            <a:spLocks xmlns:a="http://schemas.openxmlformats.org/drawingml/2006/main" noGrp="1"/>
-          </p:cNvSpPr>
-          <p:nvPr/>
-        </p:nvSpPr>
-        <p:spPr>
-          <a:xfrm xmlns:a="http://schemas.openxmlformats.org/drawingml/2006/main">
+            <a:spLocks noGrp="1"/>
+          </p:cNvSpPr>
+          <p:nvPr/>
+        </p:nvSpPr>
+        <p:spPr>
+          <a:xfrm>
             <a:off x="11049000" y="400050"/>
             <a:ext cx="523875" cy="238125"/>
           </a:xfrm>
-          <a:prstGeom xmlns:a="http://schemas.openxmlformats.org/drawingml/2006/main" prst="rect">
-            <a:avLst/>
-          </a:prstGeom>
-          <a:noFill xmlns:a="http://schemas.openxmlformats.org/drawingml/2006/main"/>
-          <a:ln xmlns:a="http://schemas.openxmlformats.org/drawingml/2006/main" w="0">
-            <a:noFill/>
-          </a:ln>
-        </p:spPr>
-        <p:txBody>
-          <a:bodyPr xmlns:a="http://schemas.openxmlformats.org/drawingml/2006/main" lIns="0" tIns="0" rIns="0" bIns="0" anchor="t">
-            <a:noAutofit/>
-          </a:bodyPr>
-          <a:lstStyle xmlns:a="http://schemas.openxmlformats.org/drawingml/2006/main"/>
-          <a:p xmlns:a="http://schemas.openxmlformats.org/drawingml/2006/main">
+          <a:prstGeom prst="rect">
+            <a:avLst/>
+          </a:prstGeom>
+          <a:noFill/>
+          <a:ln w="0">
+            <a:noFill/>
+          </a:ln>
+        </p:spPr>
+        <p:txBody>
+          <a:bodyPr lIns="0" tIns="0" rIns="0" bIns="0" anchor="t">
+            <a:noAutofit/>
+          </a:bodyPr>
+          <a:lstStyle/>
+          <a:p>
             <a:pPr>
               <a:defRPr sz="1200" b="0">
                 <a:solidFill>
@@ -4424,36 +4176,36 @@
       <p:sp>
         <p:nvSpPr>
           <p:cNvPr id="3" name="text-42">
-            <a:extLst xmlns:a="http://schemas.openxmlformats.org/drawingml/2006/main">
+            <a:extLst>
               <a:ext uri="{FF2B5EF4-FFF2-40B4-BE49-F238E27FC236}">
                 <a16:creationId xmlns:a16="http://schemas.microsoft.com/office/drawing/2014/main" id="{09B6FE37-A15E-4F71-BF3F-A33CEA60CC99}"/>
               </a:ext>
             </a:extLst>
           </p:cNvPr>
           <p:cNvSpPr>
-            <a:spLocks xmlns:a="http://schemas.openxmlformats.org/drawingml/2006/main" noGrp="1"/>
-          </p:cNvSpPr>
-          <p:nvPr/>
-        </p:nvSpPr>
-        <p:spPr>
-          <a:xfrm xmlns:a="http://schemas.openxmlformats.org/drawingml/2006/main">
+            <a:spLocks noGrp="1"/>
+          </p:cNvSpPr>
+          <p:nvPr/>
+        </p:nvSpPr>
+        <p:spPr>
+          <a:xfrm>
             <a:off x="609600" y="1028700"/>
             <a:ext cx="10953750" cy="1409700"/>
           </a:xfrm>
-          <a:prstGeom xmlns:a="http://schemas.openxmlformats.org/drawingml/2006/main" prst="rect">
-            <a:avLst/>
-          </a:prstGeom>
-          <a:noFill xmlns:a="http://schemas.openxmlformats.org/drawingml/2006/main"/>
-          <a:ln xmlns:a="http://schemas.openxmlformats.org/drawingml/2006/main" w="0">
-            <a:noFill/>
-          </a:ln>
-        </p:spPr>
-        <p:txBody>
-          <a:bodyPr xmlns:a="http://schemas.openxmlformats.org/drawingml/2006/main" lIns="0" tIns="0" rIns="0" bIns="0" anchor="t">
-            <a:noAutofit/>
-          </a:bodyPr>
-          <a:lstStyle xmlns:a="http://schemas.openxmlformats.org/drawingml/2006/main"/>
-          <a:p xmlns:a="http://schemas.openxmlformats.org/drawingml/2006/main">
+          <a:prstGeom prst="rect">
+            <a:avLst/>
+          </a:prstGeom>
+          <a:noFill/>
+          <a:ln w="0">
+            <a:noFill/>
+          </a:ln>
+        </p:spPr>
+        <p:txBody>
+          <a:bodyPr lIns="0" tIns="0" rIns="0" bIns="0" anchor="t">
+            <a:noAutofit/>
+          </a:bodyPr>
+          <a:lstStyle/>
+          <a:p>
             <a:pPr>
               <a:defRPr sz="4500" b="1">
                 <a:solidFill>
@@ -4476,7 +4228,7 @@
               <a:t>Factory engineering meets</a:t>
             </a:r>
           </a:p>
-          <a:p xmlns:a="http://schemas.openxmlformats.org/drawingml/2006/main">
+          <a:p>
             <a:pPr>
               <a:defRPr sz="4500" b="1">
                 <a:solidFill>
@@ -4504,36 +4256,36 @@
       <p:sp>
         <p:nvSpPr>
           <p:cNvPr id="4" name="text-43">
-            <a:extLst xmlns:a="http://schemas.openxmlformats.org/drawingml/2006/main">
+            <a:extLst>
               <a:ext uri="{FF2B5EF4-FFF2-40B4-BE49-F238E27FC236}">
                 <a16:creationId xmlns:a16="http://schemas.microsoft.com/office/drawing/2014/main" id="{28E920BD-D2F4-4BBF-B7D1-A658F9082814}"/>
               </a:ext>
             </a:extLst>
           </p:cNvPr>
           <p:cNvSpPr>
-            <a:spLocks xmlns:a="http://schemas.openxmlformats.org/drawingml/2006/main" noGrp="1"/>
-          </p:cNvSpPr>
-          <p:nvPr/>
-        </p:nvSpPr>
-        <p:spPr>
-          <a:xfrm xmlns:a="http://schemas.openxmlformats.org/drawingml/2006/main">
+            <a:spLocks noGrp="1"/>
+          </p:cNvSpPr>
+          <p:nvPr/>
+        </p:nvSpPr>
+        <p:spPr>
+          <a:xfrm>
             <a:off x="638175" y="2943225"/>
             <a:ext cx="5400675" cy="600075"/>
           </a:xfrm>
-          <a:prstGeom xmlns:a="http://schemas.openxmlformats.org/drawingml/2006/main" prst="rect">
-            <a:avLst/>
-          </a:prstGeom>
-          <a:noFill xmlns:a="http://schemas.openxmlformats.org/drawingml/2006/main"/>
-          <a:ln xmlns:a="http://schemas.openxmlformats.org/drawingml/2006/main" w="0">
-            <a:noFill/>
-          </a:ln>
-        </p:spPr>
-        <p:txBody>
-          <a:bodyPr xmlns:a="http://schemas.openxmlformats.org/drawingml/2006/main" lIns="0" tIns="0" rIns="0" bIns="0" anchor="t">
-            <a:noAutofit/>
-          </a:bodyPr>
-          <a:lstStyle xmlns:a="http://schemas.openxmlformats.org/drawingml/2006/main"/>
-          <a:p xmlns:a="http://schemas.openxmlformats.org/drawingml/2006/main">
+          <a:prstGeom prst="rect">
+            <a:avLst/>
+          </a:prstGeom>
+          <a:noFill/>
+          <a:ln w="0">
+            <a:noFill/>
+          </a:ln>
+        </p:spPr>
+        <p:txBody>
+          <a:bodyPr lIns="0" tIns="0" rIns="0" bIns="0" anchor="t">
+            <a:noAutofit/>
+          </a:bodyPr>
+          <a:lstStyle/>
+          <a:p>
             <a:pPr>
               <a:defRPr sz="3600" b="1">
                 <a:solidFill>
@@ -4561,36 +4313,36 @@
       <p:sp>
         <p:nvSpPr>
           <p:cNvPr id="5" name="text-44">
-            <a:extLst xmlns:a="http://schemas.openxmlformats.org/drawingml/2006/main">
+            <a:extLst>
               <a:ext uri="{FF2B5EF4-FFF2-40B4-BE49-F238E27FC236}">
                 <a16:creationId xmlns:a16="http://schemas.microsoft.com/office/drawing/2014/main" id="{AE8715B5-D591-4D3F-8A9E-F3D10922F962}"/>
               </a:ext>
             </a:extLst>
           </p:cNvPr>
           <p:cNvSpPr>
-            <a:spLocks xmlns:a="http://schemas.openxmlformats.org/drawingml/2006/main" noGrp="1"/>
-          </p:cNvSpPr>
-          <p:nvPr/>
-        </p:nvSpPr>
-        <p:spPr>
-          <a:xfrm xmlns:a="http://schemas.openxmlformats.org/drawingml/2006/main">
+            <a:spLocks noGrp="1"/>
+          </p:cNvSpPr>
+          <p:nvPr/>
+        </p:nvSpPr>
+        <p:spPr>
+          <a:xfrm>
             <a:off x="647700" y="3638550"/>
             <a:ext cx="5238750" cy="333375"/>
           </a:xfrm>
-          <a:prstGeom xmlns:a="http://schemas.openxmlformats.org/drawingml/2006/main" prst="rect">
-            <a:avLst/>
-          </a:prstGeom>
-          <a:noFill xmlns:a="http://schemas.openxmlformats.org/drawingml/2006/main"/>
-          <a:ln xmlns:a="http://schemas.openxmlformats.org/drawingml/2006/main" w="0">
-            <a:noFill/>
-          </a:ln>
-        </p:spPr>
-        <p:txBody>
-          <a:bodyPr xmlns:a="http://schemas.openxmlformats.org/drawingml/2006/main" lIns="0" tIns="0" rIns="0" bIns="0" anchor="t">
-            <a:noAutofit/>
-          </a:bodyPr>
-          <a:lstStyle xmlns:a="http://schemas.openxmlformats.org/drawingml/2006/main"/>
-          <a:p xmlns:a="http://schemas.openxmlformats.org/drawingml/2006/main">
+          <a:prstGeom prst="rect">
+            <a:avLst/>
+          </a:prstGeom>
+          <a:noFill/>
+          <a:ln w="0">
+            <a:noFill/>
+          </a:ln>
+        </p:spPr>
+        <p:txBody>
+          <a:bodyPr lIns="0" tIns="0" rIns="0" bIns="0" anchor="t">
+            <a:noAutofit/>
+          </a:bodyPr>
+          <a:lstStyle/>
+          <a:p>
             <a:pPr>
               <a:defRPr sz="1725" b="1">
                 <a:solidFill>
@@ -4602,7 +4354,7 @@
               </a:defRPr>
             </a:pPr>
             <a:r>
-              <a:rPr sz="1725" b="1">
+              <a:rPr lang="en-GB" sz="1725" b="1" dirty="0">
                 <a:solidFill>
                   <a:srgbClr val="3CC8D8"/>
                 </a:solidFill>
@@ -4610,44 +4362,52 @@
                 <a:ea typeface="Helvetica Neue"/>
                 <a:cs typeface="Helvetica Neue"/>
               </a:rPr>
-              <a:t>CEO</a:t>
-            </a:r>
+              <a:t>Co-Founder</a:t>
+            </a:r>
+            <a:endParaRPr sz="1725" b="1" dirty="0">
+              <a:solidFill>
+                <a:srgbClr val="3CC8D8"/>
+              </a:solidFill>
+              <a:latin typeface="Helvetica Neue"/>
+              <a:ea typeface="Helvetica Neue"/>
+              <a:cs typeface="Helvetica Neue"/>
+            </a:endParaRPr>
           </a:p>
         </p:txBody>
       </p:sp>
       <p:sp>
         <p:nvSpPr>
           <p:cNvPr id="6" name="text-45">
-            <a:extLst xmlns:a="http://schemas.openxmlformats.org/drawingml/2006/main">
+            <a:extLst>
               <a:ext uri="{FF2B5EF4-FFF2-40B4-BE49-F238E27FC236}">
                 <a16:creationId xmlns:a16="http://schemas.microsoft.com/office/drawing/2014/main" id="{53436694-1891-4F6E-8220-176DC9002E2E}"/>
               </a:ext>
             </a:extLst>
           </p:cNvPr>
           <p:cNvSpPr>
-            <a:spLocks xmlns:a="http://schemas.openxmlformats.org/drawingml/2006/main" noGrp="1"/>
-          </p:cNvSpPr>
-          <p:nvPr/>
-        </p:nvSpPr>
-        <p:spPr>
-          <a:xfrm xmlns:a="http://schemas.openxmlformats.org/drawingml/2006/main">
+            <a:spLocks noGrp="1"/>
+          </p:cNvSpPr>
+          <p:nvPr/>
+        </p:nvSpPr>
+        <p:spPr>
+          <a:xfrm>
             <a:off x="647700" y="4191000"/>
             <a:ext cx="5181600" cy="1123950"/>
           </a:xfrm>
-          <a:prstGeom xmlns:a="http://schemas.openxmlformats.org/drawingml/2006/main" prst="rect">
-            <a:avLst/>
-          </a:prstGeom>
-          <a:noFill xmlns:a="http://schemas.openxmlformats.org/drawingml/2006/main"/>
-          <a:ln xmlns:a="http://schemas.openxmlformats.org/drawingml/2006/main" w="0">
-            <a:noFill/>
-          </a:ln>
-        </p:spPr>
-        <p:txBody>
-          <a:bodyPr xmlns:a="http://schemas.openxmlformats.org/drawingml/2006/main" lIns="0" tIns="0" rIns="0" bIns="0" anchor="t">
-            <a:noAutofit/>
-          </a:bodyPr>
-          <a:lstStyle xmlns:a="http://schemas.openxmlformats.org/drawingml/2006/main"/>
-          <a:p xmlns:a="http://schemas.openxmlformats.org/drawingml/2006/main">
+          <a:prstGeom prst="rect">
+            <a:avLst/>
+          </a:prstGeom>
+          <a:noFill/>
+          <a:ln w="0">
+            <a:noFill/>
+          </a:ln>
+        </p:spPr>
+        <p:txBody>
+          <a:bodyPr lIns="0" tIns="0" rIns="0" bIns="0" anchor="t">
+            <a:noAutofit/>
+          </a:bodyPr>
+          <a:lstStyle/>
+          <a:p>
             <a:pPr>
               <a:defRPr sz="1950" b="0">
                 <a:solidFill>
@@ -4670,7 +4430,7 @@
               <a:t>Founder, Baltic Jungle Lab</a:t>
             </a:r>
           </a:p>
-          <a:p xmlns:a="http://schemas.openxmlformats.org/drawingml/2006/main">
+          <a:p>
             <a:pPr>
               <a:defRPr sz="1950" b="0">
                 <a:solidFill>
@@ -4693,7 +4453,7 @@
               <a:t>PFR School of Pioneers winner</a:t>
             </a:r>
           </a:p>
-          <a:p xmlns:a="http://schemas.openxmlformats.org/drawingml/2006/main">
+          <a:p>
             <a:pPr>
               <a:defRPr sz="1950" b="0">
                 <a:solidFill>
@@ -4721,36 +4481,36 @@
       <p:sp>
         <p:nvSpPr>
           <p:cNvPr id="7" name="text-46">
-            <a:extLst xmlns:a="http://schemas.openxmlformats.org/drawingml/2006/main">
+            <a:extLst>
               <a:ext uri="{FF2B5EF4-FFF2-40B4-BE49-F238E27FC236}">
                 <a16:creationId xmlns:a16="http://schemas.microsoft.com/office/drawing/2014/main" id="{B47240DB-21D1-4C0C-BFF3-4347038E8F9A}"/>
               </a:ext>
             </a:extLst>
           </p:cNvPr>
           <p:cNvSpPr>
-            <a:spLocks xmlns:a="http://schemas.openxmlformats.org/drawingml/2006/main" noGrp="1"/>
-          </p:cNvSpPr>
-          <p:nvPr/>
-        </p:nvSpPr>
-        <p:spPr>
-          <a:xfrm xmlns:a="http://schemas.openxmlformats.org/drawingml/2006/main">
+            <a:spLocks noGrp="1"/>
+          </p:cNvSpPr>
+          <p:nvPr/>
+        </p:nvSpPr>
+        <p:spPr>
+          <a:xfrm>
             <a:off x="6591300" y="2943225"/>
             <a:ext cx="5048250" cy="600075"/>
           </a:xfrm>
-          <a:prstGeom xmlns:a="http://schemas.openxmlformats.org/drawingml/2006/main" prst="rect">
-            <a:avLst/>
-          </a:prstGeom>
-          <a:noFill xmlns:a="http://schemas.openxmlformats.org/drawingml/2006/main"/>
-          <a:ln xmlns:a="http://schemas.openxmlformats.org/drawingml/2006/main" w="0">
-            <a:noFill/>
-          </a:ln>
-        </p:spPr>
-        <p:txBody>
-          <a:bodyPr xmlns:a="http://schemas.openxmlformats.org/drawingml/2006/main" lIns="0" tIns="0" rIns="0" bIns="0" anchor="t">
-            <a:noAutofit/>
-          </a:bodyPr>
-          <a:lstStyle xmlns:a="http://schemas.openxmlformats.org/drawingml/2006/main"/>
-          <a:p xmlns:a="http://schemas.openxmlformats.org/drawingml/2006/main">
+          <a:prstGeom prst="rect">
+            <a:avLst/>
+          </a:prstGeom>
+          <a:noFill/>
+          <a:ln w="0">
+            <a:noFill/>
+          </a:ln>
+        </p:spPr>
+        <p:txBody>
+          <a:bodyPr lIns="0" tIns="0" rIns="0" bIns="0" anchor="t">
+            <a:noAutofit/>
+          </a:bodyPr>
+          <a:lstStyle/>
+          <a:p>
             <a:pPr>
               <a:defRPr sz="3600" b="1">
                 <a:solidFill>
@@ -4778,36 +4538,36 @@
       <p:sp>
         <p:nvSpPr>
           <p:cNvPr id="8" name="text-47">
-            <a:extLst xmlns:a="http://schemas.openxmlformats.org/drawingml/2006/main">
+            <a:extLst>
               <a:ext uri="{FF2B5EF4-FFF2-40B4-BE49-F238E27FC236}">
                 <a16:creationId xmlns:a16="http://schemas.microsoft.com/office/drawing/2014/main" id="{00EC6583-9994-434F-9838-5A89E7103501}"/>
               </a:ext>
             </a:extLst>
           </p:cNvPr>
           <p:cNvSpPr>
-            <a:spLocks xmlns:a="http://schemas.openxmlformats.org/drawingml/2006/main" noGrp="1"/>
-          </p:cNvSpPr>
-          <p:nvPr/>
-        </p:nvSpPr>
-        <p:spPr>
-          <a:xfrm xmlns:a="http://schemas.openxmlformats.org/drawingml/2006/main">
+            <a:spLocks noGrp="1"/>
+          </p:cNvSpPr>
+          <p:nvPr/>
+        </p:nvSpPr>
+        <p:spPr>
+          <a:xfrm>
             <a:off x="6610350" y="3638550"/>
             <a:ext cx="4762500" cy="333375"/>
           </a:xfrm>
-          <a:prstGeom xmlns:a="http://schemas.openxmlformats.org/drawingml/2006/main" prst="rect">
-            <a:avLst/>
-          </a:prstGeom>
-          <a:noFill xmlns:a="http://schemas.openxmlformats.org/drawingml/2006/main"/>
-          <a:ln xmlns:a="http://schemas.openxmlformats.org/drawingml/2006/main" w="0">
-            <a:noFill/>
-          </a:ln>
-        </p:spPr>
-        <p:txBody>
-          <a:bodyPr xmlns:a="http://schemas.openxmlformats.org/drawingml/2006/main" lIns="0" tIns="0" rIns="0" bIns="0" anchor="t">
-            <a:noAutofit/>
-          </a:bodyPr>
-          <a:lstStyle xmlns:a="http://schemas.openxmlformats.org/drawingml/2006/main"/>
-          <a:p xmlns:a="http://schemas.openxmlformats.org/drawingml/2006/main">
+          <a:prstGeom prst="rect">
+            <a:avLst/>
+          </a:prstGeom>
+          <a:noFill/>
+          <a:ln w="0">
+            <a:noFill/>
+          </a:ln>
+        </p:spPr>
+        <p:txBody>
+          <a:bodyPr lIns="0" tIns="0" rIns="0" bIns="0" anchor="t">
+            <a:noAutofit/>
+          </a:bodyPr>
+          <a:lstStyle/>
+          <a:p>
             <a:pPr>
               <a:defRPr sz="1725" b="1">
                 <a:solidFill>
@@ -4819,7 +4579,7 @@
               </a:defRPr>
             </a:pPr>
             <a:r>
-              <a:rPr sz="1725" b="1">
+              <a:rPr lang="en-GB" sz="1725" b="1" dirty="0">
                 <a:solidFill>
                   <a:srgbClr val="3CC8D8"/>
                 </a:solidFill>
@@ -4827,44 +4587,52 @@
                 <a:ea typeface="Helvetica Neue"/>
                 <a:cs typeface="Helvetica Neue"/>
               </a:rPr>
-              <a:t>CTO</a:t>
-            </a:r>
+              <a:t>Co-Founder</a:t>
+            </a:r>
+            <a:endParaRPr sz="1725" b="1" dirty="0">
+              <a:solidFill>
+                <a:srgbClr val="3CC8D8"/>
+              </a:solidFill>
+              <a:latin typeface="Helvetica Neue"/>
+              <a:ea typeface="Helvetica Neue"/>
+              <a:cs typeface="Helvetica Neue"/>
+            </a:endParaRPr>
           </a:p>
         </p:txBody>
       </p:sp>
       <p:sp>
         <p:nvSpPr>
           <p:cNvPr id="9" name="text-48">
-            <a:extLst xmlns:a="http://schemas.openxmlformats.org/drawingml/2006/main">
+            <a:extLst>
               <a:ext uri="{FF2B5EF4-FFF2-40B4-BE49-F238E27FC236}">
                 <a16:creationId xmlns:a16="http://schemas.microsoft.com/office/drawing/2014/main" id="{C87D8C7B-8E6B-4121-A791-F3EDE6593A88}"/>
               </a:ext>
             </a:extLst>
           </p:cNvPr>
           <p:cNvSpPr>
-            <a:spLocks xmlns:a="http://schemas.openxmlformats.org/drawingml/2006/main" noGrp="1"/>
-          </p:cNvSpPr>
-          <p:nvPr/>
-        </p:nvSpPr>
-        <p:spPr>
-          <a:xfrm xmlns:a="http://schemas.openxmlformats.org/drawingml/2006/main">
+            <a:spLocks noGrp="1"/>
+          </p:cNvSpPr>
+          <p:nvPr/>
+        </p:nvSpPr>
+        <p:spPr>
+          <a:xfrm>
             <a:off x="6610350" y="4191000"/>
             <a:ext cx="4857750" cy="1123950"/>
           </a:xfrm>
-          <a:prstGeom xmlns:a="http://schemas.openxmlformats.org/drawingml/2006/main" prst="rect">
-            <a:avLst/>
-          </a:prstGeom>
-          <a:noFill xmlns:a="http://schemas.openxmlformats.org/drawingml/2006/main"/>
-          <a:ln xmlns:a="http://schemas.openxmlformats.org/drawingml/2006/main" w="0">
-            <a:noFill/>
-          </a:ln>
-        </p:spPr>
-        <p:txBody>
-          <a:bodyPr xmlns:a="http://schemas.openxmlformats.org/drawingml/2006/main" lIns="0" tIns="0" rIns="0" bIns="0" anchor="t">
-            <a:noAutofit/>
-          </a:bodyPr>
-          <a:lstStyle xmlns:a="http://schemas.openxmlformats.org/drawingml/2006/main"/>
-          <a:p xmlns:a="http://schemas.openxmlformats.org/drawingml/2006/main">
+          <a:prstGeom prst="rect">
+            <a:avLst/>
+          </a:prstGeom>
+          <a:noFill/>
+          <a:ln w="0">
+            <a:noFill/>
+          </a:ln>
+        </p:spPr>
+        <p:txBody>
+          <a:bodyPr lIns="0" tIns="0" rIns="0" bIns="0" anchor="t">
+            <a:noAutofit/>
+          </a:bodyPr>
+          <a:lstStyle/>
+          <a:p>
             <a:pPr>
               <a:defRPr sz="1950" b="0">
                 <a:solidFill>
@@ -4876,7 +4644,7 @@
               </a:defRPr>
             </a:pPr>
             <a:r>
-              <a:rPr sz="1950" b="0">
+              <a:rPr lang="en-GB" sz="1950" b="0" dirty="0">
                 <a:solidFill>
                   <a:srgbClr val="E9E4D6"/>
                 </a:solidFill>
@@ -4884,10 +4652,21 @@
                 <a:ea typeface="Helvetica Neue"/>
                 <a:cs typeface="Helvetica Neue"/>
               </a:rPr>
-              <a:t>CNC-line automation at IMTEK</a:t>
-            </a:r>
-          </a:p>
-          <a:p xmlns:a="http://schemas.openxmlformats.org/drawingml/2006/main">
+              <a:t>Cryogenics Manufacturing </a:t>
+            </a:r>
+            <a:r>
+              <a:rPr sz="1950" b="0" dirty="0">
+                <a:solidFill>
+                  <a:srgbClr val="E9E4D6"/>
+                </a:solidFill>
+                <a:latin typeface="Helvetica Neue"/>
+                <a:ea typeface="Helvetica Neue"/>
+                <a:cs typeface="Helvetica Neue"/>
+              </a:rPr>
+              <a:t>at IMTEK</a:t>
+            </a:r>
+          </a:p>
+          <a:p>
             <a:pPr>
               <a:defRPr sz="1950" b="0">
                 <a:solidFill>
@@ -4899,7 +4678,7 @@
               </a:defRPr>
             </a:pPr>
             <a:r>
-              <a:rPr sz="1950" b="0">
+              <a:rPr sz="1950" b="0" dirty="0">
                 <a:solidFill>
                   <a:srgbClr val="E9E4D6"/>
                 </a:solidFill>
@@ -4907,22 +4686,21 @@
                 <a:ea typeface="Helvetica Neue"/>
                 <a:cs typeface="Helvetica Neue"/>
               </a:rPr>
-              <a:t>Cambridge MPhil</a:t>
-            </a:r>
-          </a:p>
-          <a:p xmlns:a="http://schemas.openxmlformats.org/drawingml/2006/main">
-            <a:pPr>
-              <a:defRPr sz="1950" b="0">
+              <a:t>Cambridge</a:t>
+            </a:r>
+            <a:r>
+              <a:rPr lang="en-GB" sz="1950" b="0" dirty="0">
                 <a:solidFill>
                   <a:srgbClr val="E9E4D6"/>
                 </a:solidFill>
                 <a:latin typeface="Helvetica Neue"/>
                 <a:ea typeface="Helvetica Neue"/>
                 <a:cs typeface="Helvetica Neue"/>
-              </a:defRPr>
-            </a:pPr>
-            <a:r>
-              <a:rPr sz="1950" b="0">
+              </a:rPr>
+              <a:t> Masters, </a:t>
+            </a:r>
+            <a:r>
+              <a:rPr lang="en-GB" sz="1950" b="0" dirty="0" err="1">
                 <a:solidFill>
                   <a:srgbClr val="E9E4D6"/>
                 </a:solidFill>
@@ -4930,74 +4708,111 @@
                 <a:ea typeface="Helvetica Neue"/>
                 <a:cs typeface="Helvetica Neue"/>
               </a:rPr>
-              <a:t>Manufacturing interoperability</a:t>
-            </a:r>
-          </a:p>
-        </p:txBody>
-      </p:sp>
-      <p:sp>
-        <p:nvSpPr>
-          <p:cNvPr id="10" name="">
-            <a:extLst xmlns:a="http://schemas.openxmlformats.org/drawingml/2006/main">
+              <a:t>GaTech</a:t>
+            </a:r>
+            <a:r>
+              <a:rPr lang="en-GB" sz="1950" b="0" dirty="0">
+                <a:solidFill>
+                  <a:srgbClr val="E9E4D6"/>
+                </a:solidFill>
+                <a:latin typeface="Helvetica Neue"/>
+                <a:ea typeface="Helvetica Neue"/>
+                <a:cs typeface="Helvetica Neue"/>
+              </a:rPr>
+              <a:t> Me </a:t>
+            </a:r>
+            <a:r>
+              <a:rPr lang="en-GB" sz="1950" b="0" dirty="0" err="1">
+                <a:solidFill>
+                  <a:srgbClr val="E9E4D6"/>
+                </a:solidFill>
+                <a:latin typeface="Helvetica Neue"/>
+                <a:ea typeface="Helvetica Neue"/>
+                <a:cs typeface="Helvetica Neue"/>
+              </a:rPr>
+              <a:t>UnderGrad</a:t>
+            </a:r>
+            <a:endParaRPr sz="1950" b="0" dirty="0">
+              <a:solidFill>
+                <a:srgbClr val="E9E4D6"/>
+              </a:solidFill>
+              <a:latin typeface="Helvetica Neue"/>
+              <a:ea typeface="Helvetica Neue"/>
+              <a:cs typeface="Helvetica Neue"/>
+            </a:endParaRPr>
+          </a:p>
+        </p:txBody>
+      </p:sp>
+      <p:sp>
+        <p:nvSpPr>
+          <p:cNvPr id="10" name="Straight Connector 9">
+            <a:extLst>
               <a:ext uri="{FF2B5EF4-FFF2-40B4-BE49-F238E27FC236}">
                 <a16:creationId xmlns:a16="http://schemas.microsoft.com/office/drawing/2014/main" id="{0E405B62-9D7F-4160-9CE8-AF57D7B3B373}"/>
               </a:ext>
             </a:extLst>
           </p:cNvPr>
           <p:cNvSpPr>
-            <a:spLocks xmlns:a="http://schemas.openxmlformats.org/drawingml/2006/main" noGrp="1"/>
-          </p:cNvSpPr>
-          <p:nvPr/>
-        </p:nvSpPr>
-        <p:spPr>
-          <a:xfrm xmlns:a="http://schemas.openxmlformats.org/drawingml/2006/main">
+            <a:spLocks noGrp="1"/>
+          </p:cNvSpPr>
+          <p:nvPr/>
+        </p:nvSpPr>
+        <p:spPr>
+          <a:xfrm>
             <a:off x="647700" y="5667375"/>
             <a:ext cx="10858500" cy="0"/>
           </a:xfrm>
-          <a:prstGeom xmlns:a="http://schemas.openxmlformats.org/drawingml/2006/main" prst="line">
-            <a:avLst/>
-          </a:prstGeom>
-          <a:noFill xmlns:a="http://schemas.openxmlformats.org/drawingml/2006/main"/>
-          <a:ln xmlns:a="http://schemas.openxmlformats.org/drawingml/2006/main" w="9525">
+          <a:prstGeom prst="line">
+            <a:avLst/>
+          </a:prstGeom>
+          <a:noFill/>
+          <a:ln w="9525">
             <a:solidFill>
               <a:srgbClr val="34313A"/>
             </a:solidFill>
           </a:ln>
         </p:spPr>
+        <p:txBody>
+          <a:bodyPr/>
+          <a:lstStyle/>
+          <a:p>
+            <a:endParaRPr lang="en-US"/>
+          </a:p>
+        </p:txBody>
       </p:sp>
       <p:sp>
         <p:nvSpPr>
           <p:cNvPr id="11" name="text-49">
-            <a:extLst xmlns:a="http://schemas.openxmlformats.org/drawingml/2006/main">
+            <a:extLst>
               <a:ext uri="{FF2B5EF4-FFF2-40B4-BE49-F238E27FC236}">
                 <a16:creationId xmlns:a16="http://schemas.microsoft.com/office/drawing/2014/main" id="{CD8A1602-C336-4792-A78E-035E081AEFF6}"/>
               </a:ext>
             </a:extLst>
           </p:cNvPr>
           <p:cNvSpPr>
-            <a:spLocks xmlns:a="http://schemas.openxmlformats.org/drawingml/2006/main" noGrp="1"/>
-          </p:cNvSpPr>
-          <p:nvPr/>
-        </p:nvSpPr>
-        <p:spPr>
-          <a:xfrm xmlns:a="http://schemas.openxmlformats.org/drawingml/2006/main">
+            <a:spLocks noGrp="1"/>
+          </p:cNvSpPr>
+          <p:nvPr/>
+        </p:nvSpPr>
+        <p:spPr>
+          <a:xfrm>
             <a:off x="647700" y="5886450"/>
             <a:ext cx="10858500" cy="323850"/>
           </a:xfrm>
-          <a:prstGeom xmlns:a="http://schemas.openxmlformats.org/drawingml/2006/main" prst="rect">
-            <a:avLst/>
-          </a:prstGeom>
-          <a:noFill xmlns:a="http://schemas.openxmlformats.org/drawingml/2006/main"/>
-          <a:ln xmlns:a="http://schemas.openxmlformats.org/drawingml/2006/main" w="0">
-            <a:noFill/>
-          </a:ln>
-        </p:spPr>
-        <p:txBody>
-          <a:bodyPr xmlns:a="http://schemas.openxmlformats.org/drawingml/2006/main" lIns="0" tIns="0" rIns="0" bIns="0" anchor="t">
-            <a:noAutofit/>
-          </a:bodyPr>
-          <a:lstStyle xmlns:a="http://schemas.openxmlformats.org/drawingml/2006/main"/>
-          <a:p xmlns:a="http://schemas.openxmlformats.org/drawingml/2006/main">
+          <a:prstGeom prst="rect">
+            <a:avLst/>
+          </a:prstGeom>
+          <a:noFill/>
+          <a:ln w="0">
+            <a:noFill/>
+          </a:ln>
+        </p:spPr>
+        <p:txBody>
+          <a:bodyPr lIns="0" tIns="0" rIns="0" bIns="0" anchor="t">
+            <a:noAutofit/>
+          </a:bodyPr>
+          <a:lstStyle/>
+          <a:p>
             <a:pPr>
               <a:defRPr sz="1650" b="0">
                 <a:solidFill>
@@ -5025,36 +4840,36 @@
       <p:sp>
         <p:nvSpPr>
           <p:cNvPr id="12" name="text-50">
-            <a:extLst xmlns:a="http://schemas.openxmlformats.org/drawingml/2006/main">
+            <a:extLst>
               <a:ext uri="{FF2B5EF4-FFF2-40B4-BE49-F238E27FC236}">
                 <a16:creationId xmlns:a16="http://schemas.microsoft.com/office/drawing/2014/main" id="{E82A6A19-C31F-4A71-B294-01D527113FBE}"/>
               </a:ext>
             </a:extLst>
           </p:cNvPr>
           <p:cNvSpPr>
-            <a:spLocks xmlns:a="http://schemas.openxmlformats.org/drawingml/2006/main" noGrp="1"/>
-          </p:cNvSpPr>
-          <p:nvPr/>
-        </p:nvSpPr>
-        <p:spPr>
-          <a:xfrm xmlns:a="http://schemas.openxmlformats.org/drawingml/2006/main">
+            <a:spLocks noGrp="1"/>
+          </p:cNvSpPr>
+          <p:nvPr/>
+        </p:nvSpPr>
+        <p:spPr>
+          <a:xfrm>
             <a:off x="647700" y="6343650"/>
             <a:ext cx="10858500" cy="247650"/>
           </a:xfrm>
-          <a:prstGeom xmlns:a="http://schemas.openxmlformats.org/drawingml/2006/main" prst="rect">
-            <a:avLst/>
-          </a:prstGeom>
-          <a:noFill xmlns:a="http://schemas.openxmlformats.org/drawingml/2006/main"/>
-          <a:ln xmlns:a="http://schemas.openxmlformats.org/drawingml/2006/main" w="0">
-            <a:noFill/>
-          </a:ln>
-        </p:spPr>
-        <p:txBody>
-          <a:bodyPr xmlns:a="http://schemas.openxmlformats.org/drawingml/2006/main" lIns="0" tIns="0" rIns="0" bIns="0" anchor="t">
-            <a:noAutofit/>
-          </a:bodyPr>
-          <a:lstStyle xmlns:a="http://schemas.openxmlformats.org/drawingml/2006/main"/>
-          <a:p xmlns:a="http://schemas.openxmlformats.org/drawingml/2006/main">
+          <a:prstGeom prst="rect">
+            <a:avLst/>
+          </a:prstGeom>
+          <a:noFill/>
+          <a:ln w="0">
+            <a:noFill/>
+          </a:ln>
+        </p:spPr>
+        <p:txBody>
+          <a:bodyPr lIns="0" tIns="0" rIns="0" bIns="0" anchor="t">
+            <a:noAutofit/>
+          </a:bodyPr>
+          <a:lstStyle/>
+          <a:p>
             <a:pPr>
               <a:defRPr sz="1200" b="0">
                 <a:solidFill>
@@ -5086,17 +4901,21 @@
       </p:ext>
     </p:extLst>
   </p:cSld>
+  <p:clrMapOvr>
+    <a:masterClrMapping/>
+  </p:clrMapOvr>
 </p:sld>
 </file>
 
 <file path=ppt/slides/slide6.xml><?xml version="1.0" encoding="utf-8"?>
-<p:sld xmlns:p="http://schemas.openxmlformats.org/presentationml/2006/main">
+<p:sld xmlns:a="http://schemas.openxmlformats.org/drawingml/2006/main" xmlns:r="http://schemas.openxmlformats.org/officeDocument/2006/relationships" xmlns:p="http://schemas.openxmlformats.org/presentationml/2006/main">
   <p:cSld>
     <p:bg>
       <p:bgPr>
-        <a:solidFill xmlns:a="http://schemas.openxmlformats.org/drawingml/2006/main">
+        <a:solidFill>
           <a:srgbClr val="000000"/>
         </a:solidFill>
+        <a:effectLst/>
       </p:bgPr>
     </p:bg>
     <p:spTree>
@@ -5106,41 +4925,46 @@
         <p:nvPr/>
       </p:nvGrpSpPr>
       <p:grpSpPr>
-        <a:xfrm xmlns:a="http://schemas.openxmlformats.org/drawingml/2006/main"/>
+        <a:xfrm>
+          <a:off x="0" y="0"/>
+          <a:ext cx="0" cy="0"/>
+          <a:chOff x="0" y="0"/>
+          <a:chExt cx="0" cy="0"/>
+        </a:xfrm>
       </p:grpSpPr>
       <p:sp>
         <p:nvSpPr>
           <p:cNvPr id="16" name="text-51">
-            <a:extLst xmlns:a="http://schemas.openxmlformats.org/drawingml/2006/main">
+            <a:extLst>
               <a:ext uri="{FF2B5EF4-FFF2-40B4-BE49-F238E27FC236}">
                 <a16:creationId xmlns:a16="http://schemas.microsoft.com/office/drawing/2014/main" id="{D2358F55-A3EA-4E2F-B48D-DFF429EB2A5C}"/>
               </a:ext>
             </a:extLst>
           </p:cNvPr>
           <p:cNvSpPr>
-            <a:spLocks xmlns:a="http://schemas.openxmlformats.org/drawingml/2006/main" noGrp="1"/>
-          </p:cNvSpPr>
-          <p:nvPr/>
-        </p:nvSpPr>
-        <p:spPr>
-          <a:xfrm xmlns:a="http://schemas.openxmlformats.org/drawingml/2006/main">
+            <a:spLocks noGrp="1"/>
+          </p:cNvSpPr>
+          <p:nvPr/>
+        </p:nvSpPr>
+        <p:spPr>
+          <a:xfrm>
             <a:off x="609600" y="400050"/>
             <a:ext cx="9525000" cy="247650"/>
           </a:xfrm>
-          <a:prstGeom xmlns:a="http://schemas.openxmlformats.org/drawingml/2006/main" prst="rect">
-            <a:avLst/>
-          </a:prstGeom>
-          <a:noFill xmlns:a="http://schemas.openxmlformats.org/drawingml/2006/main"/>
-          <a:ln xmlns:a="http://schemas.openxmlformats.org/drawingml/2006/main" w="0">
-            <a:noFill/>
-          </a:ln>
-        </p:spPr>
-        <p:txBody>
-          <a:bodyPr xmlns:a="http://schemas.openxmlformats.org/drawingml/2006/main" lIns="0" tIns="0" rIns="0" bIns="0" anchor="t">
-            <a:noAutofit/>
-          </a:bodyPr>
-          <a:lstStyle xmlns:a="http://schemas.openxmlformats.org/drawingml/2006/main"/>
-          <a:p xmlns:a="http://schemas.openxmlformats.org/drawingml/2006/main">
+          <a:prstGeom prst="rect">
+            <a:avLst/>
+          </a:prstGeom>
+          <a:noFill/>
+          <a:ln w="0">
+            <a:noFill/>
+          </a:ln>
+        </p:spPr>
+        <p:txBody>
+          <a:bodyPr lIns="0" tIns="0" rIns="0" bIns="0" anchor="t">
+            <a:noAutofit/>
+          </a:bodyPr>
+          <a:lstStyle/>
+          <a:p>
             <a:pPr>
               <a:defRPr sz="1200" b="0">
                 <a:solidFill>
@@ -5168,36 +4992,36 @@
       <p:sp>
         <p:nvSpPr>
           <p:cNvPr id="2" name="text-52">
-            <a:extLst xmlns:a="http://schemas.openxmlformats.org/drawingml/2006/main">
+            <a:extLst>
               <a:ext uri="{FF2B5EF4-FFF2-40B4-BE49-F238E27FC236}">
                 <a16:creationId xmlns:a16="http://schemas.microsoft.com/office/drawing/2014/main" id="{E3056BB3-1387-4CBD-9996-9917158042E8}"/>
               </a:ext>
             </a:extLst>
           </p:cNvPr>
           <p:cNvSpPr>
-            <a:spLocks xmlns:a="http://schemas.openxmlformats.org/drawingml/2006/main" noGrp="1"/>
-          </p:cNvSpPr>
-          <p:nvPr/>
-        </p:nvSpPr>
-        <p:spPr>
-          <a:xfrm xmlns:a="http://schemas.openxmlformats.org/drawingml/2006/main">
+            <a:spLocks noGrp="1"/>
+          </p:cNvSpPr>
+          <p:nvPr/>
+        </p:nvSpPr>
+        <p:spPr>
+          <a:xfrm>
             <a:off x="11049000" y="400050"/>
             <a:ext cx="523875" cy="238125"/>
           </a:xfrm>
-          <a:prstGeom xmlns:a="http://schemas.openxmlformats.org/drawingml/2006/main" prst="rect">
-            <a:avLst/>
-          </a:prstGeom>
-          <a:noFill xmlns:a="http://schemas.openxmlformats.org/drawingml/2006/main"/>
-          <a:ln xmlns:a="http://schemas.openxmlformats.org/drawingml/2006/main" w="0">
-            <a:noFill/>
-          </a:ln>
-        </p:spPr>
-        <p:txBody>
-          <a:bodyPr xmlns:a="http://schemas.openxmlformats.org/drawingml/2006/main" lIns="0" tIns="0" rIns="0" bIns="0" anchor="t">
-            <a:noAutofit/>
-          </a:bodyPr>
-          <a:lstStyle xmlns:a="http://schemas.openxmlformats.org/drawingml/2006/main"/>
-          <a:p xmlns:a="http://schemas.openxmlformats.org/drawingml/2006/main">
+          <a:prstGeom prst="rect">
+            <a:avLst/>
+          </a:prstGeom>
+          <a:noFill/>
+          <a:ln w="0">
+            <a:noFill/>
+          </a:ln>
+        </p:spPr>
+        <p:txBody>
+          <a:bodyPr lIns="0" tIns="0" rIns="0" bIns="0" anchor="t">
+            <a:noAutofit/>
+          </a:bodyPr>
+          <a:lstStyle/>
+          <a:p>
             <a:pPr>
               <a:defRPr sz="1200" b="0">
                 <a:solidFill>
@@ -5225,36 +5049,36 @@
       <p:sp>
         <p:nvSpPr>
           <p:cNvPr id="3" name="text-53">
-            <a:extLst xmlns:a="http://schemas.openxmlformats.org/drawingml/2006/main">
+            <a:extLst>
               <a:ext uri="{FF2B5EF4-FFF2-40B4-BE49-F238E27FC236}">
                 <a16:creationId xmlns:a16="http://schemas.microsoft.com/office/drawing/2014/main" id="{A2DD93C7-5E36-4804-89C0-8AF8C283FF02}"/>
               </a:ext>
             </a:extLst>
           </p:cNvPr>
           <p:cNvSpPr>
-            <a:spLocks xmlns:a="http://schemas.openxmlformats.org/drawingml/2006/main" noGrp="1"/>
-          </p:cNvSpPr>
-          <p:nvPr/>
-        </p:nvSpPr>
-        <p:spPr>
-          <a:xfrm xmlns:a="http://schemas.openxmlformats.org/drawingml/2006/main">
+            <a:spLocks noGrp="1"/>
+          </p:cNvSpPr>
+          <p:nvPr/>
+        </p:nvSpPr>
+        <p:spPr>
+          <a:xfrm>
             <a:off x="609600" y="1000125"/>
             <a:ext cx="10858500" cy="1447800"/>
           </a:xfrm>
-          <a:prstGeom xmlns:a="http://schemas.openxmlformats.org/drawingml/2006/main" prst="rect">
-            <a:avLst/>
-          </a:prstGeom>
-          <a:noFill xmlns:a="http://schemas.openxmlformats.org/drawingml/2006/main"/>
-          <a:ln xmlns:a="http://schemas.openxmlformats.org/drawingml/2006/main" w="0">
-            <a:noFill/>
-          </a:ln>
-        </p:spPr>
-        <p:txBody>
-          <a:bodyPr xmlns:a="http://schemas.openxmlformats.org/drawingml/2006/main" lIns="0" tIns="0" rIns="0" bIns="0" anchor="t">
-            <a:noAutofit/>
-          </a:bodyPr>
-          <a:lstStyle xmlns:a="http://schemas.openxmlformats.org/drawingml/2006/main"/>
-          <a:p xmlns:a="http://schemas.openxmlformats.org/drawingml/2006/main">
+          <a:prstGeom prst="rect">
+            <a:avLst/>
+          </a:prstGeom>
+          <a:noFill/>
+          <a:ln w="0">
+            <a:noFill/>
+          </a:ln>
+        </p:spPr>
+        <p:txBody>
+          <a:bodyPr lIns="0" tIns="0" rIns="0" bIns="0" anchor="t">
+            <a:noAutofit/>
+          </a:bodyPr>
+          <a:lstStyle/>
+          <a:p>
             <a:pPr>
               <a:defRPr sz="4650" b="1">
                 <a:solidFill>
@@ -5277,7 +5101,7 @@
               <a:t>Industry conversations</a:t>
             </a:r>
           </a:p>
-          <a:p xmlns:a="http://schemas.openxmlformats.org/drawingml/2006/main">
+          <a:p>
             <a:pPr>
               <a:defRPr sz="4650" b="1">
                 <a:solidFill>
@@ -5305,36 +5129,36 @@
       <p:sp>
         <p:nvSpPr>
           <p:cNvPr id="4" name="text-54">
-            <a:extLst xmlns:a="http://schemas.openxmlformats.org/drawingml/2006/main">
+            <a:extLst>
               <a:ext uri="{FF2B5EF4-FFF2-40B4-BE49-F238E27FC236}">
                 <a16:creationId xmlns:a16="http://schemas.microsoft.com/office/drawing/2014/main" id="{3AD15CBC-5391-46D0-8DCB-D25903147AA5}"/>
               </a:ext>
             </a:extLst>
           </p:cNvPr>
           <p:cNvSpPr>
-            <a:spLocks xmlns:a="http://schemas.openxmlformats.org/drawingml/2006/main" noGrp="1"/>
-          </p:cNvSpPr>
-          <p:nvPr/>
-        </p:nvSpPr>
-        <p:spPr>
-          <a:xfrm xmlns:a="http://schemas.openxmlformats.org/drawingml/2006/main">
+            <a:spLocks noGrp="1"/>
+          </p:cNvSpPr>
+          <p:nvPr/>
+        </p:nvSpPr>
+        <p:spPr>
+          <a:xfrm>
             <a:off x="647700" y="2867025"/>
             <a:ext cx="3095625" cy="476250"/>
           </a:xfrm>
-          <a:prstGeom xmlns:a="http://schemas.openxmlformats.org/drawingml/2006/main" prst="rect">
-            <a:avLst/>
-          </a:prstGeom>
-          <a:noFill xmlns:a="http://schemas.openxmlformats.org/drawingml/2006/main"/>
-          <a:ln xmlns:a="http://schemas.openxmlformats.org/drawingml/2006/main" w="0">
-            <a:noFill/>
-          </a:ln>
-        </p:spPr>
-        <p:txBody>
-          <a:bodyPr xmlns:a="http://schemas.openxmlformats.org/drawingml/2006/main" lIns="0" tIns="0" rIns="0" bIns="0" anchor="t">
-            <a:noAutofit/>
-          </a:bodyPr>
-          <a:lstStyle xmlns:a="http://schemas.openxmlformats.org/drawingml/2006/main"/>
-          <a:p xmlns:a="http://schemas.openxmlformats.org/drawingml/2006/main">
+          <a:prstGeom prst="rect">
+            <a:avLst/>
+          </a:prstGeom>
+          <a:noFill/>
+          <a:ln w="0">
+            <a:noFill/>
+          </a:ln>
+        </p:spPr>
+        <p:txBody>
+          <a:bodyPr lIns="0" tIns="0" rIns="0" bIns="0" anchor="t">
+            <a:noAutofit/>
+          </a:bodyPr>
+          <a:lstStyle/>
+          <a:p>
             <a:pPr>
               <a:defRPr sz="2700" b="1">
                 <a:solidFill>
@@ -5362,36 +5186,36 @@
       <p:sp>
         <p:nvSpPr>
           <p:cNvPr id="5" name="text-55">
-            <a:extLst xmlns:a="http://schemas.openxmlformats.org/drawingml/2006/main">
+            <a:extLst>
               <a:ext uri="{FF2B5EF4-FFF2-40B4-BE49-F238E27FC236}">
                 <a16:creationId xmlns:a16="http://schemas.microsoft.com/office/drawing/2014/main" id="{1240AAFE-FECA-4716-8272-7E64379032B5}"/>
               </a:ext>
             </a:extLst>
           </p:cNvPr>
           <p:cNvSpPr>
-            <a:spLocks xmlns:a="http://schemas.openxmlformats.org/drawingml/2006/main" noGrp="1"/>
-          </p:cNvSpPr>
-          <p:nvPr/>
-        </p:nvSpPr>
-        <p:spPr>
-          <a:xfrm xmlns:a="http://schemas.openxmlformats.org/drawingml/2006/main">
+            <a:spLocks noGrp="1"/>
+          </p:cNvSpPr>
+          <p:nvPr/>
+        </p:nvSpPr>
+        <p:spPr>
+          <a:xfrm>
             <a:off x="4105275" y="2867025"/>
             <a:ext cx="7381875" cy="504825"/>
           </a:xfrm>
-          <a:prstGeom xmlns:a="http://schemas.openxmlformats.org/drawingml/2006/main" prst="rect">
-            <a:avLst/>
-          </a:prstGeom>
-          <a:noFill xmlns:a="http://schemas.openxmlformats.org/drawingml/2006/main"/>
-          <a:ln xmlns:a="http://schemas.openxmlformats.org/drawingml/2006/main" w="0">
-            <a:noFill/>
-          </a:ln>
-        </p:spPr>
-        <p:txBody>
-          <a:bodyPr xmlns:a="http://schemas.openxmlformats.org/drawingml/2006/main" lIns="0" tIns="0" rIns="0" bIns="0" anchor="t">
-            <a:noAutofit/>
-          </a:bodyPr>
-          <a:lstStyle xmlns:a="http://schemas.openxmlformats.org/drawingml/2006/main"/>
-          <a:p xmlns:a="http://schemas.openxmlformats.org/drawingml/2006/main">
+          <a:prstGeom prst="rect">
+            <a:avLst/>
+          </a:prstGeom>
+          <a:noFill/>
+          <a:ln w="0">
+            <a:noFill/>
+          </a:ln>
+        </p:spPr>
+        <p:txBody>
+          <a:bodyPr lIns="0" tIns="0" rIns="0" bIns="0" anchor="t">
+            <a:noAutofit/>
+          </a:bodyPr>
+          <a:lstStyle/>
+          <a:p>
             <a:pPr>
               <a:defRPr sz="1950" b="0">
                 <a:solidFill>
@@ -5419,36 +5243,36 @@
       <p:sp>
         <p:nvSpPr>
           <p:cNvPr id="6" name="text-56">
-            <a:extLst xmlns:a="http://schemas.openxmlformats.org/drawingml/2006/main">
+            <a:extLst>
               <a:ext uri="{FF2B5EF4-FFF2-40B4-BE49-F238E27FC236}">
                 <a16:creationId xmlns:a16="http://schemas.microsoft.com/office/drawing/2014/main" id="{B46B0735-35C4-452D-B550-4F4E06A73C70}"/>
               </a:ext>
             </a:extLst>
           </p:cNvPr>
           <p:cNvSpPr>
-            <a:spLocks xmlns:a="http://schemas.openxmlformats.org/drawingml/2006/main" noGrp="1"/>
-          </p:cNvSpPr>
-          <p:nvPr/>
-        </p:nvSpPr>
-        <p:spPr>
-          <a:xfrm xmlns:a="http://schemas.openxmlformats.org/drawingml/2006/main">
+            <a:spLocks noGrp="1"/>
+          </p:cNvSpPr>
+          <p:nvPr/>
+        </p:nvSpPr>
+        <p:spPr>
+          <a:xfrm>
             <a:off x="4124325" y="3362325"/>
             <a:ext cx="7353300" cy="323850"/>
           </a:xfrm>
-          <a:prstGeom xmlns:a="http://schemas.openxmlformats.org/drawingml/2006/main" prst="rect">
-            <a:avLst/>
-          </a:prstGeom>
-          <a:noFill xmlns:a="http://schemas.openxmlformats.org/drawingml/2006/main"/>
-          <a:ln xmlns:a="http://schemas.openxmlformats.org/drawingml/2006/main" w="0">
-            <a:noFill/>
-          </a:ln>
-        </p:spPr>
-        <p:txBody>
-          <a:bodyPr xmlns:a="http://schemas.openxmlformats.org/drawingml/2006/main" lIns="0" tIns="0" rIns="0" bIns="0" anchor="t">
-            <a:noAutofit/>
-          </a:bodyPr>
-          <a:lstStyle xmlns:a="http://schemas.openxmlformats.org/drawingml/2006/main"/>
-          <a:p xmlns:a="http://schemas.openxmlformats.org/drawingml/2006/main">
+          <a:prstGeom prst="rect">
+            <a:avLst/>
+          </a:prstGeom>
+          <a:noFill/>
+          <a:ln w="0">
+            <a:noFill/>
+          </a:ln>
+        </p:spPr>
+        <p:txBody>
+          <a:bodyPr lIns="0" tIns="0" rIns="0" bIns="0" anchor="t">
+            <a:noAutofit/>
+          </a:bodyPr>
+          <a:lstStyle/>
+          <a:p>
             <a:pPr>
               <a:defRPr sz="1575" b="0">
                 <a:solidFill>
@@ -5475,67 +5299,74 @@
       </p:sp>
       <p:sp>
         <p:nvSpPr>
-          <p:cNvPr id="7" name="">
-            <a:extLst xmlns:a="http://schemas.openxmlformats.org/drawingml/2006/main">
+          <p:cNvPr id="7" name="Straight Connector 6">
+            <a:extLst>
               <a:ext uri="{FF2B5EF4-FFF2-40B4-BE49-F238E27FC236}">
                 <a16:creationId xmlns:a16="http://schemas.microsoft.com/office/drawing/2014/main" id="{693F705A-B537-4F1E-997B-148FACD32D6D}"/>
               </a:ext>
             </a:extLst>
           </p:cNvPr>
           <p:cNvSpPr>
-            <a:spLocks xmlns:a="http://schemas.openxmlformats.org/drawingml/2006/main" noGrp="1"/>
-          </p:cNvSpPr>
-          <p:nvPr/>
-        </p:nvSpPr>
-        <p:spPr>
-          <a:xfrm xmlns:a="http://schemas.openxmlformats.org/drawingml/2006/main">
+            <a:spLocks noGrp="1"/>
+          </p:cNvSpPr>
+          <p:nvPr/>
+        </p:nvSpPr>
+        <p:spPr>
+          <a:xfrm>
             <a:off x="647700" y="3895725"/>
             <a:ext cx="10858500" cy="0"/>
           </a:xfrm>
-          <a:prstGeom xmlns:a="http://schemas.openxmlformats.org/drawingml/2006/main" prst="line">
-            <a:avLst/>
-          </a:prstGeom>
-          <a:noFill xmlns:a="http://schemas.openxmlformats.org/drawingml/2006/main"/>
-          <a:ln xmlns:a="http://schemas.openxmlformats.org/drawingml/2006/main" w="9525">
+          <a:prstGeom prst="line">
+            <a:avLst/>
+          </a:prstGeom>
+          <a:noFill/>
+          <a:ln w="9525">
             <a:solidFill>
               <a:srgbClr val="34313A"/>
             </a:solidFill>
           </a:ln>
         </p:spPr>
+        <p:txBody>
+          <a:bodyPr/>
+          <a:lstStyle/>
+          <a:p>
+            <a:endParaRPr lang="en-US"/>
+          </a:p>
+        </p:txBody>
       </p:sp>
       <p:sp>
         <p:nvSpPr>
           <p:cNvPr id="8" name="text-57">
-            <a:extLst xmlns:a="http://schemas.openxmlformats.org/drawingml/2006/main">
+            <a:extLst>
               <a:ext uri="{FF2B5EF4-FFF2-40B4-BE49-F238E27FC236}">
                 <a16:creationId xmlns:a16="http://schemas.microsoft.com/office/drawing/2014/main" id="{B69F79CE-5A93-42E9-949D-DCAA5854DB1E}"/>
               </a:ext>
             </a:extLst>
           </p:cNvPr>
           <p:cNvSpPr>
-            <a:spLocks xmlns:a="http://schemas.openxmlformats.org/drawingml/2006/main" noGrp="1"/>
-          </p:cNvSpPr>
-          <p:nvPr/>
-        </p:nvSpPr>
-        <p:spPr>
-          <a:xfrm xmlns:a="http://schemas.openxmlformats.org/drawingml/2006/main">
+            <a:spLocks noGrp="1"/>
+          </p:cNvSpPr>
+          <p:nvPr/>
+        </p:nvSpPr>
+        <p:spPr>
+          <a:xfrm>
             <a:off x="647700" y="4076700"/>
             <a:ext cx="3095625" cy="476250"/>
           </a:xfrm>
-          <a:prstGeom xmlns:a="http://schemas.openxmlformats.org/drawingml/2006/main" prst="rect">
-            <a:avLst/>
-          </a:prstGeom>
-          <a:noFill xmlns:a="http://schemas.openxmlformats.org/drawingml/2006/main"/>
-          <a:ln xmlns:a="http://schemas.openxmlformats.org/drawingml/2006/main" w="0">
-            <a:noFill/>
-          </a:ln>
-        </p:spPr>
-        <p:txBody>
-          <a:bodyPr xmlns:a="http://schemas.openxmlformats.org/drawingml/2006/main" lIns="0" tIns="0" rIns="0" bIns="0" anchor="t">
-            <a:noAutofit/>
-          </a:bodyPr>
-          <a:lstStyle xmlns:a="http://schemas.openxmlformats.org/drawingml/2006/main"/>
-          <a:p xmlns:a="http://schemas.openxmlformats.org/drawingml/2006/main">
+          <a:prstGeom prst="rect">
+            <a:avLst/>
+          </a:prstGeom>
+          <a:noFill/>
+          <a:ln w="0">
+            <a:noFill/>
+          </a:ln>
+        </p:spPr>
+        <p:txBody>
+          <a:bodyPr lIns="0" tIns="0" rIns="0" bIns="0" anchor="t">
+            <a:noAutofit/>
+          </a:bodyPr>
+          <a:lstStyle/>
+          <a:p>
             <a:pPr>
               <a:defRPr sz="2700" b="1">
                 <a:solidFill>
@@ -5563,36 +5394,36 @@
       <p:sp>
         <p:nvSpPr>
           <p:cNvPr id="9" name="text-58">
-            <a:extLst xmlns:a="http://schemas.openxmlformats.org/drawingml/2006/main">
+            <a:extLst>
               <a:ext uri="{FF2B5EF4-FFF2-40B4-BE49-F238E27FC236}">
                 <a16:creationId xmlns:a16="http://schemas.microsoft.com/office/drawing/2014/main" id="{7EC42F49-1ED9-4A3C-A574-9514EAA04F93}"/>
               </a:ext>
             </a:extLst>
           </p:cNvPr>
           <p:cNvSpPr>
-            <a:spLocks xmlns:a="http://schemas.openxmlformats.org/drawingml/2006/main" noGrp="1"/>
-          </p:cNvSpPr>
-          <p:nvPr/>
-        </p:nvSpPr>
-        <p:spPr>
-          <a:xfrm xmlns:a="http://schemas.openxmlformats.org/drawingml/2006/main">
+            <a:spLocks noGrp="1"/>
+          </p:cNvSpPr>
+          <p:nvPr/>
+        </p:nvSpPr>
+        <p:spPr>
+          <a:xfrm>
             <a:off x="4105275" y="4076700"/>
             <a:ext cx="7381875" cy="504825"/>
           </a:xfrm>
-          <a:prstGeom xmlns:a="http://schemas.openxmlformats.org/drawingml/2006/main" prst="rect">
-            <a:avLst/>
-          </a:prstGeom>
-          <a:noFill xmlns:a="http://schemas.openxmlformats.org/drawingml/2006/main"/>
-          <a:ln xmlns:a="http://schemas.openxmlformats.org/drawingml/2006/main" w="0">
-            <a:noFill/>
-          </a:ln>
-        </p:spPr>
-        <p:txBody>
-          <a:bodyPr xmlns:a="http://schemas.openxmlformats.org/drawingml/2006/main" lIns="0" tIns="0" rIns="0" bIns="0" anchor="t">
-            <a:noAutofit/>
-          </a:bodyPr>
-          <a:lstStyle xmlns:a="http://schemas.openxmlformats.org/drawingml/2006/main"/>
-          <a:p xmlns:a="http://schemas.openxmlformats.org/drawingml/2006/main">
+          <a:prstGeom prst="rect">
+            <a:avLst/>
+          </a:prstGeom>
+          <a:noFill/>
+          <a:ln w="0">
+            <a:noFill/>
+          </a:ln>
+        </p:spPr>
+        <p:txBody>
+          <a:bodyPr lIns="0" tIns="0" rIns="0" bIns="0" anchor="t">
+            <a:noAutofit/>
+          </a:bodyPr>
+          <a:lstStyle/>
+          <a:p>
             <a:pPr>
               <a:defRPr sz="2175" b="0">
                 <a:solidFill>
@@ -5620,36 +5451,36 @@
       <p:sp>
         <p:nvSpPr>
           <p:cNvPr id="10" name="text-59">
-            <a:extLst xmlns:a="http://schemas.openxmlformats.org/drawingml/2006/main">
+            <a:extLst>
               <a:ext uri="{FF2B5EF4-FFF2-40B4-BE49-F238E27FC236}">
                 <a16:creationId xmlns:a16="http://schemas.microsoft.com/office/drawing/2014/main" id="{3815C7E9-22D2-4D79-B483-3D9D42A1A9AD}"/>
               </a:ext>
             </a:extLst>
           </p:cNvPr>
           <p:cNvSpPr>
-            <a:spLocks xmlns:a="http://schemas.openxmlformats.org/drawingml/2006/main" noGrp="1"/>
-          </p:cNvSpPr>
-          <p:nvPr/>
-        </p:nvSpPr>
-        <p:spPr>
-          <a:xfrm xmlns:a="http://schemas.openxmlformats.org/drawingml/2006/main">
+            <a:spLocks noGrp="1"/>
+          </p:cNvSpPr>
+          <p:nvPr/>
+        </p:nvSpPr>
+        <p:spPr>
+          <a:xfrm>
             <a:off x="4124325" y="4572000"/>
             <a:ext cx="7353300" cy="323850"/>
           </a:xfrm>
-          <a:prstGeom xmlns:a="http://schemas.openxmlformats.org/drawingml/2006/main" prst="rect">
-            <a:avLst/>
-          </a:prstGeom>
-          <a:noFill xmlns:a="http://schemas.openxmlformats.org/drawingml/2006/main"/>
-          <a:ln xmlns:a="http://schemas.openxmlformats.org/drawingml/2006/main" w="0">
-            <a:noFill/>
-          </a:ln>
-        </p:spPr>
-        <p:txBody>
-          <a:bodyPr xmlns:a="http://schemas.openxmlformats.org/drawingml/2006/main" lIns="0" tIns="0" rIns="0" bIns="0" anchor="t">
-            <a:noAutofit/>
-          </a:bodyPr>
-          <a:lstStyle xmlns:a="http://schemas.openxmlformats.org/drawingml/2006/main"/>
-          <a:p xmlns:a="http://schemas.openxmlformats.org/drawingml/2006/main">
+          <a:prstGeom prst="rect">
+            <a:avLst/>
+          </a:prstGeom>
+          <a:noFill/>
+          <a:ln w="0">
+            <a:noFill/>
+          </a:ln>
+        </p:spPr>
+        <p:txBody>
+          <a:bodyPr lIns="0" tIns="0" rIns="0" bIns="0" anchor="t">
+            <a:noAutofit/>
+          </a:bodyPr>
+          <a:lstStyle/>
+          <a:p>
             <a:pPr>
               <a:defRPr sz="1575" b="0">
                 <a:solidFill>
@@ -5676,67 +5507,74 @@
       </p:sp>
       <p:sp>
         <p:nvSpPr>
-          <p:cNvPr id="11" name="">
-            <a:extLst xmlns:a="http://schemas.openxmlformats.org/drawingml/2006/main">
+          <p:cNvPr id="11" name="Straight Connector 10">
+            <a:extLst>
               <a:ext uri="{FF2B5EF4-FFF2-40B4-BE49-F238E27FC236}">
                 <a16:creationId xmlns:a16="http://schemas.microsoft.com/office/drawing/2014/main" id="{DC472DB5-4655-4773-9BAD-464EEE8023F0}"/>
               </a:ext>
             </a:extLst>
           </p:cNvPr>
           <p:cNvSpPr>
-            <a:spLocks xmlns:a="http://schemas.openxmlformats.org/drawingml/2006/main" noGrp="1"/>
-          </p:cNvSpPr>
-          <p:nvPr/>
-        </p:nvSpPr>
-        <p:spPr>
-          <a:xfrm xmlns:a="http://schemas.openxmlformats.org/drawingml/2006/main">
+            <a:spLocks noGrp="1"/>
+          </p:cNvSpPr>
+          <p:nvPr/>
+        </p:nvSpPr>
+        <p:spPr>
+          <a:xfrm>
             <a:off x="647700" y="5105400"/>
             <a:ext cx="10858500" cy="0"/>
           </a:xfrm>
-          <a:prstGeom xmlns:a="http://schemas.openxmlformats.org/drawingml/2006/main" prst="line">
-            <a:avLst/>
-          </a:prstGeom>
-          <a:noFill xmlns:a="http://schemas.openxmlformats.org/drawingml/2006/main"/>
-          <a:ln xmlns:a="http://schemas.openxmlformats.org/drawingml/2006/main" w="9525">
+          <a:prstGeom prst="line">
+            <a:avLst/>
+          </a:prstGeom>
+          <a:noFill/>
+          <a:ln w="9525">
             <a:solidFill>
               <a:srgbClr val="34313A"/>
             </a:solidFill>
           </a:ln>
         </p:spPr>
+        <p:txBody>
+          <a:bodyPr/>
+          <a:lstStyle/>
+          <a:p>
+            <a:endParaRPr lang="en-US"/>
+          </a:p>
+        </p:txBody>
       </p:sp>
       <p:sp>
         <p:nvSpPr>
           <p:cNvPr id="12" name="text-60">
-            <a:extLst xmlns:a="http://schemas.openxmlformats.org/drawingml/2006/main">
+            <a:extLst>
               <a:ext uri="{FF2B5EF4-FFF2-40B4-BE49-F238E27FC236}">
                 <a16:creationId xmlns:a16="http://schemas.microsoft.com/office/drawing/2014/main" id="{C8F27520-D95A-42E3-B656-1CCEE2CD3620}"/>
               </a:ext>
             </a:extLst>
           </p:cNvPr>
           <p:cNvSpPr>
-            <a:spLocks xmlns:a="http://schemas.openxmlformats.org/drawingml/2006/main" noGrp="1"/>
-          </p:cNvSpPr>
-          <p:nvPr/>
-        </p:nvSpPr>
-        <p:spPr>
-          <a:xfrm xmlns:a="http://schemas.openxmlformats.org/drawingml/2006/main">
+            <a:spLocks noGrp="1"/>
+          </p:cNvSpPr>
+          <p:nvPr/>
+        </p:nvSpPr>
+        <p:spPr>
+          <a:xfrm>
             <a:off x="647700" y="5286375"/>
             <a:ext cx="3095625" cy="476250"/>
           </a:xfrm>
-          <a:prstGeom xmlns:a="http://schemas.openxmlformats.org/drawingml/2006/main" prst="rect">
-            <a:avLst/>
-          </a:prstGeom>
-          <a:noFill xmlns:a="http://schemas.openxmlformats.org/drawingml/2006/main"/>
-          <a:ln xmlns:a="http://schemas.openxmlformats.org/drawingml/2006/main" w="0">
-            <a:noFill/>
-          </a:ln>
-        </p:spPr>
-        <p:txBody>
-          <a:bodyPr xmlns:a="http://schemas.openxmlformats.org/drawingml/2006/main" lIns="0" tIns="0" rIns="0" bIns="0" anchor="t">
-            <a:noAutofit/>
-          </a:bodyPr>
-          <a:lstStyle xmlns:a="http://schemas.openxmlformats.org/drawingml/2006/main"/>
-          <a:p xmlns:a="http://schemas.openxmlformats.org/drawingml/2006/main">
+          <a:prstGeom prst="rect">
+            <a:avLst/>
+          </a:prstGeom>
+          <a:noFill/>
+          <a:ln w="0">
+            <a:noFill/>
+          </a:ln>
+        </p:spPr>
+        <p:txBody>
+          <a:bodyPr lIns="0" tIns="0" rIns="0" bIns="0" anchor="t">
+            <a:noAutofit/>
+          </a:bodyPr>
+          <a:lstStyle/>
+          <a:p>
             <a:pPr>
               <a:defRPr sz="2700" b="1">
                 <a:solidFill>
@@ -5764,36 +5602,36 @@
       <p:sp>
         <p:nvSpPr>
           <p:cNvPr id="13" name="text-61">
-            <a:extLst xmlns:a="http://schemas.openxmlformats.org/drawingml/2006/main">
+            <a:extLst>
               <a:ext uri="{FF2B5EF4-FFF2-40B4-BE49-F238E27FC236}">
                 <a16:creationId xmlns:a16="http://schemas.microsoft.com/office/drawing/2014/main" id="{EDFE9210-72B7-4C7C-994B-37D9D3A9BDFE}"/>
               </a:ext>
             </a:extLst>
           </p:cNvPr>
           <p:cNvSpPr>
-            <a:spLocks xmlns:a="http://schemas.openxmlformats.org/drawingml/2006/main" noGrp="1"/>
-          </p:cNvSpPr>
-          <p:nvPr/>
-        </p:nvSpPr>
-        <p:spPr>
-          <a:xfrm xmlns:a="http://schemas.openxmlformats.org/drawingml/2006/main">
+            <a:spLocks noGrp="1"/>
+          </p:cNvSpPr>
+          <p:nvPr/>
+        </p:nvSpPr>
+        <p:spPr>
+          <a:xfrm>
             <a:off x="4105275" y="5286375"/>
             <a:ext cx="7381875" cy="504825"/>
           </a:xfrm>
-          <a:prstGeom xmlns:a="http://schemas.openxmlformats.org/drawingml/2006/main" prst="rect">
-            <a:avLst/>
-          </a:prstGeom>
-          <a:noFill xmlns:a="http://schemas.openxmlformats.org/drawingml/2006/main"/>
-          <a:ln xmlns:a="http://schemas.openxmlformats.org/drawingml/2006/main" w="0">
-            <a:noFill/>
-          </a:ln>
-        </p:spPr>
-        <p:txBody>
-          <a:bodyPr xmlns:a="http://schemas.openxmlformats.org/drawingml/2006/main" lIns="0" tIns="0" rIns="0" bIns="0" anchor="t">
-            <a:noAutofit/>
-          </a:bodyPr>
-          <a:lstStyle xmlns:a="http://schemas.openxmlformats.org/drawingml/2006/main"/>
-          <a:p xmlns:a="http://schemas.openxmlformats.org/drawingml/2006/main">
+          <a:prstGeom prst="rect">
+            <a:avLst/>
+          </a:prstGeom>
+          <a:noFill/>
+          <a:ln w="0">
+            <a:noFill/>
+          </a:ln>
+        </p:spPr>
+        <p:txBody>
+          <a:bodyPr lIns="0" tIns="0" rIns="0" bIns="0" anchor="t">
+            <a:noAutofit/>
+          </a:bodyPr>
+          <a:lstStyle/>
+          <a:p>
             <a:pPr>
               <a:defRPr sz="2175" b="0">
                 <a:solidFill>
@@ -5821,36 +5659,36 @@
       <p:sp>
         <p:nvSpPr>
           <p:cNvPr id="14" name="text-62">
-            <a:extLst xmlns:a="http://schemas.openxmlformats.org/drawingml/2006/main">
+            <a:extLst>
               <a:ext uri="{FF2B5EF4-FFF2-40B4-BE49-F238E27FC236}">
                 <a16:creationId xmlns:a16="http://schemas.microsoft.com/office/drawing/2014/main" id="{A9710341-04D6-4310-9DF2-8F39A84331A2}"/>
               </a:ext>
             </a:extLst>
           </p:cNvPr>
           <p:cNvSpPr>
-            <a:spLocks xmlns:a="http://schemas.openxmlformats.org/drawingml/2006/main" noGrp="1"/>
-          </p:cNvSpPr>
-          <p:nvPr/>
-        </p:nvSpPr>
-        <p:spPr>
-          <a:xfrm xmlns:a="http://schemas.openxmlformats.org/drawingml/2006/main">
+            <a:spLocks noGrp="1"/>
+          </p:cNvSpPr>
+          <p:nvPr/>
+        </p:nvSpPr>
+        <p:spPr>
+          <a:xfrm>
             <a:off x="4124325" y="5781675"/>
             <a:ext cx="7353300" cy="323850"/>
           </a:xfrm>
-          <a:prstGeom xmlns:a="http://schemas.openxmlformats.org/drawingml/2006/main" prst="rect">
-            <a:avLst/>
-          </a:prstGeom>
-          <a:noFill xmlns:a="http://schemas.openxmlformats.org/drawingml/2006/main"/>
-          <a:ln xmlns:a="http://schemas.openxmlformats.org/drawingml/2006/main" w="0">
-            <a:noFill/>
-          </a:ln>
-        </p:spPr>
-        <p:txBody>
-          <a:bodyPr xmlns:a="http://schemas.openxmlformats.org/drawingml/2006/main" lIns="0" tIns="0" rIns="0" bIns="0" anchor="t">
-            <a:noAutofit/>
-          </a:bodyPr>
-          <a:lstStyle xmlns:a="http://schemas.openxmlformats.org/drawingml/2006/main"/>
-          <a:p xmlns:a="http://schemas.openxmlformats.org/drawingml/2006/main">
+          <a:prstGeom prst="rect">
+            <a:avLst/>
+          </a:prstGeom>
+          <a:noFill/>
+          <a:ln w="0">
+            <a:noFill/>
+          </a:ln>
+        </p:spPr>
+        <p:txBody>
+          <a:bodyPr lIns="0" tIns="0" rIns="0" bIns="0" anchor="t">
+            <a:noAutofit/>
+          </a:bodyPr>
+          <a:lstStyle/>
+          <a:p>
             <a:pPr>
               <a:defRPr sz="1575" b="0">
                 <a:solidFill>
@@ -5878,36 +5716,36 @@
       <p:sp>
         <p:nvSpPr>
           <p:cNvPr id="15" name="text-63">
-            <a:extLst xmlns:a="http://schemas.openxmlformats.org/drawingml/2006/main">
+            <a:extLst>
               <a:ext uri="{FF2B5EF4-FFF2-40B4-BE49-F238E27FC236}">
                 <a16:creationId xmlns:a16="http://schemas.microsoft.com/office/drawing/2014/main" id="{EFB2F073-2588-433B-AFFC-8B51A520E4C1}"/>
               </a:ext>
             </a:extLst>
           </p:cNvPr>
           <p:cNvSpPr>
-            <a:spLocks xmlns:a="http://schemas.openxmlformats.org/drawingml/2006/main" noGrp="1"/>
-          </p:cNvSpPr>
-          <p:nvPr/>
-        </p:nvSpPr>
-        <p:spPr>
-          <a:xfrm xmlns:a="http://schemas.openxmlformats.org/drawingml/2006/main">
+            <a:spLocks noGrp="1"/>
+          </p:cNvSpPr>
+          <p:nvPr/>
+        </p:nvSpPr>
+        <p:spPr>
+          <a:xfrm>
             <a:off x="647700" y="6419850"/>
             <a:ext cx="10858500" cy="257175"/>
           </a:xfrm>
-          <a:prstGeom xmlns:a="http://schemas.openxmlformats.org/drawingml/2006/main" prst="rect">
-            <a:avLst/>
-          </a:prstGeom>
-          <a:noFill xmlns:a="http://schemas.openxmlformats.org/drawingml/2006/main"/>
-          <a:ln xmlns:a="http://schemas.openxmlformats.org/drawingml/2006/main" w="0">
-            <a:noFill/>
-          </a:ln>
-        </p:spPr>
-        <p:txBody>
-          <a:bodyPr xmlns:a="http://schemas.openxmlformats.org/drawingml/2006/main" lIns="0" tIns="0" rIns="0" bIns="0" anchor="t">
-            <a:noAutofit/>
-          </a:bodyPr>
-          <a:lstStyle xmlns:a="http://schemas.openxmlformats.org/drawingml/2006/main"/>
-          <a:p xmlns:a="http://schemas.openxmlformats.org/drawingml/2006/main">
+          <a:prstGeom prst="rect">
+            <a:avLst/>
+          </a:prstGeom>
+          <a:noFill/>
+          <a:ln w="0">
+            <a:noFill/>
+          </a:ln>
+        </p:spPr>
+        <p:txBody>
+          <a:bodyPr lIns="0" tIns="0" rIns="0" bIns="0" anchor="t">
+            <a:noAutofit/>
+          </a:bodyPr>
+          <a:lstStyle/>
+          <a:p>
             <a:pPr>
               <a:defRPr sz="1350" b="0">
                 <a:solidFill>
@@ -5939,17 +5777,21 @@
       </p:ext>
     </p:extLst>
   </p:cSld>
+  <p:clrMapOvr>
+    <a:masterClrMapping/>
+  </p:clrMapOvr>
 </p:sld>
 </file>
 
 <file path=ppt/slides/slide7.xml><?xml version="1.0" encoding="utf-8"?>
-<p:sld xmlns:p="http://schemas.openxmlformats.org/presentationml/2006/main">
+<p:sld xmlns:a="http://schemas.openxmlformats.org/drawingml/2006/main" xmlns:r="http://schemas.openxmlformats.org/officeDocument/2006/relationships" xmlns:p="http://schemas.openxmlformats.org/presentationml/2006/main">
   <p:cSld>
     <p:bg>
       <p:bgPr>
-        <a:solidFill xmlns:a="http://schemas.openxmlformats.org/drawingml/2006/main">
+        <a:solidFill>
           <a:srgbClr val="000000"/>
         </a:solidFill>
+        <a:effectLst/>
       </p:bgPr>
     </p:bg>
     <p:spTree>
@@ -5959,41 +5801,46 @@
         <p:nvPr/>
       </p:nvGrpSpPr>
       <p:grpSpPr>
-        <a:xfrm xmlns:a="http://schemas.openxmlformats.org/drawingml/2006/main"/>
+        <a:xfrm>
+          <a:off x="0" y="0"/>
+          <a:ext cx="0" cy="0"/>
+          <a:chOff x="0" y="0"/>
+          <a:chExt cx="0" cy="0"/>
+        </a:xfrm>
       </p:grpSpPr>
       <p:sp>
         <p:nvSpPr>
           <p:cNvPr id="12" name="text-64">
-            <a:extLst xmlns:a="http://schemas.openxmlformats.org/drawingml/2006/main">
+            <a:extLst>
               <a:ext uri="{FF2B5EF4-FFF2-40B4-BE49-F238E27FC236}">
                 <a16:creationId xmlns:a16="http://schemas.microsoft.com/office/drawing/2014/main" id="{16D8B565-783F-4F58-83D6-15F83ED9C4B4}"/>
               </a:ext>
             </a:extLst>
           </p:cNvPr>
           <p:cNvSpPr>
-            <a:spLocks xmlns:a="http://schemas.openxmlformats.org/drawingml/2006/main" noGrp="1"/>
-          </p:cNvSpPr>
-          <p:nvPr/>
-        </p:nvSpPr>
-        <p:spPr>
-          <a:xfrm xmlns:a="http://schemas.openxmlformats.org/drawingml/2006/main">
+            <a:spLocks noGrp="1"/>
+          </p:cNvSpPr>
+          <p:nvPr/>
+        </p:nvSpPr>
+        <p:spPr>
+          <a:xfrm>
             <a:off x="609600" y="400050"/>
             <a:ext cx="9525000" cy="247650"/>
           </a:xfrm>
-          <a:prstGeom xmlns:a="http://schemas.openxmlformats.org/drawingml/2006/main" prst="rect">
-            <a:avLst/>
-          </a:prstGeom>
-          <a:noFill xmlns:a="http://schemas.openxmlformats.org/drawingml/2006/main"/>
-          <a:ln xmlns:a="http://schemas.openxmlformats.org/drawingml/2006/main" w="0">
-            <a:noFill/>
-          </a:ln>
-        </p:spPr>
-        <p:txBody>
-          <a:bodyPr xmlns:a="http://schemas.openxmlformats.org/drawingml/2006/main" lIns="0" tIns="0" rIns="0" bIns="0" anchor="t">
-            <a:noAutofit/>
-          </a:bodyPr>
-          <a:lstStyle xmlns:a="http://schemas.openxmlformats.org/drawingml/2006/main"/>
-          <a:p xmlns:a="http://schemas.openxmlformats.org/drawingml/2006/main">
+          <a:prstGeom prst="rect">
+            <a:avLst/>
+          </a:prstGeom>
+          <a:noFill/>
+          <a:ln w="0">
+            <a:noFill/>
+          </a:ln>
+        </p:spPr>
+        <p:txBody>
+          <a:bodyPr lIns="0" tIns="0" rIns="0" bIns="0" anchor="t">
+            <a:noAutofit/>
+          </a:bodyPr>
+          <a:lstStyle/>
+          <a:p>
             <a:pPr>
               <a:defRPr sz="1200" b="0">
                 <a:solidFill>
@@ -6021,36 +5868,36 @@
       <p:sp>
         <p:nvSpPr>
           <p:cNvPr id="2" name="text-65">
-            <a:extLst xmlns:a="http://schemas.openxmlformats.org/drawingml/2006/main">
+            <a:extLst>
               <a:ext uri="{FF2B5EF4-FFF2-40B4-BE49-F238E27FC236}">
                 <a16:creationId xmlns:a16="http://schemas.microsoft.com/office/drawing/2014/main" id="{58B3FEC6-15BB-4E6D-82CD-2FC464481EB8}"/>
               </a:ext>
             </a:extLst>
           </p:cNvPr>
           <p:cNvSpPr>
-            <a:spLocks xmlns:a="http://schemas.openxmlformats.org/drawingml/2006/main" noGrp="1"/>
-          </p:cNvSpPr>
-          <p:nvPr/>
-        </p:nvSpPr>
-        <p:spPr>
-          <a:xfrm xmlns:a="http://schemas.openxmlformats.org/drawingml/2006/main">
+            <a:spLocks noGrp="1"/>
+          </p:cNvSpPr>
+          <p:nvPr/>
+        </p:nvSpPr>
+        <p:spPr>
+          <a:xfrm>
             <a:off x="11049000" y="400050"/>
             <a:ext cx="523875" cy="238125"/>
           </a:xfrm>
-          <a:prstGeom xmlns:a="http://schemas.openxmlformats.org/drawingml/2006/main" prst="rect">
-            <a:avLst/>
-          </a:prstGeom>
-          <a:noFill xmlns:a="http://schemas.openxmlformats.org/drawingml/2006/main"/>
-          <a:ln xmlns:a="http://schemas.openxmlformats.org/drawingml/2006/main" w="0">
-            <a:noFill/>
-          </a:ln>
-        </p:spPr>
-        <p:txBody>
-          <a:bodyPr xmlns:a="http://schemas.openxmlformats.org/drawingml/2006/main" lIns="0" tIns="0" rIns="0" bIns="0" anchor="t">
-            <a:noAutofit/>
-          </a:bodyPr>
-          <a:lstStyle xmlns:a="http://schemas.openxmlformats.org/drawingml/2006/main"/>
-          <a:p xmlns:a="http://schemas.openxmlformats.org/drawingml/2006/main">
+          <a:prstGeom prst="rect">
+            <a:avLst/>
+          </a:prstGeom>
+          <a:noFill/>
+          <a:ln w="0">
+            <a:noFill/>
+          </a:ln>
+        </p:spPr>
+        <p:txBody>
+          <a:bodyPr lIns="0" tIns="0" rIns="0" bIns="0" anchor="t">
+            <a:noAutofit/>
+          </a:bodyPr>
+          <a:lstStyle/>
+          <a:p>
             <a:pPr>
               <a:defRPr sz="1200" b="0">
                 <a:solidFill>
@@ -6078,36 +5925,36 @@
       <p:sp>
         <p:nvSpPr>
           <p:cNvPr id="3" name="text-66">
-            <a:extLst xmlns:a="http://schemas.openxmlformats.org/drawingml/2006/main">
+            <a:extLst>
               <a:ext uri="{FF2B5EF4-FFF2-40B4-BE49-F238E27FC236}">
                 <a16:creationId xmlns:a16="http://schemas.microsoft.com/office/drawing/2014/main" id="{E9B5D07F-8267-4AB1-B2D7-49A49682CC29}"/>
               </a:ext>
             </a:extLst>
           </p:cNvPr>
           <p:cNvSpPr>
-            <a:spLocks xmlns:a="http://schemas.openxmlformats.org/drawingml/2006/main" noGrp="1"/>
-          </p:cNvSpPr>
-          <p:nvPr/>
-        </p:nvSpPr>
-        <p:spPr>
-          <a:xfrm xmlns:a="http://schemas.openxmlformats.org/drawingml/2006/main">
+            <a:spLocks noGrp="1"/>
+          </p:cNvSpPr>
+          <p:nvPr/>
+        </p:nvSpPr>
+        <p:spPr>
+          <a:xfrm>
             <a:off x="609600" y="990600"/>
             <a:ext cx="10858500" cy="1438275"/>
           </a:xfrm>
-          <a:prstGeom xmlns:a="http://schemas.openxmlformats.org/drawingml/2006/main" prst="rect">
-            <a:avLst/>
-          </a:prstGeom>
-          <a:noFill xmlns:a="http://schemas.openxmlformats.org/drawingml/2006/main"/>
-          <a:ln xmlns:a="http://schemas.openxmlformats.org/drawingml/2006/main" w="0">
-            <a:noFill/>
-          </a:ln>
-        </p:spPr>
-        <p:txBody>
-          <a:bodyPr xmlns:a="http://schemas.openxmlformats.org/drawingml/2006/main" lIns="0" tIns="0" rIns="0" bIns="0" anchor="t">
-            <a:noAutofit/>
-          </a:bodyPr>
-          <a:lstStyle xmlns:a="http://schemas.openxmlformats.org/drawingml/2006/main"/>
-          <a:p xmlns:a="http://schemas.openxmlformats.org/drawingml/2006/main">
+          <a:prstGeom prst="rect">
+            <a:avLst/>
+          </a:prstGeom>
+          <a:noFill/>
+          <a:ln w="0">
+            <a:noFill/>
+          </a:ln>
+        </p:spPr>
+        <p:txBody>
+          <a:bodyPr lIns="0" tIns="0" rIns="0" bIns="0" anchor="t">
+            <a:noAutofit/>
+          </a:bodyPr>
+          <a:lstStyle/>
+          <a:p>
             <a:pPr>
               <a:defRPr sz="4650" b="1">
                 <a:solidFill>
@@ -6130,7 +5977,7 @@
               <a:t>Every dye machine first.</a:t>
             </a:r>
           </a:p>
-          <a:p xmlns:a="http://schemas.openxmlformats.org/drawingml/2006/main">
+          <a:p>
             <a:pPr>
               <a:defRPr sz="4650" b="1">
                 <a:solidFill>
@@ -6158,36 +6005,36 @@
       <p:sp>
         <p:nvSpPr>
           <p:cNvPr id="4" name="text-67">
-            <a:extLst xmlns:a="http://schemas.openxmlformats.org/drawingml/2006/main">
+            <a:extLst>
               <a:ext uri="{FF2B5EF4-FFF2-40B4-BE49-F238E27FC236}">
                 <a16:creationId xmlns:a16="http://schemas.microsoft.com/office/drawing/2014/main" id="{A2611057-A9F1-4DAE-BC25-43AF0F3EFD0D}"/>
               </a:ext>
             </a:extLst>
           </p:cNvPr>
           <p:cNvSpPr>
-            <a:spLocks xmlns:a="http://schemas.openxmlformats.org/drawingml/2006/main" noGrp="1"/>
-          </p:cNvSpPr>
-          <p:nvPr/>
-        </p:nvSpPr>
-        <p:spPr>
-          <a:xfrm xmlns:a="http://schemas.openxmlformats.org/drawingml/2006/main">
+            <a:spLocks noGrp="1"/>
+          </p:cNvSpPr>
+          <p:nvPr/>
+        </p:nvSpPr>
+        <p:spPr>
+          <a:xfrm>
             <a:off x="552450" y="2771775"/>
             <a:ext cx="6810375" cy="1333500"/>
           </a:xfrm>
-          <a:prstGeom xmlns:a="http://schemas.openxmlformats.org/drawingml/2006/main" prst="rect">
-            <a:avLst/>
-          </a:prstGeom>
-          <a:noFill xmlns:a="http://schemas.openxmlformats.org/drawingml/2006/main"/>
-          <a:ln xmlns:a="http://schemas.openxmlformats.org/drawingml/2006/main" w="0">
-            <a:noFill/>
-          </a:ln>
-        </p:spPr>
-        <p:txBody>
-          <a:bodyPr xmlns:a="http://schemas.openxmlformats.org/drawingml/2006/main" lIns="0" tIns="0" rIns="0" bIns="0" anchor="t">
-            <a:noAutofit/>
-          </a:bodyPr>
-          <a:lstStyle xmlns:a="http://schemas.openxmlformats.org/drawingml/2006/main"/>
-          <a:p xmlns:a="http://schemas.openxmlformats.org/drawingml/2006/main">
+          <a:prstGeom prst="rect">
+            <a:avLst/>
+          </a:prstGeom>
+          <a:noFill/>
+          <a:ln w="0">
+            <a:noFill/>
+          </a:ln>
+        </p:spPr>
+        <p:txBody>
+          <a:bodyPr lIns="0" tIns="0" rIns="0" bIns="0" anchor="t">
+            <a:noAutofit/>
+          </a:bodyPr>
+          <a:lstStyle/>
+          <a:p>
             <a:pPr>
               <a:defRPr sz="8400" b="1">
                 <a:solidFill>
@@ -6215,36 +6062,36 @@
       <p:sp>
         <p:nvSpPr>
           <p:cNvPr id="5" name="text-68">
-            <a:extLst xmlns:a="http://schemas.openxmlformats.org/drawingml/2006/main">
+            <a:extLst>
               <a:ext uri="{FF2B5EF4-FFF2-40B4-BE49-F238E27FC236}">
                 <a16:creationId xmlns:a16="http://schemas.microsoft.com/office/drawing/2014/main" id="{EFA4804A-5A03-4904-A948-6B39E37F265F}"/>
               </a:ext>
             </a:extLst>
           </p:cNvPr>
           <p:cNvSpPr>
-            <a:spLocks xmlns:a="http://schemas.openxmlformats.org/drawingml/2006/main" noGrp="1"/>
-          </p:cNvSpPr>
-          <p:nvPr/>
-        </p:nvSpPr>
-        <p:spPr>
-          <a:xfrm xmlns:a="http://schemas.openxmlformats.org/drawingml/2006/main">
+            <a:spLocks noGrp="1"/>
+          </p:cNvSpPr>
+          <p:nvPr/>
+        </p:nvSpPr>
+        <p:spPr>
+          <a:xfrm>
             <a:off x="638175" y="4219575"/>
             <a:ext cx="7010400" cy="476250"/>
           </a:xfrm>
-          <a:prstGeom xmlns:a="http://schemas.openxmlformats.org/drawingml/2006/main" prst="rect">
-            <a:avLst/>
-          </a:prstGeom>
-          <a:noFill xmlns:a="http://schemas.openxmlformats.org/drawingml/2006/main"/>
-          <a:ln xmlns:a="http://schemas.openxmlformats.org/drawingml/2006/main" w="0">
-            <a:noFill/>
-          </a:ln>
-        </p:spPr>
-        <p:txBody>
-          <a:bodyPr xmlns:a="http://schemas.openxmlformats.org/drawingml/2006/main" lIns="0" tIns="0" rIns="0" bIns="0" anchor="t">
-            <a:noAutofit/>
-          </a:bodyPr>
-          <a:lstStyle xmlns:a="http://schemas.openxmlformats.org/drawingml/2006/main"/>
-          <a:p xmlns:a="http://schemas.openxmlformats.org/drawingml/2006/main">
+          <a:prstGeom prst="rect">
+            <a:avLst/>
+          </a:prstGeom>
+          <a:noFill/>
+          <a:ln w="0">
+            <a:noFill/>
+          </a:ln>
+        </p:spPr>
+        <p:txBody>
+          <a:bodyPr lIns="0" tIns="0" rIns="0" bIns="0" anchor="t">
+            <a:noAutofit/>
+          </a:bodyPr>
+          <a:lstStyle/>
+          <a:p>
             <a:pPr>
               <a:defRPr sz="2475" b="1">
                 <a:solidFill>
@@ -6272,36 +6119,36 @@
       <p:sp>
         <p:nvSpPr>
           <p:cNvPr id="6" name="text-69">
-            <a:extLst xmlns:a="http://schemas.openxmlformats.org/drawingml/2006/main">
+            <a:extLst>
               <a:ext uri="{FF2B5EF4-FFF2-40B4-BE49-F238E27FC236}">
                 <a16:creationId xmlns:a16="http://schemas.microsoft.com/office/drawing/2014/main" id="{0BAF2392-2E82-41E7-BA5F-76446C674F2C}"/>
               </a:ext>
             </a:extLst>
           </p:cNvPr>
           <p:cNvSpPr>
-            <a:spLocks xmlns:a="http://schemas.openxmlformats.org/drawingml/2006/main" noGrp="1"/>
-          </p:cNvSpPr>
-          <p:nvPr/>
-        </p:nvSpPr>
-        <p:spPr>
-          <a:xfrm xmlns:a="http://schemas.openxmlformats.org/drawingml/2006/main">
+            <a:spLocks noGrp="1"/>
+          </p:cNvSpPr>
+          <p:nvPr/>
+        </p:nvSpPr>
+        <p:spPr>
+          <a:xfrm>
             <a:off x="657225" y="4772025"/>
             <a:ext cx="6191250" cy="333375"/>
           </a:xfrm>
-          <a:prstGeom xmlns:a="http://schemas.openxmlformats.org/drawingml/2006/main" prst="rect">
-            <a:avLst/>
-          </a:prstGeom>
-          <a:noFill xmlns:a="http://schemas.openxmlformats.org/drawingml/2006/main"/>
-          <a:ln xmlns:a="http://schemas.openxmlformats.org/drawingml/2006/main" w="0">
-            <a:noFill/>
-          </a:ln>
-        </p:spPr>
-        <p:txBody>
-          <a:bodyPr xmlns:a="http://schemas.openxmlformats.org/drawingml/2006/main" lIns="0" tIns="0" rIns="0" bIns="0" anchor="t">
-            <a:noAutofit/>
-          </a:bodyPr>
-          <a:lstStyle xmlns:a="http://schemas.openxmlformats.org/drawingml/2006/main"/>
-          <a:p xmlns:a="http://schemas.openxmlformats.org/drawingml/2006/main">
+          <a:prstGeom prst="rect">
+            <a:avLst/>
+          </a:prstGeom>
+          <a:noFill/>
+          <a:ln w="0">
+            <a:noFill/>
+          </a:ln>
+        </p:spPr>
+        <p:txBody>
+          <a:bodyPr lIns="0" tIns="0" rIns="0" bIns="0" anchor="t">
+            <a:noAutofit/>
+          </a:bodyPr>
+          <a:lstStyle/>
+          <a:p>
             <a:pPr>
               <a:defRPr sz="1725" b="0">
                 <a:solidFill>
@@ -6329,36 +6176,36 @@
       <p:sp>
         <p:nvSpPr>
           <p:cNvPr id="7" name="text-70">
-            <a:extLst xmlns:a="http://schemas.openxmlformats.org/drawingml/2006/main">
+            <a:extLst>
               <a:ext uri="{FF2B5EF4-FFF2-40B4-BE49-F238E27FC236}">
                 <a16:creationId xmlns:a16="http://schemas.microsoft.com/office/drawing/2014/main" id="{07FA5B9E-F9F3-4DAE-84F4-8A3F273014E9}"/>
               </a:ext>
             </a:extLst>
           </p:cNvPr>
           <p:cNvSpPr>
-            <a:spLocks xmlns:a="http://schemas.openxmlformats.org/drawingml/2006/main" noGrp="1"/>
-          </p:cNvSpPr>
-          <p:nvPr/>
-        </p:nvSpPr>
-        <p:spPr>
-          <a:xfrm xmlns:a="http://schemas.openxmlformats.org/drawingml/2006/main">
+            <a:spLocks noGrp="1"/>
+          </p:cNvSpPr>
+          <p:nvPr/>
+        </p:nvSpPr>
+        <p:spPr>
+          <a:xfrm>
             <a:off x="8172450" y="3105150"/>
             <a:ext cx="3524250" cy="619125"/>
           </a:xfrm>
-          <a:prstGeom xmlns:a="http://schemas.openxmlformats.org/drawingml/2006/main" prst="rect">
-            <a:avLst/>
-          </a:prstGeom>
-          <a:noFill xmlns:a="http://schemas.openxmlformats.org/drawingml/2006/main"/>
-          <a:ln xmlns:a="http://schemas.openxmlformats.org/drawingml/2006/main" w="0">
-            <a:noFill/>
-          </a:ln>
-        </p:spPr>
-        <p:txBody>
-          <a:bodyPr xmlns:a="http://schemas.openxmlformats.org/drawingml/2006/main" lIns="0" tIns="0" rIns="0" bIns="0" anchor="t">
-            <a:noAutofit/>
-          </a:bodyPr>
-          <a:lstStyle xmlns:a="http://schemas.openxmlformats.org/drawingml/2006/main"/>
-          <a:p xmlns:a="http://schemas.openxmlformats.org/drawingml/2006/main">
+          <a:prstGeom prst="rect">
+            <a:avLst/>
+          </a:prstGeom>
+          <a:noFill/>
+          <a:ln w="0">
+            <a:noFill/>
+          </a:ln>
+        </p:spPr>
+        <p:txBody>
+          <a:bodyPr lIns="0" tIns="0" rIns="0" bIns="0" anchor="t">
+            <a:noAutofit/>
+          </a:bodyPr>
+          <a:lstStyle/>
+          <a:p>
             <a:pPr>
               <a:defRPr sz="3525" b="1">
                 <a:solidFill>
@@ -6386,36 +6233,36 @@
       <p:sp>
         <p:nvSpPr>
           <p:cNvPr id="8" name="text-71">
-            <a:extLst xmlns:a="http://schemas.openxmlformats.org/drawingml/2006/main">
+            <a:extLst>
               <a:ext uri="{FF2B5EF4-FFF2-40B4-BE49-F238E27FC236}">
                 <a16:creationId xmlns:a16="http://schemas.microsoft.com/office/drawing/2014/main" id="{600C5CD5-48A3-453B-A5A1-EC4FB2E238F0}"/>
               </a:ext>
             </a:extLst>
           </p:cNvPr>
           <p:cNvSpPr>
-            <a:spLocks xmlns:a="http://schemas.openxmlformats.org/drawingml/2006/main" noGrp="1"/>
-          </p:cNvSpPr>
-          <p:nvPr/>
-        </p:nvSpPr>
-        <p:spPr>
-          <a:xfrm xmlns:a="http://schemas.openxmlformats.org/drawingml/2006/main">
+            <a:spLocks noGrp="1"/>
+          </p:cNvSpPr>
+          <p:nvPr/>
+        </p:nvSpPr>
+        <p:spPr>
+          <a:xfrm>
             <a:off x="8201025" y="3857625"/>
             <a:ext cx="3352800" cy="819150"/>
           </a:xfrm>
-          <a:prstGeom xmlns:a="http://schemas.openxmlformats.org/drawingml/2006/main" prst="rect">
-            <a:avLst/>
-          </a:prstGeom>
-          <a:noFill xmlns:a="http://schemas.openxmlformats.org/drawingml/2006/main"/>
-          <a:ln xmlns:a="http://schemas.openxmlformats.org/drawingml/2006/main" w="0">
-            <a:noFill/>
-          </a:ln>
-        </p:spPr>
-        <p:txBody>
-          <a:bodyPr xmlns:a="http://schemas.openxmlformats.org/drawingml/2006/main" lIns="0" tIns="0" rIns="0" bIns="0" anchor="t">
-            <a:noAutofit/>
-          </a:bodyPr>
-          <a:lstStyle xmlns:a="http://schemas.openxmlformats.org/drawingml/2006/main"/>
-          <a:p xmlns:a="http://schemas.openxmlformats.org/drawingml/2006/main">
+          <a:prstGeom prst="rect">
+            <a:avLst/>
+          </a:prstGeom>
+          <a:noFill/>
+          <a:ln w="0">
+            <a:noFill/>
+          </a:ln>
+        </p:spPr>
+        <p:txBody>
+          <a:bodyPr lIns="0" tIns="0" rIns="0" bIns="0" anchor="t">
+            <a:noAutofit/>
+          </a:bodyPr>
+          <a:lstStyle/>
+          <a:p>
             <a:pPr>
               <a:defRPr sz="1800" b="0">
                 <a:solidFill>
@@ -6438,7 +6285,7 @@
               <a:t>annual software opportunity</a:t>
             </a:r>
           </a:p>
-          <a:p xmlns:a="http://schemas.openxmlformats.org/drawingml/2006/main">
+          <a:p>
             <a:pPr>
               <a:defRPr sz="1800" b="0">
                 <a:solidFill>
@@ -6466,36 +6313,36 @@
       <p:sp>
         <p:nvSpPr>
           <p:cNvPr id="9" name="text-72">
-            <a:extLst xmlns:a="http://schemas.openxmlformats.org/drawingml/2006/main">
+            <a:extLst>
               <a:ext uri="{FF2B5EF4-FFF2-40B4-BE49-F238E27FC236}">
                 <a16:creationId xmlns:a16="http://schemas.microsoft.com/office/drawing/2014/main" id="{AF25E79B-3934-4FCE-92D0-FCF07A2AB970}"/>
               </a:ext>
             </a:extLst>
           </p:cNvPr>
           <p:cNvSpPr>
-            <a:spLocks xmlns:a="http://schemas.openxmlformats.org/drawingml/2006/main" noGrp="1"/>
-          </p:cNvSpPr>
-          <p:nvPr/>
-        </p:nvSpPr>
-        <p:spPr>
-          <a:xfrm xmlns:a="http://schemas.openxmlformats.org/drawingml/2006/main">
+            <a:spLocks noGrp="1"/>
+          </p:cNvSpPr>
+          <p:nvPr/>
+        </p:nvSpPr>
+        <p:spPr>
+          <a:xfrm>
             <a:off x="657225" y="5324475"/>
             <a:ext cx="10810875" cy="781050"/>
           </a:xfrm>
-          <a:prstGeom xmlns:a="http://schemas.openxmlformats.org/drawingml/2006/main" prst="rect">
-            <a:avLst/>
-          </a:prstGeom>
-          <a:noFill xmlns:a="http://schemas.openxmlformats.org/drawingml/2006/main"/>
-          <a:ln xmlns:a="http://schemas.openxmlformats.org/drawingml/2006/main" w="0">
-            <a:noFill/>
-          </a:ln>
-        </p:spPr>
-        <p:txBody>
-          <a:bodyPr xmlns:a="http://schemas.openxmlformats.org/drawingml/2006/main" lIns="0" tIns="0" rIns="0" bIns="0" anchor="t">
-            <a:noAutofit/>
-          </a:bodyPr>
-          <a:lstStyle xmlns:a="http://schemas.openxmlformats.org/drawingml/2006/main"/>
-          <a:p xmlns:a="http://schemas.openxmlformats.org/drawingml/2006/main">
+          <a:prstGeom prst="rect">
+            <a:avLst/>
+          </a:prstGeom>
+          <a:noFill/>
+          <a:ln w="0">
+            <a:noFill/>
+          </a:ln>
+        </p:spPr>
+        <p:txBody>
+          <a:bodyPr lIns="0" tIns="0" rIns="0" bIns="0" anchor="t">
+            <a:noAutofit/>
+          </a:bodyPr>
+          <a:lstStyle/>
+          <a:p>
             <a:pPr>
               <a:defRPr sz="2325" b="0">
                 <a:solidFill>
@@ -6518,7 +6365,7 @@
               <a:t>Fibre measurement is the first application.</a:t>
             </a:r>
           </a:p>
-          <a:p xmlns:a="http://schemas.openxmlformats.org/drawingml/2006/main">
+          <a:p>
             <a:pPr>
               <a:defRPr sz="2325" b="0">
                 <a:solidFill>
@@ -6546,36 +6393,36 @@
       <p:sp>
         <p:nvSpPr>
           <p:cNvPr id="10" name="text-73">
-            <a:extLst xmlns:a="http://schemas.openxmlformats.org/drawingml/2006/main">
+            <a:extLst>
               <a:ext uri="{FF2B5EF4-FFF2-40B4-BE49-F238E27FC236}">
                 <a16:creationId xmlns:a16="http://schemas.microsoft.com/office/drawing/2014/main" id="{F88DFC39-178B-4270-8D5F-8A6D9AEC8628}"/>
               </a:ext>
             </a:extLst>
           </p:cNvPr>
           <p:cNvSpPr>
-            <a:spLocks xmlns:a="http://schemas.openxmlformats.org/drawingml/2006/main" noGrp="1"/>
-          </p:cNvSpPr>
-          <p:nvPr/>
-        </p:nvSpPr>
-        <p:spPr>
-          <a:xfrm xmlns:a="http://schemas.openxmlformats.org/drawingml/2006/main">
+            <a:spLocks noGrp="1"/>
+          </p:cNvSpPr>
+          <p:nvPr/>
+        </p:nvSpPr>
+        <p:spPr>
+          <a:xfrm>
             <a:off x="657225" y="6238875"/>
             <a:ext cx="10858500" cy="228600"/>
           </a:xfrm>
-          <a:prstGeom xmlns:a="http://schemas.openxmlformats.org/drawingml/2006/main" prst="rect">
-            <a:avLst/>
-          </a:prstGeom>
-          <a:noFill xmlns:a="http://schemas.openxmlformats.org/drawingml/2006/main"/>
-          <a:ln xmlns:a="http://schemas.openxmlformats.org/drawingml/2006/main" w="0">
-            <a:noFill/>
-          </a:ln>
-        </p:spPr>
-        <p:txBody>
-          <a:bodyPr xmlns:a="http://schemas.openxmlformats.org/drawingml/2006/main" lIns="0" tIns="0" rIns="0" bIns="0" anchor="t">
-            <a:noAutofit/>
-          </a:bodyPr>
-          <a:lstStyle xmlns:a="http://schemas.openxmlformats.org/drawingml/2006/main"/>
-          <a:p xmlns:a="http://schemas.openxmlformats.org/drawingml/2006/main">
+          <a:prstGeom prst="rect">
+            <a:avLst/>
+          </a:prstGeom>
+          <a:noFill/>
+          <a:ln w="0">
+            <a:noFill/>
+          </a:ln>
+        </p:spPr>
+        <p:txBody>
+          <a:bodyPr lIns="0" tIns="0" rIns="0" bIns="0" anchor="t">
+            <a:noAutofit/>
+          </a:bodyPr>
+          <a:lstStyle/>
+          <a:p>
             <a:pPr>
               <a:defRPr sz="1125" b="0">
                 <a:solidFill>
@@ -6603,36 +6450,36 @@
       <p:sp>
         <p:nvSpPr>
           <p:cNvPr id="11" name="text-74">
-            <a:extLst xmlns:a="http://schemas.openxmlformats.org/drawingml/2006/main">
+            <a:extLst>
               <a:ext uri="{FF2B5EF4-FFF2-40B4-BE49-F238E27FC236}">
                 <a16:creationId xmlns:a16="http://schemas.microsoft.com/office/drawing/2014/main" id="{0D015030-D1C3-4098-A815-DB1D9C141179}"/>
               </a:ext>
             </a:extLst>
           </p:cNvPr>
           <p:cNvSpPr>
-            <a:spLocks xmlns:a="http://schemas.openxmlformats.org/drawingml/2006/main" noGrp="1"/>
-          </p:cNvSpPr>
-          <p:nvPr/>
-        </p:nvSpPr>
-        <p:spPr>
-          <a:xfrm xmlns:a="http://schemas.openxmlformats.org/drawingml/2006/main">
+            <a:spLocks noGrp="1"/>
+          </p:cNvSpPr>
+          <p:nvPr/>
+        </p:nvSpPr>
+        <p:spPr>
+          <a:xfrm>
             <a:off x="657225" y="6515100"/>
             <a:ext cx="10858500" cy="219075"/>
           </a:xfrm>
-          <a:prstGeom xmlns:a="http://schemas.openxmlformats.org/drawingml/2006/main" prst="rect">
-            <a:avLst/>
-          </a:prstGeom>
-          <a:noFill xmlns:a="http://schemas.openxmlformats.org/drawingml/2006/main"/>
-          <a:ln xmlns:a="http://schemas.openxmlformats.org/drawingml/2006/main" w="0">
-            <a:noFill/>
-          </a:ln>
-        </p:spPr>
-        <p:txBody>
-          <a:bodyPr xmlns:a="http://schemas.openxmlformats.org/drawingml/2006/main" lIns="0" tIns="0" rIns="0" bIns="0" anchor="t">
-            <a:noAutofit/>
-          </a:bodyPr>
-          <a:lstStyle xmlns:a="http://schemas.openxmlformats.org/drawingml/2006/main"/>
-          <a:p xmlns:a="http://schemas.openxmlformats.org/drawingml/2006/main">
+          <a:prstGeom prst="rect">
+            <a:avLst/>
+          </a:prstGeom>
+          <a:noFill/>
+          <a:ln w="0">
+            <a:noFill/>
+          </a:ln>
+        </p:spPr>
+        <p:txBody>
+          <a:bodyPr lIns="0" tIns="0" rIns="0" bIns="0" anchor="t">
+            <a:noAutofit/>
+          </a:bodyPr>
+          <a:lstStyle/>
+          <a:p>
             <a:pPr>
               <a:defRPr sz="1125" b="0">
                 <a:solidFill>
@@ -6664,6 +6511,9 @@
       </p:ext>
     </p:extLst>
   </p:cSld>
+  <p:clrMapOvr>
+    <a:masterClrMapping/>
+  </p:clrMapOvr>
 </p:sld>
 </file>
 
@@ -6909,5 +6759,254 @@
       </a:bgFillStyleLst>
     </a:fmtScheme>
   </a:themeElements>
+  <a:objectDefaults/>
+  <a:extraClrSchemeLst/>
+</a:theme>
+</file>
+
+<file path=ppt/theme/theme2.xml><?xml version="1.0" encoding="utf-8"?>
+<a:theme xmlns:a="http://schemas.openxmlformats.org/drawingml/2006/main" name="ChatGPT">
+  <a:themeElements>
+    <a:clrScheme name="ChatGPT">
+      <a:dk1>
+        <a:srgbClr val="000000"/>
+      </a:dk1>
+      <a:lt1>
+        <a:srgbClr val="FFFFFF"/>
+      </a:lt1>
+      <a:dk2>
+        <a:srgbClr val="0E2841"/>
+      </a:dk2>
+      <a:lt2>
+        <a:srgbClr val="E8E8E8"/>
+      </a:lt2>
+      <a:accent1>
+        <a:srgbClr val="156082"/>
+      </a:accent1>
+      <a:accent2>
+        <a:srgbClr val="E97132"/>
+      </a:accent2>
+      <a:accent3>
+        <a:srgbClr val="196B24"/>
+      </a:accent3>
+      <a:accent4>
+        <a:srgbClr val="0F9ED5"/>
+      </a:accent4>
+      <a:accent5>
+        <a:srgbClr val="A02B93"/>
+      </a:accent5>
+      <a:accent6>
+        <a:srgbClr val="4EA72E"/>
+      </a:accent6>
+      <a:hlink>
+        <a:srgbClr val="467886"/>
+      </a:hlink>
+      <a:folHlink>
+        <a:srgbClr val="96607D"/>
+      </a:folHlink>
+    </a:clrScheme>
+    <a:fontScheme name="Office">
+      <a:majorFont>
+        <a:latin typeface="Calibri Light"/>
+        <a:ea typeface="Calibri Light"/>
+        <a:cs typeface="Calibri Light"/>
+      </a:majorFont>
+      <a:minorFont>
+        <a:latin typeface="Calibri"/>
+        <a:ea typeface="Calibri"/>
+        <a:cs typeface="Calibri"/>
+      </a:minorFont>
+    </a:fontScheme>
+    <a:fmtScheme name="ChatGPT">
+      <a:fillStyleLst>
+        <a:solidFill>
+          <a:schemeClr val="phClr"/>
+        </a:solidFill>
+        <a:gradFill>
+          <a:gsLst>
+            <a:gs pos="0">
+              <a:schemeClr val="phClr">
+                <a:tint val="67000"/>
+                <a:lumMod val="110000"/>
+                <a:satMod val="105000"/>
+              </a:schemeClr>
+            </a:gs>
+            <a:gs pos="50000">
+              <a:schemeClr val="phClr">
+                <a:tint val="73000"/>
+                <a:lumMod val="105000"/>
+                <a:satMod val="103000"/>
+              </a:schemeClr>
+            </a:gs>
+            <a:gs pos="100000">
+              <a:schemeClr val="phClr">
+                <a:tint val="81000"/>
+                <a:lumMod val="105000"/>
+                <a:satMod val="109000"/>
+              </a:schemeClr>
+            </a:gs>
+          </a:gsLst>
+          <a:lin ang="5400000" scaled="0"/>
+        </a:gradFill>
+        <a:gradFill>
+          <a:gsLst>
+            <a:gs pos="0">
+              <a:schemeClr val="phClr">
+                <a:tint val="94000"/>
+                <a:lumMod val="102000"/>
+                <a:satMod val="103000"/>
+              </a:schemeClr>
+            </a:gs>
+            <a:gs pos="50000">
+              <a:schemeClr val="phClr">
+                <a:shade val="100000"/>
+                <a:lumMod val="100000"/>
+                <a:satMod val="110000"/>
+              </a:schemeClr>
+            </a:gs>
+            <a:gs pos="100000">
+              <a:schemeClr val="phClr">
+                <a:shade val="78000"/>
+                <a:lumMod val="99000"/>
+                <a:satMod val="120000"/>
+              </a:schemeClr>
+            </a:gs>
+          </a:gsLst>
+          <a:lin ang="5400000" scaled="0"/>
+        </a:gradFill>
+      </a:fillStyleLst>
+      <a:lnStyleLst>
+        <a:ln w="12700">
+          <a:solidFill>
+            <a:schemeClr val="phClr"/>
+          </a:solidFill>
+          <a:prstDash val="solid"/>
+        </a:ln>
+        <a:ln w="19050">
+          <a:solidFill>
+            <a:schemeClr val="phClr"/>
+          </a:solidFill>
+          <a:prstDash val="solid"/>
+        </a:ln>
+        <a:ln w="25400">
+          <a:solidFill>
+            <a:schemeClr val="phClr"/>
+          </a:solidFill>
+          <a:prstDash val="solid"/>
+        </a:ln>
+      </a:lnStyleLst>
+      <a:effectStyleLst>
+        <a:effectStyle>
+          <a:effectLst/>
+        </a:effectStyle>
+        <a:effectStyle>
+          <a:effectLst/>
+        </a:effectStyle>
+        <a:effectStyle>
+          <a:effectLst>
+            <a:outerShdw blurRad="57150" dist="19050" dir="5400000">
+              <a:srgbClr val="000000">
+                <a:alpha val="16000"/>
+              </a:srgbClr>
+            </a:outerShdw>
+          </a:effectLst>
+        </a:effectStyle>
+        <a:effectStyle>
+          <a:effectLst>
+            <a:outerShdw blurRad="19050" dist="9525" dir="5400000">
+              <a:srgbClr val="000000">
+                <a:alpha val="6000"/>
+              </a:srgbClr>
+            </a:outerShdw>
+          </a:effectLst>
+        </a:effectStyle>
+        <a:effectStyle>
+          <a:effectLst>
+            <a:outerShdw blurRad="28575" dist="9525" dir="5400000">
+              <a:srgbClr val="000000">
+                <a:alpha val="8000"/>
+              </a:srgbClr>
+            </a:outerShdw>
+          </a:effectLst>
+        </a:effectStyle>
+        <a:effectStyle>
+          <a:effectLst>
+            <a:outerShdw blurRad="57150" dist="19050" dir="5400000">
+              <a:srgbClr val="000000">
+                <a:alpha val="10000"/>
+              </a:srgbClr>
+            </a:outerShdw>
+          </a:effectLst>
+        </a:effectStyle>
+        <a:effectStyle>
+          <a:effectLst>
+            <a:outerShdw blurRad="114300" dist="38100" dir="5400000">
+              <a:srgbClr val="000000">
+                <a:alpha val="12000"/>
+              </a:srgbClr>
+            </a:outerShdw>
+          </a:effectLst>
+        </a:effectStyle>
+        <a:effectStyle>
+          <a:effectLst>
+            <a:outerShdw blurRad="171450" dist="57150" dir="5400000">
+              <a:srgbClr val="000000">
+                <a:alpha val="16000"/>
+              </a:srgbClr>
+            </a:outerShdw>
+          </a:effectLst>
+        </a:effectStyle>
+        <a:effectStyle>
+          <a:effectLst>
+            <a:outerShdw blurRad="266700" dist="95250" dir="5400000">
+              <a:srgbClr val="000000">
+                <a:alpha val="24000"/>
+              </a:srgbClr>
+            </a:outerShdw>
+          </a:effectLst>
+        </a:effectStyle>
+      </a:effectStyleLst>
+      <a:bgFillStyleLst>
+        <a:solidFill>
+          <a:schemeClr val="phClr"/>
+        </a:solidFill>
+        <a:solidFill>
+          <a:schemeClr val="phClr">
+            <a:tint val="95000"/>
+            <a:satMod val="170000"/>
+          </a:schemeClr>
+        </a:solidFill>
+        <a:gradFill>
+          <a:gsLst>
+            <a:gs pos="0">
+              <a:schemeClr val="phClr">
+                <a:tint val="93000"/>
+                <a:shade val="98000"/>
+                <a:lumMod val="102000"/>
+                <a:satMod val="150000"/>
+              </a:schemeClr>
+            </a:gs>
+            <a:gs pos="50000">
+              <a:schemeClr val="phClr">
+                <a:tint val="98000"/>
+                <a:shade val="90000"/>
+                <a:lumMod val="103000"/>
+                <a:satMod val="130000"/>
+              </a:schemeClr>
+            </a:gs>
+            <a:gs pos="100000">
+              <a:schemeClr val="phClr">
+                <a:shade val="63000"/>
+                <a:satMod val="120000"/>
+              </a:schemeClr>
+            </a:gs>
+          </a:gsLst>
+          <a:lin ang="5400000" scaled="0"/>
+        </a:gradFill>
+      </a:bgFillStyleLst>
+    </a:fmtScheme>
+  </a:themeElements>
+  <a:objectDefaults/>
+  <a:extraClrSchemeLst/>
 </a:theme>
 </file>